--- a/NYC_Taxi_BDA_Presentation.pptx
+++ b/NYC_Taxi_BDA_Presentation.pptx
@@ -3193,7 +3193,7 @@
         <p:spPr>
           <a:xfrm>
             <a:off x="548640" y="548640"/>
-            <a:ext cx="2377440" cy="28575"/>
+            <a:ext cx="2377440" cy="31750"/>
           </a:xfrm>
           <a:prstGeom prst="rect">
             <a:avLst/>
@@ -3236,7 +3236,7 @@
         <p:spPr>
           <a:xfrm>
             <a:off x="548640" y="685800"/>
-            <a:ext cx="10972800" cy="365760"/>
+            <a:ext cx="10972800" cy="411480"/>
           </a:xfrm>
           <a:prstGeom prst="rect">
             <a:avLst/>
@@ -3251,7 +3251,7 @@
           <a:p>
             <a:pPr algn="l"/>
             <a:r>
-              <a:rPr sz="1200" b="1">
+              <a:rPr sz="1400" b="1">
                 <a:solidFill>
                   <a:srgbClr val="C9A227"/>
                 </a:solidFill>
@@ -3270,8 +3270,8 @@
         </p:nvSpPr>
         <p:spPr>
           <a:xfrm>
-            <a:off x="548640" y="1097280"/>
-            <a:ext cx="10972800" cy="1097280"/>
+            <a:off x="548640" y="1143000"/>
+            <a:ext cx="10972800" cy="1280160"/>
           </a:xfrm>
           <a:prstGeom prst="rect">
             <a:avLst/>
@@ -3286,7 +3286,7 @@
           <a:p>
             <a:pPr algn="l"/>
             <a:r>
-              <a:rPr sz="5400" b="1">
+              <a:rPr sz="6400" b="1">
                 <a:solidFill>
                   <a:srgbClr val="1F3A5F"/>
                 </a:solidFill>
@@ -3305,7 +3305,7 @@
         </p:nvSpPr>
         <p:spPr>
           <a:xfrm>
-            <a:off x="548640" y="1828800"/>
+            <a:off x="548640" y="2057400"/>
             <a:ext cx="10972800" cy="822960"/>
           </a:xfrm>
           <a:prstGeom prst="rect">
@@ -3321,7 +3321,7 @@
           <a:p>
             <a:pPr algn="l"/>
             <a:r>
-              <a:rPr sz="2800" b="0">
+              <a:rPr sz="3000" b="0">
                 <a:solidFill>
                   <a:srgbClr val="222A35"/>
                 </a:solidFill>
@@ -3340,8 +3340,8 @@
         </p:nvSpPr>
         <p:spPr>
           <a:xfrm>
-            <a:off x="548640" y="2926080"/>
-            <a:ext cx="5394960" cy="2194560"/>
+            <a:off x="548640" y="3154680"/>
+            <a:ext cx="5440680" cy="2331720"/>
           </a:xfrm>
           <a:prstGeom prst="rect">
             <a:avLst/>
@@ -3383,8 +3383,8 @@
         </p:nvSpPr>
         <p:spPr>
           <a:xfrm>
-            <a:off x="777240" y="3063240"/>
-            <a:ext cx="5029200" cy="320040"/>
+            <a:off x="777240" y="3291840"/>
+            <a:ext cx="5029200" cy="365760"/>
           </a:xfrm>
           <a:prstGeom prst="rect">
             <a:avLst/>
@@ -3399,7 +3399,7 @@
           <a:p>
             <a:pPr algn="l"/>
             <a:r>
-              <a:rPr sz="1100" b="1">
+              <a:rPr sz="1300" b="1">
                 <a:solidFill>
                   <a:srgbClr val="C9A227"/>
                 </a:solidFill>
@@ -3418,7 +3418,7 @@
         </p:nvSpPr>
         <p:spPr>
           <a:xfrm>
-            <a:off x="777240" y="3383280"/>
+            <a:off x="777240" y="3703320"/>
             <a:ext cx="5029200" cy="1828800"/>
           </a:xfrm>
           <a:prstGeom prst="rect">
@@ -3438,7 +3438,7 @@
               </a:lnSpc>
             </a:pPr>
             <a:r>
-              <a:rPr sz="1500" b="1">
+              <a:rPr sz="1700" b="1">
                 <a:solidFill>
                   <a:srgbClr val="1F3A5F"/>
                 </a:solidFill>
@@ -3447,7 +3447,7 @@
               <a:t>Course</a:t>
             </a:r>
             <a:r>
-              <a:rPr sz="1500" b="0">
+              <a:rPr sz="1700" b="0">
                 <a:solidFill>
                   <a:srgbClr val="222A35"/>
                 </a:solidFill>
@@ -3463,7 +3463,7 @@
               </a:lnSpc>
             </a:pPr>
             <a:r>
-              <a:rPr sz="1500" b="1">
+              <a:rPr sz="1700" b="1">
                 <a:solidFill>
                   <a:srgbClr val="1F3A5F"/>
                 </a:solidFill>
@@ -3472,7 +3472,7 @@
               <a:t>Class</a:t>
             </a:r>
             <a:r>
-              <a:rPr sz="1500" b="0">
+              <a:rPr sz="1700" b="0">
                 <a:solidFill>
                   <a:srgbClr val="222A35"/>
                 </a:solidFill>
@@ -3488,7 +3488,7 @@
               </a:lnSpc>
             </a:pPr>
             <a:r>
-              <a:rPr sz="1500" b="1">
+              <a:rPr sz="1700" b="1">
                 <a:solidFill>
                   <a:srgbClr val="1F3A5F"/>
                 </a:solidFill>
@@ -3497,7 +3497,7 @@
               <a:t>Course Group</a:t>
             </a:r>
             <a:r>
-              <a:rPr sz="1500" b="0">
+              <a:rPr sz="1700" b="0">
                 <a:solidFill>
                   <a:srgbClr val="222A35"/>
                 </a:solidFill>
@@ -3513,7 +3513,7 @@
               </a:lnSpc>
             </a:pPr>
             <a:r>
-              <a:rPr sz="1500" b="1">
+              <a:rPr sz="1700" b="1">
                 <a:solidFill>
                   <a:srgbClr val="1F3A5F"/>
                 </a:solidFill>
@@ -3522,7 +3522,7 @@
               <a:t>Project Group #</a:t>
             </a:r>
             <a:r>
-              <a:rPr sz="1500" b="0">
+              <a:rPr sz="1700" b="0">
                 <a:solidFill>
                   <a:srgbClr val="222A35"/>
                 </a:solidFill>
@@ -3538,7 +3538,7 @@
               </a:lnSpc>
             </a:pPr>
             <a:r>
-              <a:rPr sz="1500" b="1">
+              <a:rPr sz="1700" b="1">
                 <a:solidFill>
                   <a:srgbClr val="1F3A5F"/>
                 </a:solidFill>
@@ -3547,7 +3547,7 @@
               <a:t>Institution</a:t>
             </a:r>
             <a:r>
-              <a:rPr sz="1500" b="0">
+              <a:rPr sz="1700" b="0">
                 <a:solidFill>
                   <a:srgbClr val="222A35"/>
                 </a:solidFill>
@@ -3566,8 +3566,8 @@
         </p:nvSpPr>
         <p:spPr>
           <a:xfrm>
-            <a:off x="6263640" y="2926080"/>
-            <a:ext cx="5394960" cy="2194560"/>
+            <a:off x="6263640" y="3154680"/>
+            <a:ext cx="5440680" cy="2331720"/>
           </a:xfrm>
           <a:prstGeom prst="rect">
             <a:avLst/>
@@ -3609,8 +3609,8 @@
         </p:nvSpPr>
         <p:spPr>
           <a:xfrm>
-            <a:off x="6492240" y="3063240"/>
-            <a:ext cx="5029200" cy="320040"/>
+            <a:off x="6492240" y="3291840"/>
+            <a:ext cx="5029200" cy="365760"/>
           </a:xfrm>
           <a:prstGeom prst="rect">
             <a:avLst/>
@@ -3625,13 +3625,13 @@
           <a:p>
             <a:pPr algn="l"/>
             <a:r>
-              <a:rPr sz="1100" b="1">
+              <a:rPr sz="1300" b="1">
                 <a:solidFill>
                   <a:srgbClr val="C9A227"/>
                 </a:solidFill>
                 <a:latin typeface="Calibri"/>
               </a:rPr>
-              <a:t>GROUP 17  ·  CONTRIBUTIONS</a:t>
+              <a:t>GROUP 17 · CONTRIBUTIONS</a:t>
             </a:r>
           </a:p>
         </p:txBody>
@@ -3644,8 +3644,8 @@
         </p:nvSpPr>
         <p:spPr>
           <a:xfrm>
-            <a:off x="6492240" y="3383280"/>
-            <a:ext cx="5029200" cy="1828800"/>
+            <a:off x="6492240" y="3703320"/>
+            <a:ext cx="5029200" cy="2011680"/>
           </a:xfrm>
           <a:prstGeom prst="rect">
             <a:avLst/>
@@ -3664,7 +3664,7 @@
               </a:lnSpc>
             </a:pPr>
             <a:r>
-              <a:rPr sz="1400" b="1">
+              <a:rPr sz="1600" b="1">
                 <a:solidFill>
                   <a:srgbClr val="1F3A5F"/>
                 </a:solidFill>
@@ -3673,13 +3673,13 @@
               <a:t>Malik Muhammad Hassaan</a:t>
             </a:r>
             <a:r>
-              <a:rPr sz="1400" b="0">
+              <a:rPr sz="1600" b="0">
                 <a:solidFill>
                   <a:srgbClr val="222A35"/>
                 </a:solidFill>
                 <a:latin typeface="Calibri"/>
               </a:rPr>
-              <a:t> — CMS 460233 · Data ingestion, validation, profiling</a:t>
+              <a:t> — CMS 460233 · Ingestion · Validation · Profiling · Cleaning strategy</a:t>
             </a:r>
           </a:p>
           <a:p>
@@ -3689,7 +3689,7 @@
               </a:lnSpc>
             </a:pPr>
             <a:r>
-              <a:rPr sz="1400" b="1">
+              <a:rPr sz="1600" b="1">
                 <a:solidFill>
                   <a:srgbClr val="1F3A5F"/>
                 </a:solidFill>
@@ -3698,13 +3698,13 @@
               <a:t>Muhammad Ahmed</a:t>
             </a:r>
             <a:r>
-              <a:rPr sz="1400" b="0">
+              <a:rPr sz="1600" b="0">
                 <a:solidFill>
                   <a:srgbClr val="222A35"/>
                 </a:solidFill>
                 <a:latin typeface="Calibri"/>
               </a:rPr>
-              <a:t> — CMS 456679 · ETL pipeline, business-question SQL, optimizations</a:t>
+              <a:t> — CMS 456679 · Spark ETL · Dimensional model · Analytics · Optimizations</a:t>
             </a:r>
           </a:p>
         </p:txBody>
@@ -3717,8 +3717,8 @@
         </p:nvSpPr>
         <p:spPr>
           <a:xfrm>
-            <a:off x="548640" y="5989320"/>
-            <a:ext cx="11155680" cy="28575"/>
+            <a:off x="548640" y="5943600"/>
+            <a:ext cx="11155680" cy="31750"/>
           </a:xfrm>
           <a:prstGeom prst="rect">
             <a:avLst/>
@@ -3760,7 +3760,7 @@
         </p:nvSpPr>
         <p:spPr>
           <a:xfrm>
-            <a:off x="548640" y="6080760"/>
+            <a:off x="548640" y="6035040"/>
             <a:ext cx="11155680" cy="365760"/>
           </a:xfrm>
           <a:prstGeom prst="rect">
@@ -3776,13 +3776,13 @@
           <a:p>
             <a:pPr algn="l"/>
             <a:r>
-              <a:rPr sz="1200" b="0">
-                <a:solidFill>
-                  <a:srgbClr val="6B7380"/>
-                </a:solidFill>
-                <a:latin typeface="Calibri"/>
-              </a:rPr>
-              <a:t>End-to-end pipeline · 2.96M trips · HDFS warehouse · Spark SQL analytics · automated reporting</a:t>
+              <a:rPr sz="1400" b="0">
+                <a:solidFill>
+                  <a:srgbClr val="57606E"/>
+                </a:solidFill>
+                <a:latin typeface="Calibri"/>
+              </a:rPr>
+              <a:t>End-to-end pipeline  ·  2.96M trips  ·  HDFS warehouse  ·  Spark SQL  ·  automated reporting</a:t>
             </a:r>
           </a:p>
         </p:txBody>
@@ -3959,20 +3959,55 @@
           <a:p>
             <a:pPr algn="l"/>
             <a:r>
+              <a:rPr sz="1100" b="0">
+                <a:solidFill>
+                  <a:srgbClr val="57606E"/>
+                </a:solidFill>
+                <a:latin typeface="Calibri"/>
+              </a:rPr>
+              <a:t>Insights</a:t>
+            </a:r>
+          </a:p>
+        </p:txBody>
+      </p:sp>
+      <p:sp>
+        <p:nvSpPr>
+          <p:cNvPr id="6" name="TextBox 5"/>
+          <p:cNvSpPr txBox="1"/>
+          <p:nvPr/>
+        </p:nvSpPr>
+        <p:spPr>
+          <a:xfrm>
+            <a:off x="457200" y="6693408"/>
+            <a:ext cx="7315200" cy="228600"/>
+          </a:xfrm>
+          <a:prstGeom prst="rect">
+            <a:avLst/>
+          </a:prstGeom>
+          <a:noFill/>
+        </p:spPr>
+        <p:txBody>
+          <a:bodyPr wrap="square" lIns="0" rIns="0" tIns="0" bIns="0">
+            <a:spAutoFit/>
+          </a:bodyPr>
+          <a:lstStyle/>
+          <a:p>
+            <a:pPr algn="l"/>
+            <a:r>
               <a:rPr sz="1000" b="0">
                 <a:solidFill>
-                  <a:srgbClr val="6B7380"/>
-                </a:solidFill>
-                <a:latin typeface="Calibri"/>
-              </a:rPr>
-              <a:t>Insights</a:t>
-            </a:r>
-          </a:p>
-        </p:txBody>
-      </p:sp>
-      <p:sp>
-        <p:nvSpPr>
-          <p:cNvPr id="6" name="TextBox 5"/>
+                  <a:srgbClr val="57606E"/>
+                </a:solidFill>
+                <a:latin typeface="Calibri"/>
+              </a:rPr>
+              <a:t>Presenter: Ahmed</a:t>
+            </a:r>
+          </a:p>
+        </p:txBody>
+      </p:sp>
+      <p:sp>
+        <p:nvSpPr>
+          <p:cNvPr id="7" name="TextBox 6"/>
           <p:cNvSpPr txBox="1"/>
           <p:nvPr/>
         </p:nvSpPr>
@@ -3994,27 +4029,62 @@
           <a:p>
             <a:pPr algn="r"/>
             <a:r>
+              <a:rPr sz="1100" b="0">
+                <a:solidFill>
+                  <a:srgbClr val="57606E"/>
+                </a:solidFill>
+                <a:latin typeface="Calibri"/>
+              </a:rPr>
+              <a:t>10 / 11</a:t>
+            </a:r>
+          </a:p>
+        </p:txBody>
+      </p:sp>
+      <p:sp>
+        <p:nvSpPr>
+          <p:cNvPr id="8" name="TextBox 7"/>
+          <p:cNvSpPr txBox="1"/>
+          <p:nvPr/>
+        </p:nvSpPr>
+        <p:spPr>
+          <a:xfrm>
+            <a:off x="7315200" y="6693408"/>
+            <a:ext cx="4572000" cy="228600"/>
+          </a:xfrm>
+          <a:prstGeom prst="rect">
+            <a:avLst/>
+          </a:prstGeom>
+          <a:noFill/>
+        </p:spPr>
+        <p:txBody>
+          <a:bodyPr wrap="square" lIns="0" rIns="0" tIns="0" bIns="0">
+            <a:spAutoFit/>
+          </a:bodyPr>
+          <a:lstStyle/>
+          <a:p>
+            <a:pPr algn="r"/>
+            <a:r>
               <a:rPr sz="1000" b="0">
                 <a:solidFill>
-                  <a:srgbClr val="6B7380"/>
-                </a:solidFill>
-                <a:latin typeface="Calibri"/>
-              </a:rPr>
-              <a:t>10 / 11</a:t>
-            </a:r>
-          </a:p>
-        </p:txBody>
-      </p:sp>
-      <p:sp>
-        <p:nvSpPr>
-          <p:cNvPr id="7" name="TextBox 6"/>
-          <p:cNvSpPr txBox="1"/>
-          <p:nvPr/>
-        </p:nvSpPr>
-        <p:spPr>
-          <a:xfrm>
-            <a:off x="457200" y="6693408"/>
-            <a:ext cx="7315200" cy="228600"/>
+                  <a:srgbClr val="57606E"/>
+                </a:solidFill>
+                <a:latin typeface="Calibri"/>
+              </a:rPr>
+              <a:t>Group 17  ·  BSCS-13A  ·  BDA</a:t>
+            </a:r>
+          </a:p>
+        </p:txBody>
+      </p:sp>
+      <p:sp>
+        <p:nvSpPr>
+          <p:cNvPr id="9" name="TextBox 8"/>
+          <p:cNvSpPr txBox="1"/>
+          <p:nvPr/>
+        </p:nvSpPr>
+        <p:spPr>
+          <a:xfrm>
+            <a:off x="502920" y="411480"/>
+            <a:ext cx="10058400" cy="365760"/>
           </a:xfrm>
           <a:prstGeom prst="rect">
             <a:avLst/>
@@ -4029,27 +4099,27 @@
           <a:p>
             <a:pPr algn="l"/>
             <a:r>
-              <a:rPr sz="900" b="0">
-                <a:solidFill>
-                  <a:srgbClr val="6B7380"/>
-                </a:solidFill>
-                <a:latin typeface="Calibri"/>
-              </a:rPr>
-              <a:t>NYC Yellow Taxi Pipeline · Group 17 · BSCS-13A</a:t>
-            </a:r>
-          </a:p>
-        </p:txBody>
-      </p:sp>
-      <p:sp>
-        <p:nvSpPr>
-          <p:cNvPr id="8" name="TextBox 7"/>
-          <p:cNvSpPr txBox="1"/>
-          <p:nvPr/>
-        </p:nvSpPr>
-        <p:spPr>
-          <a:xfrm>
-            <a:off x="502920" y="411480"/>
-            <a:ext cx="10058400" cy="320040"/>
+              <a:rPr sz="1300" b="1">
+                <a:solidFill>
+                  <a:srgbClr val="C9A227"/>
+                </a:solidFill>
+                <a:latin typeface="Calibri"/>
+              </a:rPr>
+              <a:t>SLIDE 5</a:t>
+            </a:r>
+          </a:p>
+        </p:txBody>
+      </p:sp>
+      <p:sp>
+        <p:nvSpPr>
+          <p:cNvPr id="10" name="TextBox 9"/>
+          <p:cNvSpPr txBox="1"/>
+          <p:nvPr/>
+        </p:nvSpPr>
+        <p:spPr>
+          <a:xfrm>
+            <a:off x="502920" y="777240"/>
+            <a:ext cx="10972800" cy="868680"/>
           </a:xfrm>
           <a:prstGeom prst="rect">
             <a:avLst/>
@@ -4064,42 +4134,7 @@
           <a:p>
             <a:pPr algn="l"/>
             <a:r>
-              <a:rPr sz="1100" b="1">
-                <a:solidFill>
-                  <a:srgbClr val="C9A227"/>
-                </a:solidFill>
-                <a:latin typeface="Calibri"/>
-              </a:rPr>
-              <a:t>SLIDE 5</a:t>
-            </a:r>
-          </a:p>
-        </p:txBody>
-      </p:sp>
-      <p:sp>
-        <p:nvSpPr>
-          <p:cNvPr id="9" name="TextBox 8"/>
-          <p:cNvSpPr txBox="1"/>
-          <p:nvPr/>
-        </p:nvSpPr>
-        <p:spPr>
-          <a:xfrm>
-            <a:off x="502920" y="713232"/>
-            <a:ext cx="10972800" cy="777240"/>
-          </a:xfrm>
-          <a:prstGeom prst="rect">
-            <a:avLst/>
-          </a:prstGeom>
-          <a:noFill/>
-        </p:spPr>
-        <p:txBody>
-          <a:bodyPr wrap="square" lIns="0" rIns="0" tIns="0" bIns="0">
-            <a:spAutoFit/>
-          </a:bodyPr>
-          <a:lstStyle/>
-          <a:p>
-            <a:pPr algn="l"/>
-            <a:r>
-              <a:rPr sz="3200" b="1">
+              <a:rPr sz="3600" b="1">
                 <a:solidFill>
                   <a:srgbClr val="1F3A5F"/>
                 </a:solidFill>
@@ -4112,14 +4147,14 @@
       </p:sp>
       <p:sp>
         <p:nvSpPr>
-          <p:cNvPr id="10" name="Rectangle 9"/>
+          <p:cNvPr id="11" name="Rectangle 10"/>
           <p:cNvSpPr/>
           <p:nvPr/>
         </p:nvSpPr>
         <p:spPr>
           <a:xfrm>
-            <a:off x="502920" y="1417320"/>
-            <a:ext cx="548640" cy="28575"/>
+            <a:off x="502920" y="1554480"/>
+            <a:ext cx="640080" cy="31750"/>
           </a:xfrm>
           <a:prstGeom prst="rect">
             <a:avLst/>
@@ -4155,13 +4190,13 @@
       </p:sp>
       <p:sp>
         <p:nvSpPr>
-          <p:cNvPr id="11" name="TextBox 10"/>
-          <p:cNvSpPr txBox="1"/>
-          <p:nvPr/>
-        </p:nvSpPr>
-        <p:spPr>
-          <a:xfrm>
-            <a:off x="502920" y="1783080"/>
+          <p:cNvPr id="12" name="TextBox 11"/>
+          <p:cNvSpPr txBox="1"/>
+          <p:nvPr/>
+        </p:nvSpPr>
+        <p:spPr>
+          <a:xfrm>
+            <a:off x="502920" y="1828800"/>
             <a:ext cx="11155680" cy="4480560"/>
           </a:xfrm>
           <a:prstGeom prst="rect">
@@ -4177,151 +4212,151 @@
           <a:p>
             <a:pPr algn="l">
               <a:lnSpc>
-                <a:spcPct val="135000"/>
+                <a:spcPct val="140000"/>
               </a:lnSpc>
             </a:pPr>
             <a:r>
-              <a:rPr sz="1400" b="1">
+              <a:rPr sz="1600" b="1">
                 <a:solidFill>
                   <a:srgbClr val="1F3A5F"/>
                 </a:solidFill>
                 <a:latin typeface="Calibri"/>
               </a:rPr>
-              <a:t>•  Demand is highly time-bound</a:t>
-            </a:r>
-            <a:r>
-              <a:rPr sz="1400" b="0">
+              <a:t>•  Demand is time-bound</a:t>
+            </a:r>
+            <a:r>
+              <a:rPr sz="1600" b="0">
                 <a:solidFill>
                   <a:srgbClr val="222A35"/>
                 </a:solidFill>
                 <a:latin typeface="Calibri"/>
               </a:rPr>
-              <a:t> — Peak 5–7 PM and pre-dawn lulls suggest dynamic supply / surge windows.</a:t>
+              <a:t> — Peak 5–7 PM, dawn lull → dynamic dispatch / surge windows.</a:t>
             </a:r>
           </a:p>
           <a:p>
             <a:pPr algn="l">
               <a:lnSpc>
-                <a:spcPct val="135000"/>
+                <a:spcPct val="140000"/>
               </a:lnSpc>
             </a:pPr>
             <a:r>
-              <a:rPr sz="1400" b="1">
+              <a:rPr sz="1600" b="1">
                 <a:solidFill>
                   <a:srgbClr val="1F3A5F"/>
                 </a:solidFill>
                 <a:latin typeface="Calibri"/>
               </a:rPr>
-              <a:t>•  Distance is the dominant fare driver</a:t>
-            </a:r>
-            <a:r>
-              <a:rPr sz="1400" b="0">
+              <a:t>•  Distance dominates fare</a:t>
+            </a:r>
+            <a:r>
+              <a:rPr sz="1600" b="0">
                 <a:solidFill>
                   <a:srgbClr val="222A35"/>
                 </a:solidFill>
                 <a:latin typeface="Calibri"/>
               </a:rPr>
-              <a:t> — Strong positive trend supports predictable, distance-based pricing.</a:t>
+              <a:t> — Strong positive trend → predictable distance-based pricing.</a:t>
             </a:r>
           </a:p>
           <a:p>
             <a:pPr algn="l">
               <a:lnSpc>
-                <a:spcPct val="135000"/>
+                <a:spcPct val="140000"/>
               </a:lnSpc>
             </a:pPr>
             <a:r>
-              <a:rPr sz="1400" b="1">
+              <a:rPr sz="1600" b="1">
                 <a:solidFill>
                   <a:srgbClr val="1F3A5F"/>
                 </a:solidFill>
                 <a:latin typeface="Calibri"/>
               </a:rPr>
-              <a:t>•  NYC taxis are effectively cashless</a:t>
-            </a:r>
-            <a:r>
-              <a:rPr sz="1400" b="0">
+              <a:t>•  NYC taxis are cashless</a:t>
+            </a:r>
+            <a:r>
+              <a:rPr sz="1600" b="0">
                 <a:solidFill>
                   <a:srgbClr val="222A35"/>
                 </a:solidFill>
                 <a:latin typeface="Calibri"/>
               </a:rPr>
-              <a:t> — Credit card holds 80%+ share in the busiest zones — invest in card UX.</a:t>
+              <a:t> — Credit card 80%+ in busiest zones → invest in card UX.</a:t>
             </a:r>
           </a:p>
           <a:p>
             <a:pPr algn="l">
               <a:lnSpc>
-                <a:spcPct val="135000"/>
+                <a:spcPct val="140000"/>
               </a:lnSpc>
             </a:pPr>
             <a:r>
-              <a:rPr sz="1400" b="1">
+              <a:rPr sz="1600" b="1">
                 <a:solidFill>
                   <a:srgbClr val="1F3A5F"/>
                 </a:solidFill>
                 <a:latin typeface="Calibri"/>
               </a:rPr>
-              <a:t>•  Tip behaviour is payment-driven</a:t>
-            </a:r>
-            <a:r>
-              <a:rPr sz="1400" b="0">
+              <a:t>•  Tipping is payment-driven</a:t>
+            </a:r>
+            <a:r>
+              <a:rPr sz="1600" b="0">
                 <a:solidFill>
                   <a:srgbClr val="222A35"/>
                 </a:solidFill>
                 <a:latin typeface="Calibri"/>
               </a:rPr>
-              <a:t> — Card riders tip materially; cash / no-charge segments tip near zero.</a:t>
+              <a:t> — Card riders tip materially; cash / disputes ≈ 0.</a:t>
             </a:r>
           </a:p>
           <a:p>
             <a:pPr algn="l">
               <a:lnSpc>
-                <a:spcPct val="135000"/>
+                <a:spcPct val="140000"/>
               </a:lnSpc>
             </a:pPr>
             <a:r>
-              <a:rPr sz="1400" b="1">
+              <a:rPr sz="1600" b="1">
                 <a:solidFill>
                   <a:srgbClr val="1F3A5F"/>
                 </a:solidFill>
                 <a:latin typeface="Calibri"/>
               </a:rPr>
-              <a:t>•  Revenue concentrates in a handful of OD pairs</a:t>
-            </a:r>
-            <a:r>
-              <a:rPr sz="1400" b="0">
+              <a:t>•  Revenue concentrated</a:t>
+            </a:r>
+            <a:r>
+              <a:rPr sz="1600" b="0">
                 <a:solidFill>
                   <a:srgbClr val="222A35"/>
                 </a:solidFill>
                 <a:latin typeface="Calibri"/>
               </a:rPr>
-              <a:t> — Manhattan core (161/236/237) and JFK (132) drive disproportionate revenue.</a:t>
+              <a:t> — Manhattan core (161/236/237) + JFK (132) drive most revenue.</a:t>
             </a:r>
           </a:p>
           <a:p>
             <a:pPr algn="l">
               <a:lnSpc>
-                <a:spcPct val="135000"/>
+                <a:spcPct val="140000"/>
               </a:lnSpc>
             </a:pPr>
             <a:r>
-              <a:rPr sz="1400" b="1">
+              <a:rPr sz="1600" b="1">
                 <a:solidFill>
                   <a:srgbClr val="1F3A5F"/>
                 </a:solidFill>
                 <a:latin typeface="Calibri"/>
               </a:rPr>
-              <a:t>•  Data quality discipline pays off</a:t>
-            </a:r>
-            <a:r>
-              <a:rPr sz="1400" b="0">
+              <a:t>•  Data quality discipline</a:t>
+            </a:r>
+            <a:r>
+              <a:rPr sz="1600" b="0">
                 <a:solidFill>
                   <a:srgbClr val="222A35"/>
                 </a:solidFill>
                 <a:latin typeface="Calibri"/>
               </a:rPr>
-              <a:t> — ETL preserved all 2.96M trips while neutralizing nulls, outliers and impossible values.</a:t>
+              <a:t> — All 2.96M rows preserved · 0 nulls in keys (etl_summary.json).</a:t>
             </a:r>
           </a:p>
         </p:txBody>
@@ -4498,20 +4533,55 @@
           <a:p>
             <a:pPr algn="l"/>
             <a:r>
+              <a:rPr sz="1100" b="0">
+                <a:solidFill>
+                  <a:srgbClr val="57606E"/>
+                </a:solidFill>
+                <a:latin typeface="Calibri"/>
+              </a:rPr>
+              <a:t>References</a:t>
+            </a:r>
+          </a:p>
+        </p:txBody>
+      </p:sp>
+      <p:sp>
+        <p:nvSpPr>
+          <p:cNvPr id="6" name="TextBox 5"/>
+          <p:cNvSpPr txBox="1"/>
+          <p:nvPr/>
+        </p:nvSpPr>
+        <p:spPr>
+          <a:xfrm>
+            <a:off x="457200" y="6693408"/>
+            <a:ext cx="7315200" cy="228600"/>
+          </a:xfrm>
+          <a:prstGeom prst="rect">
+            <a:avLst/>
+          </a:prstGeom>
+          <a:noFill/>
+        </p:spPr>
+        <p:txBody>
+          <a:bodyPr wrap="square" lIns="0" rIns="0" tIns="0" bIns="0">
+            <a:spAutoFit/>
+          </a:bodyPr>
+          <a:lstStyle/>
+          <a:p>
+            <a:pPr algn="l"/>
+            <a:r>
               <a:rPr sz="1000" b="0">
                 <a:solidFill>
-                  <a:srgbClr val="6B7380"/>
-                </a:solidFill>
-                <a:latin typeface="Calibri"/>
-              </a:rPr>
-              <a:t>References</a:t>
-            </a:r>
-          </a:p>
-        </p:txBody>
-      </p:sp>
-      <p:sp>
-        <p:nvSpPr>
-          <p:cNvPr id="6" name="TextBox 5"/>
+                  <a:srgbClr val="57606E"/>
+                </a:solidFill>
+                <a:latin typeface="Calibri"/>
+              </a:rPr>
+              <a:t>Presenter: Ahmed</a:t>
+            </a:r>
+          </a:p>
+        </p:txBody>
+      </p:sp>
+      <p:sp>
+        <p:nvSpPr>
+          <p:cNvPr id="7" name="TextBox 6"/>
           <p:cNvSpPr txBox="1"/>
           <p:nvPr/>
         </p:nvSpPr>
@@ -4533,27 +4603,62 @@
           <a:p>
             <a:pPr algn="r"/>
             <a:r>
+              <a:rPr sz="1100" b="0">
+                <a:solidFill>
+                  <a:srgbClr val="57606E"/>
+                </a:solidFill>
+                <a:latin typeface="Calibri"/>
+              </a:rPr>
+              <a:t>11 / 11</a:t>
+            </a:r>
+          </a:p>
+        </p:txBody>
+      </p:sp>
+      <p:sp>
+        <p:nvSpPr>
+          <p:cNvPr id="8" name="TextBox 7"/>
+          <p:cNvSpPr txBox="1"/>
+          <p:nvPr/>
+        </p:nvSpPr>
+        <p:spPr>
+          <a:xfrm>
+            <a:off x="7315200" y="6693408"/>
+            <a:ext cx="4572000" cy="228600"/>
+          </a:xfrm>
+          <a:prstGeom prst="rect">
+            <a:avLst/>
+          </a:prstGeom>
+          <a:noFill/>
+        </p:spPr>
+        <p:txBody>
+          <a:bodyPr wrap="square" lIns="0" rIns="0" tIns="0" bIns="0">
+            <a:spAutoFit/>
+          </a:bodyPr>
+          <a:lstStyle/>
+          <a:p>
+            <a:pPr algn="r"/>
+            <a:r>
               <a:rPr sz="1000" b="0">
                 <a:solidFill>
-                  <a:srgbClr val="6B7380"/>
-                </a:solidFill>
-                <a:latin typeface="Calibri"/>
-              </a:rPr>
-              <a:t>11 / 11</a:t>
-            </a:r>
-          </a:p>
-        </p:txBody>
-      </p:sp>
-      <p:sp>
-        <p:nvSpPr>
-          <p:cNvPr id="7" name="TextBox 6"/>
-          <p:cNvSpPr txBox="1"/>
-          <p:nvPr/>
-        </p:nvSpPr>
-        <p:spPr>
-          <a:xfrm>
-            <a:off x="457200" y="6693408"/>
-            <a:ext cx="7315200" cy="228600"/>
+                  <a:srgbClr val="57606E"/>
+                </a:solidFill>
+                <a:latin typeface="Calibri"/>
+              </a:rPr>
+              <a:t>Group 17  ·  BSCS-13A  ·  BDA</a:t>
+            </a:r>
+          </a:p>
+        </p:txBody>
+      </p:sp>
+      <p:sp>
+        <p:nvSpPr>
+          <p:cNvPr id="9" name="TextBox 8"/>
+          <p:cNvSpPr txBox="1"/>
+          <p:nvPr/>
+        </p:nvSpPr>
+        <p:spPr>
+          <a:xfrm>
+            <a:off x="502920" y="411480"/>
+            <a:ext cx="10058400" cy="365760"/>
           </a:xfrm>
           <a:prstGeom prst="rect">
             <a:avLst/>
@@ -4568,27 +4673,27 @@
           <a:p>
             <a:pPr algn="l"/>
             <a:r>
-              <a:rPr sz="900" b="0">
-                <a:solidFill>
-                  <a:srgbClr val="6B7380"/>
-                </a:solidFill>
-                <a:latin typeface="Calibri"/>
-              </a:rPr>
-              <a:t>NYC Yellow Taxi Pipeline · Group 17 · BSCS-13A</a:t>
-            </a:r>
-          </a:p>
-        </p:txBody>
-      </p:sp>
-      <p:sp>
-        <p:nvSpPr>
-          <p:cNvPr id="8" name="TextBox 7"/>
-          <p:cNvSpPr txBox="1"/>
-          <p:nvPr/>
-        </p:nvSpPr>
-        <p:spPr>
-          <a:xfrm>
-            <a:off x="502920" y="411480"/>
-            <a:ext cx="10058400" cy="320040"/>
+              <a:rPr sz="1300" b="1">
+                <a:solidFill>
+                  <a:srgbClr val="C9A227"/>
+                </a:solidFill>
+                <a:latin typeface="Calibri"/>
+              </a:rPr>
+              <a:t>SLIDE 6</a:t>
+            </a:r>
+          </a:p>
+        </p:txBody>
+      </p:sp>
+      <p:sp>
+        <p:nvSpPr>
+          <p:cNvPr id="10" name="TextBox 9"/>
+          <p:cNvSpPr txBox="1"/>
+          <p:nvPr/>
+        </p:nvSpPr>
+        <p:spPr>
+          <a:xfrm>
+            <a:off x="502920" y="777240"/>
+            <a:ext cx="10972800" cy="868680"/>
           </a:xfrm>
           <a:prstGeom prst="rect">
             <a:avLst/>
@@ -4603,42 +4708,7 @@
           <a:p>
             <a:pPr algn="l"/>
             <a:r>
-              <a:rPr sz="1100" b="1">
-                <a:solidFill>
-                  <a:srgbClr val="C9A227"/>
-                </a:solidFill>
-                <a:latin typeface="Calibri"/>
-              </a:rPr>
-              <a:t>SLIDE 6</a:t>
-            </a:r>
-          </a:p>
-        </p:txBody>
-      </p:sp>
-      <p:sp>
-        <p:nvSpPr>
-          <p:cNvPr id="9" name="TextBox 8"/>
-          <p:cNvSpPr txBox="1"/>
-          <p:nvPr/>
-        </p:nvSpPr>
-        <p:spPr>
-          <a:xfrm>
-            <a:off x="502920" y="713232"/>
-            <a:ext cx="10972800" cy="777240"/>
-          </a:xfrm>
-          <a:prstGeom prst="rect">
-            <a:avLst/>
-          </a:prstGeom>
-          <a:noFill/>
-        </p:spPr>
-        <p:txBody>
-          <a:bodyPr wrap="square" lIns="0" rIns="0" tIns="0" bIns="0">
-            <a:spAutoFit/>
-          </a:bodyPr>
-          <a:lstStyle/>
-          <a:p>
-            <a:pPr algn="l"/>
-            <a:r>
-              <a:rPr sz="3200" b="1">
+              <a:rPr sz="3600" b="1">
                 <a:solidFill>
                   <a:srgbClr val="1F3A5F"/>
                 </a:solidFill>
@@ -4651,14 +4721,14 @@
       </p:sp>
       <p:sp>
         <p:nvSpPr>
-          <p:cNvPr id="10" name="Rectangle 9"/>
+          <p:cNvPr id="11" name="Rectangle 10"/>
           <p:cNvSpPr/>
           <p:nvPr/>
         </p:nvSpPr>
         <p:spPr>
           <a:xfrm>
-            <a:off x="502920" y="1417320"/>
-            <a:ext cx="548640" cy="28575"/>
+            <a:off x="502920" y="1554480"/>
+            <a:ext cx="640080" cy="31750"/>
           </a:xfrm>
           <a:prstGeom prst="rect">
             <a:avLst/>
@@ -4694,7 +4764,7 @@
       </p:sp>
       <p:sp>
         <p:nvSpPr>
-          <p:cNvPr id="11" name="Rectangle 10"/>
+          <p:cNvPr id="12" name="Rectangle 11"/>
           <p:cNvSpPr/>
           <p:nvPr/>
         </p:nvSpPr>
@@ -4737,7 +4807,7 @@
       </p:sp>
       <p:sp>
         <p:nvSpPr>
-          <p:cNvPr id="12" name="TextBox 11"/>
+          <p:cNvPr id="13" name="TextBox 12"/>
           <p:cNvSpPr txBox="1"/>
           <p:nvPr/>
         </p:nvSpPr>
@@ -4759,7 +4829,7 @@
           <a:p>
             <a:pPr algn="l"/>
             <a:r>
-              <a:rPr sz="1100" b="1">
+              <a:rPr sz="1200" b="1">
                 <a:solidFill>
                   <a:srgbClr val="C9A227"/>
                 </a:solidFill>
@@ -4772,13 +4842,48 @@
       </p:sp>
       <p:sp>
         <p:nvSpPr>
-          <p:cNvPr id="13" name="TextBox 12"/>
+          <p:cNvPr id="14" name="TextBox 13"/>
           <p:cNvSpPr txBox="1"/>
           <p:nvPr/>
         </p:nvSpPr>
         <p:spPr>
           <a:xfrm>
             <a:off x="777240" y="2331720"/>
+            <a:ext cx="10515600" cy="502920"/>
+          </a:xfrm>
+          <a:prstGeom prst="rect">
+            <a:avLst/>
+          </a:prstGeom>
+          <a:noFill/>
+        </p:spPr>
+        <p:txBody>
+          <a:bodyPr wrap="square" lIns="0" rIns="0" tIns="0" bIns="0">
+            <a:spAutoFit/>
+          </a:bodyPr>
+          <a:lstStyle/>
+          <a:p>
+            <a:pPr algn="l"/>
+            <a:r>
+              <a:rPr sz="2200" b="1">
+                <a:solidFill>
+                  <a:srgbClr val="1F3A5F"/>
+                </a:solidFill>
+                <a:latin typeface="Calibri"/>
+              </a:rPr>
+              <a:t>NYC TLC Yellow Taxi Trip Records (Jan 2024)</a:t>
+            </a:r>
+          </a:p>
+        </p:txBody>
+      </p:sp>
+      <p:sp>
+        <p:nvSpPr>
+          <p:cNvPr id="15" name="TextBox 14"/>
+          <p:cNvSpPr txBox="1"/>
+          <p:nvPr/>
+        </p:nvSpPr>
+        <p:spPr>
+          <a:xfrm>
+            <a:off x="777240" y="2880360"/>
             <a:ext cx="10515600" cy="457200"/>
           </a:xfrm>
           <a:prstGeom prst="rect">
@@ -4794,27 +4899,27 @@
           <a:p>
             <a:pPr algn="l"/>
             <a:r>
-              <a:rPr sz="2000" b="1">
-                <a:solidFill>
-                  <a:srgbClr val="1F3A5F"/>
-                </a:solidFill>
-                <a:latin typeface="Calibri"/>
-              </a:rPr>
-              <a:t>NYC TLC Yellow Taxi Trip Records (Jan 2024)</a:t>
-            </a:r>
-          </a:p>
-        </p:txBody>
-      </p:sp>
-      <p:sp>
-        <p:nvSpPr>
-          <p:cNvPr id="14" name="TextBox 13"/>
-          <p:cNvSpPr txBox="1"/>
-          <p:nvPr/>
-        </p:nvSpPr>
-        <p:spPr>
-          <a:xfrm>
-            <a:off x="777240" y="2834640"/>
-            <a:ext cx="10515600" cy="457200"/>
+              <a:rPr sz="1600" b="0">
+                <a:solidFill>
+                  <a:srgbClr val="222A35"/>
+                </a:solidFill>
+                <a:latin typeface="Calibri"/>
+              </a:rPr>
+              <a:t>https://www.nyc.gov/site/tlc/about/tlc-trip-record-data.page</a:t>
+            </a:r>
+          </a:p>
+        </p:txBody>
+      </p:sp>
+      <p:sp>
+        <p:nvSpPr>
+          <p:cNvPr id="16" name="TextBox 15"/>
+          <p:cNvSpPr txBox="1"/>
+          <p:nvPr/>
+        </p:nvSpPr>
+        <p:spPr>
+          <a:xfrm>
+            <a:off x="777240" y="3246120"/>
+            <a:ext cx="10515600" cy="365760"/>
           </a:xfrm>
           <a:prstGeom prst="rect">
             <a:avLst/>
@@ -4831,53 +4936,18 @@
             <a:r>
               <a:rPr sz="1400" b="0">
                 <a:solidFill>
-                  <a:srgbClr val="222A35"/>
-                </a:solidFill>
-                <a:latin typeface="Calibri"/>
-              </a:rPr>
-              <a:t>https://www.nyc.gov/site/tlc/about/tlc-trip-record-data.page</a:t>
-            </a:r>
-          </a:p>
-        </p:txBody>
-      </p:sp>
-      <p:sp>
-        <p:nvSpPr>
-          <p:cNvPr id="15" name="TextBox 14"/>
-          <p:cNvSpPr txBox="1"/>
-          <p:nvPr/>
-        </p:nvSpPr>
-        <p:spPr>
-          <a:xfrm>
-            <a:off x="777240" y="3154680"/>
-            <a:ext cx="10515600" cy="457200"/>
-          </a:xfrm>
-          <a:prstGeom prst="rect">
-            <a:avLst/>
-          </a:prstGeom>
-          <a:noFill/>
-        </p:spPr>
-        <p:txBody>
-          <a:bodyPr wrap="square" lIns="0" rIns="0" tIns="0" bIns="0">
-            <a:spAutoFit/>
-          </a:bodyPr>
-          <a:lstStyle/>
-          <a:p>
-            <a:pPr algn="l"/>
-            <a:r>
-              <a:rPr sz="1200" b="0">
-                <a:solidFill>
-                  <a:srgbClr val="6B7380"/>
-                </a:solidFill>
-                <a:latin typeface="Calibri"/>
-              </a:rPr>
-              <a:t>Direct file: yellow_tripdata_2024-01.parquet</a:t>
-            </a:r>
-          </a:p>
-        </p:txBody>
-      </p:sp>
-      <p:sp>
-        <p:nvSpPr>
-          <p:cNvPr id="16" name="Rectangle 15"/>
+                  <a:srgbClr val="57606E"/>
+                </a:solidFill>
+                <a:latin typeface="Calibri"/>
+              </a:rPr>
+              <a:t>File: yellow_tripdata_2024-01.parquet</a:t>
+            </a:r>
+          </a:p>
+        </p:txBody>
+      </p:sp>
+      <p:sp>
+        <p:nvSpPr>
+          <p:cNvPr id="17" name="Rectangle 16"/>
           <p:cNvSpPr/>
           <p:nvPr/>
         </p:nvSpPr>
@@ -4920,7 +4990,7 @@
       </p:sp>
       <p:sp>
         <p:nvSpPr>
-          <p:cNvPr id="17" name="TextBox 16"/>
+          <p:cNvPr id="18" name="TextBox 17"/>
           <p:cNvSpPr txBox="1"/>
           <p:nvPr/>
         </p:nvSpPr>
@@ -4942,7 +5012,7 @@
           <a:p>
             <a:pPr algn="l"/>
             <a:r>
-              <a:rPr sz="1100" b="1">
+              <a:rPr sz="1200" b="1">
                 <a:solidFill>
                   <a:srgbClr val="C9A227"/>
                 </a:solidFill>
@@ -4955,13 +5025,48 @@
       </p:sp>
       <p:sp>
         <p:nvSpPr>
-          <p:cNvPr id="18" name="TextBox 17"/>
+          <p:cNvPr id="19" name="TextBox 18"/>
           <p:cNvSpPr txBox="1"/>
           <p:nvPr/>
         </p:nvSpPr>
         <p:spPr>
           <a:xfrm>
             <a:off x="777240" y="4343400"/>
+            <a:ext cx="10515600" cy="502920"/>
+          </a:xfrm>
+          <a:prstGeom prst="rect">
+            <a:avLst/>
+          </a:prstGeom>
+          <a:noFill/>
+        </p:spPr>
+        <p:txBody>
+          <a:bodyPr wrap="square" lIns="0" rIns="0" tIns="0" bIns="0">
+            <a:spAutoFit/>
+          </a:bodyPr>
+          <a:lstStyle/>
+          <a:p>
+            <a:pPr algn="l"/>
+            <a:r>
+              <a:rPr sz="2200" b="1">
+                <a:solidFill>
+                  <a:srgbClr val="1F3A5F"/>
+                </a:solidFill>
+                <a:latin typeface="Calibri"/>
+              </a:rPr>
+              <a:t>NYC-Taxi-Ingestion-Pipeline</a:t>
+            </a:r>
+          </a:p>
+        </p:txBody>
+      </p:sp>
+      <p:sp>
+        <p:nvSpPr>
+          <p:cNvPr id="20" name="TextBox 19"/>
+          <p:cNvSpPr txBox="1"/>
+          <p:nvPr/>
+        </p:nvSpPr>
+        <p:spPr>
+          <a:xfrm>
+            <a:off x="777240" y="4892040"/>
             <a:ext cx="10515600" cy="457200"/>
           </a:xfrm>
           <a:prstGeom prst="rect">
@@ -4977,118 +5082,83 @@
           <a:p>
             <a:pPr algn="l"/>
             <a:r>
-              <a:rPr sz="2000" b="1">
+              <a:rPr sz="1600" b="0">
+                <a:solidFill>
+                  <a:srgbClr val="222A35"/>
+                </a:solidFill>
+                <a:latin typeface="Calibri"/>
+              </a:rPr>
+              <a:t>https://github.com/hassaanawan48/NYC-Taxi-Ingestion-Pipeline</a:t>
+            </a:r>
+          </a:p>
+        </p:txBody>
+      </p:sp>
+      <p:sp>
+        <p:nvSpPr>
+          <p:cNvPr id="21" name="TextBox 20"/>
+          <p:cNvSpPr txBox="1"/>
+          <p:nvPr/>
+        </p:nvSpPr>
+        <p:spPr>
+          <a:xfrm>
+            <a:off x="777240" y="5257800"/>
+            <a:ext cx="10515600" cy="365760"/>
+          </a:xfrm>
+          <a:prstGeom prst="rect">
+            <a:avLst/>
+          </a:prstGeom>
+          <a:noFill/>
+        </p:spPr>
+        <p:txBody>
+          <a:bodyPr wrap="square" lIns="0" rIns="0" tIns="0" bIns="0">
+            <a:spAutoFit/>
+          </a:bodyPr>
+          <a:lstStyle/>
+          <a:p>
+            <a:pPr algn="l"/>
+            <a:r>
+              <a:rPr sz="1300" b="0">
+                <a:solidFill>
+                  <a:srgbClr val="57606E"/>
+                </a:solidFill>
+                <a:latin typeface="Calibri"/>
+              </a:rPr>
+              <a:t>Includes ingest.py · profile_data.py · etl.py · analytics.py · build_final_report.py</a:t>
+            </a:r>
+          </a:p>
+        </p:txBody>
+      </p:sp>
+      <p:sp>
+        <p:nvSpPr>
+          <p:cNvPr id="22" name="TextBox 21"/>
+          <p:cNvSpPr txBox="1"/>
+          <p:nvPr/>
+        </p:nvSpPr>
+        <p:spPr>
+          <a:xfrm>
+            <a:off x="502920" y="5897880"/>
+            <a:ext cx="11155680" cy="457200"/>
+          </a:xfrm>
+          <a:prstGeom prst="rect">
+            <a:avLst/>
+          </a:prstGeom>
+          <a:noFill/>
+        </p:spPr>
+        <p:txBody>
+          <a:bodyPr wrap="square" lIns="0" rIns="0" tIns="0" bIns="0">
+            <a:spAutoFit/>
+          </a:bodyPr>
+          <a:lstStyle/>
+          <a:p>
+            <a:pPr algn="ctr"/>
+            <a:r>
+              <a:rPr sz="2200" b="1">
                 <a:solidFill>
                   <a:srgbClr val="1F3A5F"/>
                 </a:solidFill>
                 <a:latin typeface="Calibri"/>
               </a:rPr>
-              <a:t>NYC-Taxi-Ingestion-Pipeline</a:t>
-            </a:r>
-          </a:p>
-        </p:txBody>
-      </p:sp>
-      <p:sp>
-        <p:nvSpPr>
-          <p:cNvPr id="19" name="TextBox 18"/>
-          <p:cNvSpPr txBox="1"/>
-          <p:nvPr/>
-        </p:nvSpPr>
-        <p:spPr>
-          <a:xfrm>
-            <a:off x="777240" y="4846320"/>
-            <a:ext cx="10515600" cy="457200"/>
-          </a:xfrm>
-          <a:prstGeom prst="rect">
-            <a:avLst/>
-          </a:prstGeom>
-          <a:noFill/>
-        </p:spPr>
-        <p:txBody>
-          <a:bodyPr wrap="square" lIns="0" rIns="0" tIns="0" bIns="0">
-            <a:spAutoFit/>
-          </a:bodyPr>
-          <a:lstStyle/>
-          <a:p>
-            <a:pPr algn="l"/>
-            <a:r>
-              <a:rPr sz="1400" b="0">
-                <a:solidFill>
-                  <a:srgbClr val="222A35"/>
-                </a:solidFill>
-                <a:latin typeface="Calibri"/>
-              </a:rPr>
-              <a:t>https://github.com/hassaanawan48/NYC-Taxi-Ingestion-Pipeline</a:t>
-            </a:r>
-          </a:p>
-        </p:txBody>
-      </p:sp>
-      <p:sp>
-        <p:nvSpPr>
-          <p:cNvPr id="20" name="TextBox 19"/>
-          <p:cNvSpPr txBox="1"/>
-          <p:nvPr/>
-        </p:nvSpPr>
-        <p:spPr>
-          <a:xfrm>
-            <a:off x="777240" y="5166360"/>
-            <a:ext cx="10515600" cy="457200"/>
-          </a:xfrm>
-          <a:prstGeom prst="rect">
-            <a:avLst/>
-          </a:prstGeom>
-          <a:noFill/>
-        </p:spPr>
-        <p:txBody>
-          <a:bodyPr wrap="square" lIns="0" rIns="0" tIns="0" bIns="0">
-            <a:spAutoFit/>
-          </a:bodyPr>
-          <a:lstStyle/>
-          <a:p>
-            <a:pPr algn="l"/>
-            <a:r>
-              <a:rPr sz="1200" b="0">
-                <a:solidFill>
-                  <a:srgbClr val="6B7380"/>
-                </a:solidFill>
-                <a:latin typeface="Calibri"/>
-              </a:rPr>
-              <a:t>Includes ingest.py, profile_data.py, etl.py, analytics.py, build_final_report.py and PDFs.</a:t>
-            </a:r>
-          </a:p>
-        </p:txBody>
-      </p:sp>
-      <p:sp>
-        <p:nvSpPr>
-          <p:cNvPr id="21" name="TextBox 20"/>
-          <p:cNvSpPr txBox="1"/>
-          <p:nvPr/>
-        </p:nvSpPr>
-        <p:spPr>
-          <a:xfrm>
-            <a:off x="502920" y="5943600"/>
-            <a:ext cx="11155680" cy="365760"/>
-          </a:xfrm>
-          <a:prstGeom prst="rect">
-            <a:avLst/>
-          </a:prstGeom>
-          <a:noFill/>
-        </p:spPr>
-        <p:txBody>
-          <a:bodyPr wrap="square" lIns="0" rIns="0" tIns="0" bIns="0">
-            <a:spAutoFit/>
-          </a:bodyPr>
-          <a:lstStyle/>
-          <a:p>
-            <a:pPr algn="ctr"/>
-            <a:r>
-              <a:rPr sz="1800" b="1">
-                <a:solidFill>
-                  <a:srgbClr val="1F3A5F"/>
-                </a:solidFill>
-                <a:latin typeface="Calibri"/>
-              </a:rPr>
-              <a:t>Thank you.  ·  Questions are welcome.</a:t>
+              <a:t>Thank you  ·  Questions are welcome.</a:t>
             </a:r>
           </a:p>
         </p:txBody>
@@ -5265,20 +5335,55 @@
           <a:p>
             <a:pPr algn="l"/>
             <a:r>
+              <a:rPr sz="1100" b="0">
+                <a:solidFill>
+                  <a:srgbClr val="57606E"/>
+                </a:solidFill>
+                <a:latin typeface="Calibri"/>
+              </a:rPr>
+              <a:t>Dataset</a:t>
+            </a:r>
+          </a:p>
+        </p:txBody>
+      </p:sp>
+      <p:sp>
+        <p:nvSpPr>
+          <p:cNvPr id="6" name="TextBox 5"/>
+          <p:cNvSpPr txBox="1"/>
+          <p:nvPr/>
+        </p:nvSpPr>
+        <p:spPr>
+          <a:xfrm>
+            <a:off x="457200" y="6693408"/>
+            <a:ext cx="7315200" cy="228600"/>
+          </a:xfrm>
+          <a:prstGeom prst="rect">
+            <a:avLst/>
+          </a:prstGeom>
+          <a:noFill/>
+        </p:spPr>
+        <p:txBody>
+          <a:bodyPr wrap="square" lIns="0" rIns="0" tIns="0" bIns="0">
+            <a:spAutoFit/>
+          </a:bodyPr>
+          <a:lstStyle/>
+          <a:p>
+            <a:pPr algn="l"/>
+            <a:r>
               <a:rPr sz="1000" b="0">
                 <a:solidFill>
-                  <a:srgbClr val="6B7380"/>
-                </a:solidFill>
-                <a:latin typeface="Calibri"/>
-              </a:rPr>
-              <a:t>Dataset</a:t>
-            </a:r>
-          </a:p>
-        </p:txBody>
-      </p:sp>
-      <p:sp>
-        <p:nvSpPr>
-          <p:cNvPr id="6" name="TextBox 5"/>
+                  <a:srgbClr val="57606E"/>
+                </a:solidFill>
+                <a:latin typeface="Calibri"/>
+              </a:rPr>
+              <a:t>Presenter: Hassaan</a:t>
+            </a:r>
+          </a:p>
+        </p:txBody>
+      </p:sp>
+      <p:sp>
+        <p:nvSpPr>
+          <p:cNvPr id="7" name="TextBox 6"/>
           <p:cNvSpPr txBox="1"/>
           <p:nvPr/>
         </p:nvSpPr>
@@ -5300,27 +5405,62 @@
           <a:p>
             <a:pPr algn="r"/>
             <a:r>
+              <a:rPr sz="1100" b="0">
+                <a:solidFill>
+                  <a:srgbClr val="57606E"/>
+                </a:solidFill>
+                <a:latin typeface="Calibri"/>
+              </a:rPr>
+              <a:t>2 / 11</a:t>
+            </a:r>
+          </a:p>
+        </p:txBody>
+      </p:sp>
+      <p:sp>
+        <p:nvSpPr>
+          <p:cNvPr id="8" name="TextBox 7"/>
+          <p:cNvSpPr txBox="1"/>
+          <p:nvPr/>
+        </p:nvSpPr>
+        <p:spPr>
+          <a:xfrm>
+            <a:off x="7315200" y="6693408"/>
+            <a:ext cx="4572000" cy="228600"/>
+          </a:xfrm>
+          <a:prstGeom prst="rect">
+            <a:avLst/>
+          </a:prstGeom>
+          <a:noFill/>
+        </p:spPr>
+        <p:txBody>
+          <a:bodyPr wrap="square" lIns="0" rIns="0" tIns="0" bIns="0">
+            <a:spAutoFit/>
+          </a:bodyPr>
+          <a:lstStyle/>
+          <a:p>
+            <a:pPr algn="r"/>
+            <a:r>
               <a:rPr sz="1000" b="0">
                 <a:solidFill>
-                  <a:srgbClr val="6B7380"/>
-                </a:solidFill>
-                <a:latin typeface="Calibri"/>
-              </a:rPr>
-              <a:t>2 / 11</a:t>
-            </a:r>
-          </a:p>
-        </p:txBody>
-      </p:sp>
-      <p:sp>
-        <p:nvSpPr>
-          <p:cNvPr id="7" name="TextBox 6"/>
-          <p:cNvSpPr txBox="1"/>
-          <p:nvPr/>
-        </p:nvSpPr>
-        <p:spPr>
-          <a:xfrm>
-            <a:off x="457200" y="6693408"/>
-            <a:ext cx="7315200" cy="228600"/>
+                  <a:srgbClr val="57606E"/>
+                </a:solidFill>
+                <a:latin typeface="Calibri"/>
+              </a:rPr>
+              <a:t>Group 17  ·  BSCS-13A  ·  BDA</a:t>
+            </a:r>
+          </a:p>
+        </p:txBody>
+      </p:sp>
+      <p:sp>
+        <p:nvSpPr>
+          <p:cNvPr id="9" name="TextBox 8"/>
+          <p:cNvSpPr txBox="1"/>
+          <p:nvPr/>
+        </p:nvSpPr>
+        <p:spPr>
+          <a:xfrm>
+            <a:off x="502920" y="411480"/>
+            <a:ext cx="10058400" cy="365760"/>
           </a:xfrm>
           <a:prstGeom prst="rect">
             <a:avLst/>
@@ -5335,27 +5475,27 @@
           <a:p>
             <a:pPr algn="l"/>
             <a:r>
-              <a:rPr sz="900" b="0">
-                <a:solidFill>
-                  <a:srgbClr val="6B7380"/>
-                </a:solidFill>
-                <a:latin typeface="Calibri"/>
-              </a:rPr>
-              <a:t>NYC Yellow Taxi Pipeline · Group 17 · BSCS-13A</a:t>
-            </a:r>
-          </a:p>
-        </p:txBody>
-      </p:sp>
-      <p:sp>
-        <p:nvSpPr>
-          <p:cNvPr id="8" name="TextBox 7"/>
-          <p:cNvSpPr txBox="1"/>
-          <p:nvPr/>
-        </p:nvSpPr>
-        <p:spPr>
-          <a:xfrm>
-            <a:off x="502920" y="411480"/>
-            <a:ext cx="10058400" cy="320040"/>
+              <a:rPr sz="1300" b="1">
+                <a:solidFill>
+                  <a:srgbClr val="C9A227"/>
+                </a:solidFill>
+                <a:latin typeface="Calibri"/>
+              </a:rPr>
+              <a:t>SLIDE 2</a:t>
+            </a:r>
+          </a:p>
+        </p:txBody>
+      </p:sp>
+      <p:sp>
+        <p:nvSpPr>
+          <p:cNvPr id="10" name="TextBox 9"/>
+          <p:cNvSpPr txBox="1"/>
+          <p:nvPr/>
+        </p:nvSpPr>
+        <p:spPr>
+          <a:xfrm>
+            <a:off x="502920" y="777240"/>
+            <a:ext cx="10972800" cy="868680"/>
           </a:xfrm>
           <a:prstGeom prst="rect">
             <a:avLst/>
@@ -5370,62 +5510,27 @@
           <a:p>
             <a:pPr algn="l"/>
             <a:r>
-              <a:rPr sz="1100" b="1">
-                <a:solidFill>
-                  <a:srgbClr val="C9A227"/>
-                </a:solidFill>
-                <a:latin typeface="Calibri"/>
-              </a:rPr>
-              <a:t>SLIDE 2</a:t>
-            </a:r>
-          </a:p>
-        </p:txBody>
-      </p:sp>
-      <p:sp>
-        <p:nvSpPr>
-          <p:cNvPr id="9" name="TextBox 8"/>
-          <p:cNvSpPr txBox="1"/>
-          <p:nvPr/>
-        </p:nvSpPr>
-        <p:spPr>
-          <a:xfrm>
-            <a:off x="502920" y="713232"/>
-            <a:ext cx="10972800" cy="777240"/>
-          </a:xfrm>
-          <a:prstGeom prst="rect">
-            <a:avLst/>
-          </a:prstGeom>
-          <a:noFill/>
-        </p:spPr>
-        <p:txBody>
-          <a:bodyPr wrap="square" lIns="0" rIns="0" tIns="0" bIns="0">
-            <a:spAutoFit/>
-          </a:bodyPr>
-          <a:lstStyle/>
-          <a:p>
-            <a:pPr algn="l"/>
-            <a:r>
-              <a:rPr sz="3200" b="1">
+              <a:rPr sz="3600" b="1">
                 <a:solidFill>
                   <a:srgbClr val="1F3A5F"/>
                 </a:solidFill>
                 <a:latin typeface="Calibri"/>
               </a:rPr>
-              <a:t>Dataset Overview &amp; Rationale</a:t>
-            </a:r>
-          </a:p>
-        </p:txBody>
-      </p:sp>
-      <p:sp>
-        <p:nvSpPr>
-          <p:cNvPr id="10" name="Rectangle 9"/>
+              <a:t>Dataset Overview, Rationale &amp; Business Value</a:t>
+            </a:r>
+          </a:p>
+        </p:txBody>
+      </p:sp>
+      <p:sp>
+        <p:nvSpPr>
+          <p:cNvPr id="11" name="Rectangle 10"/>
           <p:cNvSpPr/>
           <p:nvPr/>
         </p:nvSpPr>
         <p:spPr>
           <a:xfrm>
-            <a:off x="502920" y="1417320"/>
-            <a:ext cx="548640" cy="28575"/>
+            <a:off x="502920" y="1554480"/>
+            <a:ext cx="640080" cy="31750"/>
           </a:xfrm>
           <a:prstGeom prst="rect">
             <a:avLst/>
@@ -5461,212 +5566,14 @@
       </p:sp>
       <p:sp>
         <p:nvSpPr>
-          <p:cNvPr id="11" name="TextBox 10"/>
-          <p:cNvSpPr txBox="1"/>
-          <p:nvPr/>
-        </p:nvSpPr>
-        <p:spPr>
-          <a:xfrm>
-            <a:off x="502920" y="1783080"/>
-            <a:ext cx="6583680" cy="4389120"/>
-          </a:xfrm>
-          <a:prstGeom prst="rect">
-            <a:avLst/>
-          </a:prstGeom>
-          <a:noFill/>
-        </p:spPr>
-        <p:txBody>
-          <a:bodyPr wrap="square" lIns="0" rIns="0" tIns="0" bIns="0">
-            <a:spAutoFit/>
-          </a:bodyPr>
-          <a:lstStyle/>
-          <a:p>
-            <a:pPr algn="l">
-              <a:lnSpc>
-                <a:spcPct val="130000"/>
-              </a:lnSpc>
-            </a:pPr>
-            <a:r>
-              <a:rPr sz="1500" b="1">
-                <a:solidFill>
-                  <a:srgbClr val="1F3A5F"/>
-                </a:solidFill>
-                <a:latin typeface="Calibri"/>
-              </a:rPr>
-              <a:t>•  Source</a:t>
-            </a:r>
-            <a:r>
-              <a:rPr sz="1500" b="0">
-                <a:solidFill>
-                  <a:srgbClr val="222A35"/>
-                </a:solidFill>
-                <a:latin typeface="Calibri"/>
-              </a:rPr>
-              <a:t> — NYC TLC Yellow Taxi Trip Records</a:t>
-            </a:r>
-          </a:p>
-          <a:p>
-            <a:pPr algn="l">
-              <a:lnSpc>
-                <a:spcPct val="130000"/>
-              </a:lnSpc>
-            </a:pPr>
-            <a:r>
-              <a:rPr sz="1500" b="1">
-                <a:solidFill>
-                  <a:srgbClr val="1F3A5F"/>
-                </a:solidFill>
-                <a:latin typeface="Calibri"/>
-              </a:rPr>
-              <a:t>•  File</a:t>
-            </a:r>
-            <a:r>
-              <a:rPr sz="1500" b="0">
-                <a:solidFill>
-                  <a:srgbClr val="222A35"/>
-                </a:solidFill>
-                <a:latin typeface="Calibri"/>
-              </a:rPr>
-              <a:t> — yellow_tripdata_2024-01.parquet</a:t>
-            </a:r>
-          </a:p>
-          <a:p>
-            <a:pPr algn="l">
-              <a:lnSpc>
-                <a:spcPct val="130000"/>
-              </a:lnSpc>
-            </a:pPr>
-            <a:r>
-              <a:rPr sz="1500" b="1">
-                <a:solidFill>
-                  <a:srgbClr val="1F3A5F"/>
-                </a:solidFill>
-                <a:latin typeface="Calibri"/>
-              </a:rPr>
-              <a:t>•  Period</a:t>
-            </a:r>
-            <a:r>
-              <a:rPr sz="1500" b="0">
-                <a:solidFill>
-                  <a:srgbClr val="222A35"/>
-                </a:solidFill>
-                <a:latin typeface="Calibri"/>
-              </a:rPr>
-              <a:t> — January 2024 (one full month)</a:t>
-            </a:r>
-          </a:p>
-          <a:p>
-            <a:pPr algn="l">
-              <a:lnSpc>
-                <a:spcPct val="130000"/>
-              </a:lnSpc>
-            </a:pPr>
-            <a:r>
-              <a:rPr sz="1500" b="1">
-                <a:solidFill>
-                  <a:srgbClr val="1F3A5F"/>
-                </a:solidFill>
-                <a:latin typeface="Calibri"/>
-              </a:rPr>
-              <a:t>•  Volume</a:t>
-            </a:r>
-            <a:r>
-              <a:rPr sz="1500" b="0">
-                <a:solidFill>
-                  <a:srgbClr val="222A35"/>
-                </a:solidFill>
-                <a:latin typeface="Calibri"/>
-              </a:rPr>
-              <a:t> — 2,964,624 raw trip records</a:t>
-            </a:r>
-          </a:p>
-          <a:p>
-            <a:pPr algn="l">
-              <a:lnSpc>
-                <a:spcPct val="130000"/>
-              </a:lnSpc>
-            </a:pPr>
-            <a:r>
-              <a:rPr sz="1500" b="1">
-                <a:solidFill>
-                  <a:srgbClr val="1F3A5F"/>
-                </a:solidFill>
-                <a:latin typeface="Calibri"/>
-              </a:rPr>
-              <a:t>•  Schema</a:t>
-            </a:r>
-            <a:r>
-              <a:rPr sz="1500" b="0">
-                <a:solidFill>
-                  <a:srgbClr val="222A35"/>
-                </a:solidFill>
-                <a:latin typeface="Calibri"/>
-              </a:rPr>
-              <a:t> — 19 columns: datetime, numeric, categorical, location IDs</a:t>
-            </a:r>
-          </a:p>
-          <a:p>
-            <a:pPr algn="l">
-              <a:lnSpc>
-                <a:spcPct val="130000"/>
-              </a:lnSpc>
-            </a:pPr>
-            <a:r>
-              <a:rPr sz="1500" b="1">
-                <a:solidFill>
-                  <a:srgbClr val="1F3A5F"/>
-                </a:solidFill>
-                <a:latin typeface="Calibri"/>
-              </a:rPr>
-              <a:t>•  Format</a:t>
-            </a:r>
-            <a:r>
-              <a:rPr sz="1500" b="0">
-                <a:solidFill>
-                  <a:srgbClr val="222A35"/>
-                </a:solidFill>
-                <a:latin typeface="Calibri"/>
-              </a:rPr>
-              <a:t> — Parquet (binary columnar, compressed)</a:t>
-            </a:r>
-          </a:p>
-          <a:p>
-            <a:pPr algn="l">
-              <a:lnSpc>
-                <a:spcPct val="130000"/>
-              </a:lnSpc>
-            </a:pPr>
-            <a:r>
-              <a:rPr sz="1500" b="1">
-                <a:solidFill>
-                  <a:srgbClr val="1F3A5F"/>
-                </a:solidFill>
-                <a:latin typeface="Calibri"/>
-              </a:rPr>
-              <a:t>•  Provider</a:t>
-            </a:r>
-            <a:r>
-              <a:rPr sz="1500" b="0">
-                <a:solidFill>
-                  <a:srgbClr val="222A35"/>
-                </a:solidFill>
-                <a:latin typeface="Calibri"/>
-              </a:rPr>
-              <a:t> — nyc.gov / TLC Trip Record Data</a:t>
-            </a:r>
-          </a:p>
-        </p:txBody>
-      </p:sp>
-      <p:sp>
-        <p:nvSpPr>
           <p:cNvPr id="12" name="Rectangle 11"/>
           <p:cNvSpPr/>
           <p:nvPr/>
         </p:nvSpPr>
         <p:spPr>
           <a:xfrm>
-            <a:off x="7315200" y="1783080"/>
-            <a:ext cx="4434840" cy="4389120"/>
+            <a:off x="502920" y="1783080"/>
+            <a:ext cx="5532120" cy="2194560"/>
           </a:xfrm>
           <a:prstGeom prst="rect">
             <a:avLst/>
@@ -5708,8 +5615,8 @@
         </p:nvSpPr>
         <p:spPr>
           <a:xfrm>
-            <a:off x="7543800" y="1874519"/>
-            <a:ext cx="4114800" cy="365760"/>
+            <a:off x="731520" y="1874519"/>
+            <a:ext cx="5120640" cy="365760"/>
           </a:xfrm>
           <a:prstGeom prst="rect">
             <a:avLst/>
@@ -5724,13 +5631,13 @@
           <a:p>
             <a:pPr algn="l"/>
             <a:r>
-              <a:rPr sz="1100" b="1">
+              <a:rPr sz="1200" b="1">
                 <a:solidFill>
                   <a:srgbClr val="C9A227"/>
                 </a:solidFill>
                 <a:latin typeface="Calibri"/>
               </a:rPr>
-              <a:t>WHY THIS DATASET</a:t>
+              <a:t>DATASET FACTS</a:t>
             </a:r>
           </a:p>
         </p:txBody>
@@ -5743,8 +5650,8 @@
         </p:nvSpPr>
         <p:spPr>
           <a:xfrm>
-            <a:off x="7543800" y="2240280"/>
-            <a:ext cx="4114800" cy="3657600"/>
+            <a:off x="731520" y="2240280"/>
+            <a:ext cx="5120640" cy="1828800"/>
           </a:xfrm>
           <a:prstGeom prst="rect">
             <a:avLst/>
@@ -5759,81 +5666,596 @@
           <a:p>
             <a:pPr algn="l">
               <a:lnSpc>
-                <a:spcPct val="130000"/>
+                <a:spcPct val="125000"/>
               </a:lnSpc>
             </a:pPr>
             <a:r>
-              <a:rPr sz="1400">
+              <a:rPr sz="1500" b="1">
+                <a:solidFill>
+                  <a:srgbClr val="1F3A5F"/>
+                </a:solidFill>
+                <a:latin typeface="Calibri"/>
+              </a:rPr>
+              <a:t>Source</a:t>
+            </a:r>
+            <a:r>
+              <a:rPr sz="1500" b="0">
                 <a:solidFill>
                   <a:srgbClr val="222A35"/>
                 </a:solidFill>
                 <a:latin typeface="Calibri"/>
               </a:rPr>
-              <a:t>•  Volume &gt; 500K rows justifies HDFS + Spark</a:t>
+              <a:t> — NYC TLC Yellow Taxi (Jan 2024)</a:t>
             </a:r>
           </a:p>
           <a:p>
             <a:pPr algn="l">
               <a:lnSpc>
-                <a:spcPct val="130000"/>
+                <a:spcPct val="125000"/>
               </a:lnSpc>
             </a:pPr>
             <a:r>
-              <a:rPr sz="1400">
+              <a:rPr sz="1500" b="1">
+                <a:solidFill>
+                  <a:srgbClr val="1F3A5F"/>
+                </a:solidFill>
+                <a:latin typeface="Calibri"/>
+              </a:rPr>
+              <a:t>File</a:t>
+            </a:r>
+            <a:r>
+              <a:rPr sz="1500" b="0">
                 <a:solidFill>
                   <a:srgbClr val="222A35"/>
                 </a:solidFill>
                 <a:latin typeface="Calibri"/>
               </a:rPr>
-              <a:t>•  Each row is a trip — a natural fact table</a:t>
+              <a:t> — yellow_tripdata_2024-01.parquet</a:t>
             </a:r>
           </a:p>
           <a:p>
             <a:pPr algn="l">
               <a:lnSpc>
-                <a:spcPct val="130000"/>
+                <a:spcPct val="125000"/>
               </a:lnSpc>
             </a:pPr>
             <a:r>
-              <a:rPr sz="1400">
+              <a:rPr sz="1500" b="1">
+                <a:solidFill>
+                  <a:srgbClr val="1F3A5F"/>
+                </a:solidFill>
+                <a:latin typeface="Calibri"/>
+              </a:rPr>
+              <a:t>Volume</a:t>
+            </a:r>
+            <a:r>
+              <a:rPr sz="1500" b="0">
                 <a:solidFill>
                   <a:srgbClr val="222A35"/>
                 </a:solidFill>
                 <a:latin typeface="Calibri"/>
               </a:rPr>
-              <a:t>•  Clear dimensions: time, location, payment, vendor</a:t>
+              <a:t> — 2,964,624 trips · 19 columns</a:t>
             </a:r>
           </a:p>
           <a:p>
             <a:pPr algn="l">
               <a:lnSpc>
-                <a:spcPct val="130000"/>
+                <a:spcPct val="125000"/>
               </a:lnSpc>
             </a:pPr>
             <a:r>
-              <a:rPr sz="1400">
+              <a:rPr sz="1500" b="1">
+                <a:solidFill>
+                  <a:srgbClr val="1F3A5F"/>
+                </a:solidFill>
+                <a:latin typeface="Calibri"/>
+              </a:rPr>
+              <a:t>Format</a:t>
+            </a:r>
+            <a:r>
+              <a:rPr sz="1500" b="0">
                 <a:solidFill>
                   <a:srgbClr val="222A35"/>
                 </a:solidFill>
                 <a:latin typeface="Calibri"/>
               </a:rPr>
-              <a:t>•  Contains realistic data quality issues for ETL</a:t>
-            </a:r>
-          </a:p>
+              <a:t> — Parquet — binary, columnar</a:t>
+            </a:r>
+          </a:p>
+        </p:txBody>
+      </p:sp>
+      <p:sp>
+        <p:nvSpPr>
+          <p:cNvPr id="15" name="Rectangle 14"/>
+          <p:cNvSpPr/>
+          <p:nvPr/>
+        </p:nvSpPr>
+        <p:spPr>
+          <a:xfrm>
+            <a:off x="6172200" y="1783080"/>
+            <a:ext cx="5532120" cy="2194560"/>
+          </a:xfrm>
+          <a:prstGeom prst="rect">
+            <a:avLst/>
+          </a:prstGeom>
+          <a:solidFill>
+            <a:srgbClr val="F5F6F8"/>
+          </a:solidFill>
+          <a:ln>
+            <a:noFill/>
+          </a:ln>
+        </p:spPr>
+        <p:style>
+          <a:lnRef idx="1">
+            <a:schemeClr val="accent1"/>
+          </a:lnRef>
+          <a:fillRef idx="3">
+            <a:schemeClr val="accent1"/>
+          </a:fillRef>
+          <a:effectRef idx="2">
+            <a:schemeClr val="accent1"/>
+          </a:effectRef>
+          <a:fontRef idx="minor">
+            <a:schemeClr val="lt1"/>
+          </a:fontRef>
+        </p:style>
+        <p:txBody>
+          <a:bodyPr rtlCol="0" anchor="ctr"/>
+          <a:lstStyle/>
+          <a:p>
+            <a:pPr algn="ctr"/>
+          </a:p>
+        </p:txBody>
+      </p:sp>
+      <p:sp>
+        <p:nvSpPr>
+          <p:cNvPr id="16" name="TextBox 15"/>
+          <p:cNvSpPr txBox="1"/>
+          <p:nvPr/>
+        </p:nvSpPr>
+        <p:spPr>
+          <a:xfrm>
+            <a:off x="6400800" y="1874519"/>
+            <a:ext cx="5120640" cy="365760"/>
+          </a:xfrm>
+          <a:prstGeom prst="rect">
+            <a:avLst/>
+          </a:prstGeom>
+          <a:noFill/>
+        </p:spPr>
+        <p:txBody>
+          <a:bodyPr wrap="square" lIns="0" rIns="0" tIns="0" bIns="0">
+            <a:spAutoFit/>
+          </a:bodyPr>
+          <a:lstStyle/>
+          <a:p>
+            <a:pPr algn="l"/>
+            <a:r>
+              <a:rPr sz="1200" b="1">
+                <a:solidFill>
+                  <a:srgbClr val="C9A227"/>
+                </a:solidFill>
+                <a:latin typeface="Calibri"/>
+              </a:rPr>
+              <a:t>WHY THIS DATASET</a:t>
+            </a:r>
+          </a:p>
+        </p:txBody>
+      </p:sp>
+      <p:sp>
+        <p:nvSpPr>
+          <p:cNvPr id="17" name="TextBox 16"/>
+          <p:cNvSpPr txBox="1"/>
+          <p:nvPr/>
+        </p:nvSpPr>
+        <p:spPr>
+          <a:xfrm>
+            <a:off x="6400800" y="2240280"/>
+            <a:ext cx="5120640" cy="1828800"/>
+          </a:xfrm>
+          <a:prstGeom prst="rect">
+            <a:avLst/>
+          </a:prstGeom>
+          <a:noFill/>
+        </p:spPr>
+        <p:txBody>
+          <a:bodyPr wrap="square" lIns="0" rIns="0" tIns="0" bIns="0">
+            <a:spAutoFit/>
+          </a:bodyPr>
+          <a:lstStyle/>
           <a:p>
             <a:pPr algn="l">
               <a:lnSpc>
-                <a:spcPct val="130000"/>
+                <a:spcPct val="125000"/>
               </a:lnSpc>
             </a:pPr>
             <a:r>
-              <a:rPr sz="1400">
+              <a:rPr sz="1500">
                 <a:solidFill>
                   <a:srgbClr val="222A35"/>
                 </a:solidFill>
                 <a:latin typeface="Calibri"/>
               </a:rPr>
-              <a:t>•  Public, well-documented, columnar format</a:t>
+              <a:t>•  Volume &gt; 500K rows justifies HDFS + Spark</a:t>
+            </a:r>
+          </a:p>
+          <a:p>
+            <a:pPr algn="l">
+              <a:lnSpc>
+                <a:spcPct val="125000"/>
+              </a:lnSpc>
+            </a:pPr>
+            <a:r>
+              <a:rPr sz="1500">
+                <a:solidFill>
+                  <a:srgbClr val="222A35"/>
+                </a:solidFill>
+                <a:latin typeface="Calibri"/>
+              </a:rPr>
+              <a:t>•  Each row is a trip — natural fact table</a:t>
+            </a:r>
+          </a:p>
+          <a:p>
+            <a:pPr algn="l">
+              <a:lnSpc>
+                <a:spcPct val="125000"/>
+              </a:lnSpc>
+            </a:pPr>
+            <a:r>
+              <a:rPr sz="1500">
+                <a:solidFill>
+                  <a:srgbClr val="222A35"/>
+                </a:solidFill>
+                <a:latin typeface="Calibri"/>
+              </a:rPr>
+              <a:t>•  Clear dimensions: time, location, payment, vendor</a:t>
+            </a:r>
+          </a:p>
+          <a:p>
+            <a:pPr algn="l">
+              <a:lnSpc>
+                <a:spcPct val="125000"/>
+              </a:lnSpc>
+            </a:pPr>
+            <a:r>
+              <a:rPr sz="1500">
+                <a:solidFill>
+                  <a:srgbClr val="222A35"/>
+                </a:solidFill>
+                <a:latin typeface="Calibri"/>
+              </a:rPr>
+              <a:t>•  Real DQ issues — perfect ETL teaching dataset</a:t>
+            </a:r>
+          </a:p>
+        </p:txBody>
+      </p:sp>
+      <p:sp>
+        <p:nvSpPr>
+          <p:cNvPr id="18" name="Rectangle 17"/>
+          <p:cNvSpPr/>
+          <p:nvPr/>
+        </p:nvSpPr>
+        <p:spPr>
+          <a:xfrm>
+            <a:off x="502920" y="4114800"/>
+            <a:ext cx="5532120" cy="2194560"/>
+          </a:xfrm>
+          <a:prstGeom prst="rect">
+            <a:avLst/>
+          </a:prstGeom>
+          <a:solidFill>
+            <a:srgbClr val="F5F6F8"/>
+          </a:solidFill>
+          <a:ln>
+            <a:noFill/>
+          </a:ln>
+        </p:spPr>
+        <p:style>
+          <a:lnRef idx="1">
+            <a:schemeClr val="accent1"/>
+          </a:lnRef>
+          <a:fillRef idx="3">
+            <a:schemeClr val="accent1"/>
+          </a:fillRef>
+          <a:effectRef idx="2">
+            <a:schemeClr val="accent1"/>
+          </a:effectRef>
+          <a:fontRef idx="minor">
+            <a:schemeClr val="lt1"/>
+          </a:fontRef>
+        </p:style>
+        <p:txBody>
+          <a:bodyPr rtlCol="0" anchor="ctr"/>
+          <a:lstStyle/>
+          <a:p>
+            <a:pPr algn="ctr"/>
+          </a:p>
+        </p:txBody>
+      </p:sp>
+      <p:sp>
+        <p:nvSpPr>
+          <p:cNvPr id="19" name="TextBox 18"/>
+          <p:cNvSpPr txBox="1"/>
+          <p:nvPr/>
+        </p:nvSpPr>
+        <p:spPr>
+          <a:xfrm>
+            <a:off x="731520" y="4206240"/>
+            <a:ext cx="5120640" cy="365760"/>
+          </a:xfrm>
+          <a:prstGeom prst="rect">
+            <a:avLst/>
+          </a:prstGeom>
+          <a:noFill/>
+        </p:spPr>
+        <p:txBody>
+          <a:bodyPr wrap="square" lIns="0" rIns="0" tIns="0" bIns="0">
+            <a:spAutoFit/>
+          </a:bodyPr>
+          <a:lstStyle/>
+          <a:p>
+            <a:pPr algn="l"/>
+            <a:r>
+              <a:rPr sz="1200" b="1">
+                <a:solidFill>
+                  <a:srgbClr val="C9A227"/>
+                </a:solidFill>
+                <a:latin typeface="Calibri"/>
+              </a:rPr>
+              <a:t>WHY ANALYTICS ON THIS DATA MATTERS</a:t>
+            </a:r>
+          </a:p>
+        </p:txBody>
+      </p:sp>
+      <p:sp>
+        <p:nvSpPr>
+          <p:cNvPr id="20" name="TextBox 19"/>
+          <p:cNvSpPr txBox="1"/>
+          <p:nvPr/>
+        </p:nvSpPr>
+        <p:spPr>
+          <a:xfrm>
+            <a:off x="731520" y="4572000"/>
+            <a:ext cx="5120640" cy="1828800"/>
+          </a:xfrm>
+          <a:prstGeom prst="rect">
+            <a:avLst/>
+          </a:prstGeom>
+          <a:noFill/>
+        </p:spPr>
+        <p:txBody>
+          <a:bodyPr wrap="square" lIns="0" rIns="0" tIns="0" bIns="0">
+            <a:spAutoFit/>
+          </a:bodyPr>
+          <a:lstStyle/>
+          <a:p>
+            <a:pPr algn="l">
+              <a:lnSpc>
+                <a:spcPct val="125000"/>
+              </a:lnSpc>
+            </a:pPr>
+            <a:r>
+              <a:rPr sz="1500">
+                <a:solidFill>
+                  <a:srgbClr val="222A35"/>
+                </a:solidFill>
+                <a:latin typeface="Calibri"/>
+              </a:rPr>
+              <a:t>•  Reveals when and where demand spikes</a:t>
+            </a:r>
+          </a:p>
+          <a:p>
+            <a:pPr algn="l">
+              <a:lnSpc>
+                <a:spcPct val="125000"/>
+              </a:lnSpc>
+            </a:pPr>
+            <a:r>
+              <a:rPr sz="1500">
+                <a:solidFill>
+                  <a:srgbClr val="222A35"/>
+                </a:solidFill>
+                <a:latin typeface="Calibri"/>
+              </a:rPr>
+              <a:t>•  Quantifies how riders pay and tip</a:t>
+            </a:r>
+          </a:p>
+          <a:p>
+            <a:pPr algn="l">
+              <a:lnSpc>
+                <a:spcPct val="125000"/>
+              </a:lnSpc>
+            </a:pPr>
+            <a:r>
+              <a:rPr sz="1500">
+                <a:solidFill>
+                  <a:srgbClr val="222A35"/>
+                </a:solidFill>
+                <a:latin typeface="Calibri"/>
+              </a:rPr>
+              <a:t>•  Identifies highest-revenue origin–destination pairs</a:t>
+            </a:r>
+          </a:p>
+          <a:p>
+            <a:pPr algn="l">
+              <a:lnSpc>
+                <a:spcPct val="125000"/>
+              </a:lnSpc>
+            </a:pPr>
+            <a:r>
+              <a:rPr sz="1500">
+                <a:solidFill>
+                  <a:srgbClr val="222A35"/>
+                </a:solidFill>
+                <a:latin typeface="Calibri"/>
+              </a:rPr>
+              <a:t>•  Surfaces driver / vendor performance differences</a:t>
+            </a:r>
+          </a:p>
+        </p:txBody>
+      </p:sp>
+      <p:sp>
+        <p:nvSpPr>
+          <p:cNvPr id="21" name="Rectangle 20"/>
+          <p:cNvSpPr/>
+          <p:nvPr/>
+        </p:nvSpPr>
+        <p:spPr>
+          <a:xfrm>
+            <a:off x="6172200" y="4114800"/>
+            <a:ext cx="5532120" cy="2194560"/>
+          </a:xfrm>
+          <a:prstGeom prst="rect">
+            <a:avLst/>
+          </a:prstGeom>
+          <a:solidFill>
+            <a:srgbClr val="F5F6F8"/>
+          </a:solidFill>
+          <a:ln>
+            <a:noFill/>
+          </a:ln>
+        </p:spPr>
+        <p:style>
+          <a:lnRef idx="1">
+            <a:schemeClr val="accent1"/>
+          </a:lnRef>
+          <a:fillRef idx="3">
+            <a:schemeClr val="accent1"/>
+          </a:fillRef>
+          <a:effectRef idx="2">
+            <a:schemeClr val="accent1"/>
+          </a:effectRef>
+          <a:fontRef idx="minor">
+            <a:schemeClr val="lt1"/>
+          </a:fontRef>
+        </p:style>
+        <p:txBody>
+          <a:bodyPr rtlCol="0" anchor="ctr"/>
+          <a:lstStyle/>
+          <a:p>
+            <a:pPr algn="ctr"/>
+          </a:p>
+        </p:txBody>
+      </p:sp>
+      <p:sp>
+        <p:nvSpPr>
+          <p:cNvPr id="22" name="TextBox 21"/>
+          <p:cNvSpPr txBox="1"/>
+          <p:nvPr/>
+        </p:nvSpPr>
+        <p:spPr>
+          <a:xfrm>
+            <a:off x="6400800" y="4206240"/>
+            <a:ext cx="5120640" cy="365760"/>
+          </a:xfrm>
+          <a:prstGeom prst="rect">
+            <a:avLst/>
+          </a:prstGeom>
+          <a:noFill/>
+        </p:spPr>
+        <p:txBody>
+          <a:bodyPr wrap="square" lIns="0" rIns="0" tIns="0" bIns="0">
+            <a:spAutoFit/>
+          </a:bodyPr>
+          <a:lstStyle/>
+          <a:p>
+            <a:pPr algn="l"/>
+            <a:r>
+              <a:rPr sz="1200" b="1">
+                <a:solidFill>
+                  <a:srgbClr val="C9A227"/>
+                </a:solidFill>
+                <a:latin typeface="Calibri"/>
+              </a:rPr>
+              <a:t>BUSINESS BENEFITS DELIVERED</a:t>
+            </a:r>
+          </a:p>
+        </p:txBody>
+      </p:sp>
+      <p:sp>
+        <p:nvSpPr>
+          <p:cNvPr id="23" name="TextBox 22"/>
+          <p:cNvSpPr txBox="1"/>
+          <p:nvPr/>
+        </p:nvSpPr>
+        <p:spPr>
+          <a:xfrm>
+            <a:off x="6400800" y="4572000"/>
+            <a:ext cx="5120640" cy="1828800"/>
+          </a:xfrm>
+          <a:prstGeom prst="rect">
+            <a:avLst/>
+          </a:prstGeom>
+          <a:noFill/>
+        </p:spPr>
+        <p:txBody>
+          <a:bodyPr wrap="square" lIns="0" rIns="0" tIns="0" bIns="0">
+            <a:spAutoFit/>
+          </a:bodyPr>
+          <a:lstStyle/>
+          <a:p>
+            <a:pPr algn="l">
+              <a:lnSpc>
+                <a:spcPct val="125000"/>
+              </a:lnSpc>
+            </a:pPr>
+            <a:r>
+              <a:rPr sz="1500">
+                <a:solidFill>
+                  <a:srgbClr val="222A35"/>
+                </a:solidFill>
+                <a:latin typeface="Calibri"/>
+              </a:rPr>
+              <a:t>•  Surge / dispatch windows → higher revenue</a:t>
+            </a:r>
+          </a:p>
+          <a:p>
+            <a:pPr algn="l">
+              <a:lnSpc>
+                <a:spcPct val="125000"/>
+              </a:lnSpc>
+            </a:pPr>
+            <a:r>
+              <a:rPr sz="1500">
+                <a:solidFill>
+                  <a:srgbClr val="222A35"/>
+                </a:solidFill>
+                <a:latin typeface="Calibri"/>
+              </a:rPr>
+              <a:t>•  Vehicle repositioning to hot OD pairs</a:t>
+            </a:r>
+          </a:p>
+          <a:p>
+            <a:pPr algn="l">
+              <a:lnSpc>
+                <a:spcPct val="125000"/>
+              </a:lnSpc>
+            </a:pPr>
+            <a:r>
+              <a:rPr sz="1500">
+                <a:solidFill>
+                  <a:srgbClr val="222A35"/>
+                </a:solidFill>
+                <a:latin typeface="Calibri"/>
+              </a:rPr>
+              <a:t>•  Card-payment investment justified by share data</a:t>
+            </a:r>
+          </a:p>
+          <a:p>
+            <a:pPr algn="l">
+              <a:lnSpc>
+                <a:spcPct val="125000"/>
+              </a:lnSpc>
+            </a:pPr>
+            <a:r>
+              <a:rPr sz="1500">
+                <a:solidFill>
+                  <a:srgbClr val="222A35"/>
+                </a:solidFill>
+                <a:latin typeface="Calibri"/>
+              </a:rPr>
+              <a:t>•  Tip insights → driver coaching &amp; retention</a:t>
             </a:r>
           </a:p>
         </p:txBody>
@@ -6010,20 +6432,55 @@
           <a:p>
             <a:pPr algn="l"/>
             <a:r>
+              <a:rPr sz="1100" b="0">
+                <a:solidFill>
+                  <a:srgbClr val="57606E"/>
+                </a:solidFill>
+                <a:latin typeface="Calibri"/>
+              </a:rPr>
+              <a:t>Data Quality</a:t>
+            </a:r>
+          </a:p>
+        </p:txBody>
+      </p:sp>
+      <p:sp>
+        <p:nvSpPr>
+          <p:cNvPr id="6" name="TextBox 5"/>
+          <p:cNvSpPr txBox="1"/>
+          <p:nvPr/>
+        </p:nvSpPr>
+        <p:spPr>
+          <a:xfrm>
+            <a:off x="457200" y="6693408"/>
+            <a:ext cx="7315200" cy="228600"/>
+          </a:xfrm>
+          <a:prstGeom prst="rect">
+            <a:avLst/>
+          </a:prstGeom>
+          <a:noFill/>
+        </p:spPr>
+        <p:txBody>
+          <a:bodyPr wrap="square" lIns="0" rIns="0" tIns="0" bIns="0">
+            <a:spAutoFit/>
+          </a:bodyPr>
+          <a:lstStyle/>
+          <a:p>
+            <a:pPr algn="l"/>
+            <a:r>
               <a:rPr sz="1000" b="0">
                 <a:solidFill>
-                  <a:srgbClr val="6B7380"/>
-                </a:solidFill>
-                <a:latin typeface="Calibri"/>
-              </a:rPr>
-              <a:t>Data Quality</a:t>
-            </a:r>
-          </a:p>
-        </p:txBody>
-      </p:sp>
-      <p:sp>
-        <p:nvSpPr>
-          <p:cNvPr id="6" name="TextBox 5"/>
+                  <a:srgbClr val="57606E"/>
+                </a:solidFill>
+                <a:latin typeface="Calibri"/>
+              </a:rPr>
+              <a:t>Presenter: Hassaan</a:t>
+            </a:r>
+          </a:p>
+        </p:txBody>
+      </p:sp>
+      <p:sp>
+        <p:nvSpPr>
+          <p:cNvPr id="7" name="TextBox 6"/>
           <p:cNvSpPr txBox="1"/>
           <p:nvPr/>
         </p:nvSpPr>
@@ -6045,27 +6502,62 @@
           <a:p>
             <a:pPr algn="r"/>
             <a:r>
+              <a:rPr sz="1100" b="0">
+                <a:solidFill>
+                  <a:srgbClr val="57606E"/>
+                </a:solidFill>
+                <a:latin typeface="Calibri"/>
+              </a:rPr>
+              <a:t>3 / 11</a:t>
+            </a:r>
+          </a:p>
+        </p:txBody>
+      </p:sp>
+      <p:sp>
+        <p:nvSpPr>
+          <p:cNvPr id="8" name="TextBox 7"/>
+          <p:cNvSpPr txBox="1"/>
+          <p:nvPr/>
+        </p:nvSpPr>
+        <p:spPr>
+          <a:xfrm>
+            <a:off x="7315200" y="6693408"/>
+            <a:ext cx="4572000" cy="228600"/>
+          </a:xfrm>
+          <a:prstGeom prst="rect">
+            <a:avLst/>
+          </a:prstGeom>
+          <a:noFill/>
+        </p:spPr>
+        <p:txBody>
+          <a:bodyPr wrap="square" lIns="0" rIns="0" tIns="0" bIns="0">
+            <a:spAutoFit/>
+          </a:bodyPr>
+          <a:lstStyle/>
+          <a:p>
+            <a:pPr algn="r"/>
+            <a:r>
               <a:rPr sz="1000" b="0">
                 <a:solidFill>
-                  <a:srgbClr val="6B7380"/>
-                </a:solidFill>
-                <a:latin typeface="Calibri"/>
-              </a:rPr>
-              <a:t>3 / 11</a:t>
-            </a:r>
-          </a:p>
-        </p:txBody>
-      </p:sp>
-      <p:sp>
-        <p:nvSpPr>
-          <p:cNvPr id="7" name="TextBox 6"/>
-          <p:cNvSpPr txBox="1"/>
-          <p:nvPr/>
-        </p:nvSpPr>
-        <p:spPr>
-          <a:xfrm>
-            <a:off x="457200" y="6693408"/>
-            <a:ext cx="7315200" cy="228600"/>
+                  <a:srgbClr val="57606E"/>
+                </a:solidFill>
+                <a:latin typeface="Calibri"/>
+              </a:rPr>
+              <a:t>Group 17  ·  BSCS-13A  ·  BDA</a:t>
+            </a:r>
+          </a:p>
+        </p:txBody>
+      </p:sp>
+      <p:sp>
+        <p:nvSpPr>
+          <p:cNvPr id="9" name="TextBox 8"/>
+          <p:cNvSpPr txBox="1"/>
+          <p:nvPr/>
+        </p:nvSpPr>
+        <p:spPr>
+          <a:xfrm>
+            <a:off x="502920" y="411480"/>
+            <a:ext cx="10058400" cy="365760"/>
           </a:xfrm>
           <a:prstGeom prst="rect">
             <a:avLst/>
@@ -6080,27 +6572,27 @@
           <a:p>
             <a:pPr algn="l"/>
             <a:r>
-              <a:rPr sz="900" b="0">
-                <a:solidFill>
-                  <a:srgbClr val="6B7380"/>
-                </a:solidFill>
-                <a:latin typeface="Calibri"/>
-              </a:rPr>
-              <a:t>NYC Yellow Taxi Pipeline · Group 17 · BSCS-13A</a:t>
-            </a:r>
-          </a:p>
-        </p:txBody>
-      </p:sp>
-      <p:sp>
-        <p:nvSpPr>
-          <p:cNvPr id="8" name="TextBox 7"/>
-          <p:cNvSpPr txBox="1"/>
-          <p:nvPr/>
-        </p:nvSpPr>
-        <p:spPr>
-          <a:xfrm>
-            <a:off x="502920" y="411480"/>
-            <a:ext cx="10058400" cy="320040"/>
+              <a:rPr sz="1300" b="1">
+                <a:solidFill>
+                  <a:srgbClr val="C9A227"/>
+                </a:solidFill>
+                <a:latin typeface="Calibri"/>
+              </a:rPr>
+              <a:t>SLIDE 3</a:t>
+            </a:r>
+          </a:p>
+        </p:txBody>
+      </p:sp>
+      <p:sp>
+        <p:nvSpPr>
+          <p:cNvPr id="10" name="TextBox 9"/>
+          <p:cNvSpPr txBox="1"/>
+          <p:nvPr/>
+        </p:nvSpPr>
+        <p:spPr>
+          <a:xfrm>
+            <a:off x="502920" y="777240"/>
+            <a:ext cx="10972800" cy="868680"/>
           </a:xfrm>
           <a:prstGeom prst="rect">
             <a:avLst/>
@@ -6115,62 +6607,27 @@
           <a:p>
             <a:pPr algn="l"/>
             <a:r>
-              <a:rPr sz="1100" b="1">
-                <a:solidFill>
-                  <a:srgbClr val="C9A227"/>
-                </a:solidFill>
-                <a:latin typeface="Calibri"/>
-              </a:rPr>
-              <a:t>SLIDE 3</a:t>
-            </a:r>
-          </a:p>
-        </p:txBody>
-      </p:sp>
-      <p:sp>
-        <p:nvSpPr>
-          <p:cNvPr id="9" name="TextBox 8"/>
-          <p:cNvSpPr txBox="1"/>
-          <p:nvPr/>
-        </p:nvSpPr>
-        <p:spPr>
-          <a:xfrm>
-            <a:off x="502920" y="713232"/>
-            <a:ext cx="10972800" cy="777240"/>
-          </a:xfrm>
-          <a:prstGeom prst="rect">
-            <a:avLst/>
-          </a:prstGeom>
-          <a:noFill/>
-        </p:spPr>
-        <p:txBody>
-          <a:bodyPr wrap="square" lIns="0" rIns="0" tIns="0" bIns="0">
-            <a:spAutoFit/>
-          </a:bodyPr>
-          <a:lstStyle/>
-          <a:p>
-            <a:pPr algn="l"/>
-            <a:r>
-              <a:rPr sz="3200" b="1">
+              <a:rPr sz="3600" b="1">
                 <a:solidFill>
                   <a:srgbClr val="1F3A5F"/>
                 </a:solidFill>
                 <a:latin typeface="Calibri"/>
               </a:rPr>
-              <a:t>Data Quality Issues &amp; Cleaning</a:t>
-            </a:r>
-          </a:p>
-        </p:txBody>
-      </p:sp>
-      <p:sp>
-        <p:nvSpPr>
-          <p:cNvPr id="10" name="Rectangle 9"/>
+              <a:t>Data Quality Issues &amp; Cleaning Methods</a:t>
+            </a:r>
+          </a:p>
+        </p:txBody>
+      </p:sp>
+      <p:sp>
+        <p:nvSpPr>
+          <p:cNvPr id="11" name="Rectangle 10"/>
           <p:cNvSpPr/>
           <p:nvPr/>
         </p:nvSpPr>
         <p:spPr>
           <a:xfrm>
-            <a:off x="502920" y="1417320"/>
-            <a:ext cx="548640" cy="28575"/>
+            <a:off x="502920" y="1554480"/>
+            <a:ext cx="640080" cy="31750"/>
           </a:xfrm>
           <a:prstGeom prst="rect">
             <a:avLst/>
@@ -6206,14 +6663,14 @@
       </p:sp>
       <p:sp>
         <p:nvSpPr>
-          <p:cNvPr id="11" name="TextBox 10"/>
+          <p:cNvPr id="12" name="TextBox 11"/>
           <p:cNvSpPr txBox="1"/>
           <p:nvPr/>
         </p:nvSpPr>
         <p:spPr>
           <a:xfrm>
             <a:off x="502920" y="1691640"/>
-            <a:ext cx="10972800" cy="365760"/>
+            <a:ext cx="11155680" cy="365760"/>
           </a:xfrm>
           <a:prstGeom prst="rect">
             <a:avLst/>
@@ -6228,27 +6685,27 @@
           <a:p>
             <a:pPr algn="l"/>
             <a:r>
-              <a:rPr sz="1300" b="0">
-                <a:solidFill>
-                  <a:srgbClr val="6B7380"/>
-                </a:solidFill>
-                <a:latin typeface="Calibri"/>
-              </a:rPr>
-              <a:t>Identified during profiling (profile_data.py); resolved during ETL (etl.py).</a:t>
-            </a:r>
-          </a:p>
-        </p:txBody>
-      </p:sp>
-      <p:sp>
-        <p:nvSpPr>
-          <p:cNvPr id="12" name="Rectangle 11"/>
+              <a:rPr sz="1500" b="0">
+                <a:solidFill>
+                  <a:srgbClr val="57606E"/>
+                </a:solidFill>
+                <a:latin typeface="Calibri"/>
+              </a:rPr>
+              <a:t>Identified in profile_data.py · Resolved in etl.py · 0 nulls in keys after ETL.</a:t>
+            </a:r>
+          </a:p>
+        </p:txBody>
+      </p:sp>
+      <p:sp>
+        <p:nvSpPr>
+          <p:cNvPr id="13" name="Rectangle 12"/>
           <p:cNvSpPr/>
           <p:nvPr/>
         </p:nvSpPr>
         <p:spPr>
           <a:xfrm>
-            <a:off x="502920" y="2194560"/>
-            <a:ext cx="5532120" cy="4023360"/>
+            <a:off x="502920" y="2240280"/>
+            <a:ext cx="5577840" cy="4023360"/>
           </a:xfrm>
           <a:prstGeom prst="rect">
             <a:avLst/>
@@ -6284,13 +6741,13 @@
       </p:sp>
       <p:sp>
         <p:nvSpPr>
-          <p:cNvPr id="13" name="TextBox 12"/>
-          <p:cNvSpPr txBox="1"/>
-          <p:nvPr/>
-        </p:nvSpPr>
-        <p:spPr>
-          <a:xfrm>
-            <a:off x="731520" y="2286000"/>
+          <p:cNvPr id="14" name="TextBox 13"/>
+          <p:cNvSpPr txBox="1"/>
+          <p:nvPr/>
+        </p:nvSpPr>
+        <p:spPr>
+          <a:xfrm>
+            <a:off x="731520" y="2331720"/>
             <a:ext cx="5120640" cy="365760"/>
           </a:xfrm>
           <a:prstGeom prst="rect">
@@ -6306,7 +6763,7 @@
           <a:p>
             <a:pPr algn="l"/>
             <a:r>
-              <a:rPr sz="1100" b="1">
+              <a:rPr sz="1200" b="1">
                 <a:solidFill>
                   <a:srgbClr val="C9A227"/>
                 </a:solidFill>
@@ -6319,14 +6776,14 @@
       </p:sp>
       <p:sp>
         <p:nvSpPr>
-          <p:cNvPr id="14" name="TextBox 13"/>
-          <p:cNvSpPr txBox="1"/>
-          <p:nvPr/>
-        </p:nvSpPr>
-        <p:spPr>
-          <a:xfrm>
-            <a:off x="731520" y="2651760"/>
-            <a:ext cx="5120640" cy="3474720"/>
+          <p:cNvPr id="15" name="TextBox 14"/>
+          <p:cNvSpPr txBox="1"/>
+          <p:nvPr/>
+        </p:nvSpPr>
+        <p:spPr>
+          <a:xfrm>
+            <a:off x="731520" y="2697480"/>
+            <a:ext cx="5166360" cy="3474720"/>
           </a:xfrm>
           <a:prstGeom prst="rect">
             <a:avLst/>
@@ -6345,22 +6802,22 @@
               </a:lnSpc>
             </a:pPr>
             <a:r>
-              <a:rPr sz="1300" b="1">
+              <a:rPr sz="1500" b="1">
                 <a:solidFill>
                   <a:srgbClr val="1F3A5F"/>
                 </a:solidFill>
                 <a:latin typeface="Calibri"/>
               </a:rPr>
-              <a:t>•  Negative fare amounts</a:t>
-            </a:r>
-            <a:r>
-              <a:rPr sz="1300" b="0">
+              <a:t>•  Negative fares</a:t>
+            </a:r>
+            <a:r>
+              <a:rPr sz="1500" b="0">
                 <a:solidFill>
                   <a:srgbClr val="222A35"/>
                 </a:solidFill>
                 <a:latin typeface="Calibri"/>
               </a:rPr>
-              <a:t> — impute with distance-bin median fare</a:t>
+              <a:t> — median per distance bin (etl.py 84–93)</a:t>
             </a:r>
           </a:p>
           <a:p>
@@ -6370,7 +6827,7 @@
               </a:lnSpc>
             </a:pPr>
             <a:r>
-              <a:rPr sz="1300" b="1">
+              <a:rPr sz="1500" b="1">
                 <a:solidFill>
                   <a:srgbClr val="1F3A5F"/>
                 </a:solidFill>
@@ -6379,13 +6836,13 @@
               <a:t>•  Zero passenger count</a:t>
             </a:r>
             <a:r>
-              <a:rPr sz="1300" b="0">
+              <a:rPr sz="1500" b="0">
                 <a:solidFill>
                   <a:srgbClr val="222A35"/>
                 </a:solidFill>
                 <a:latin typeface="Calibri"/>
               </a:rPr>
-              <a:t> — set minimum to 1 passenger</a:t>
+              <a:t> — round + clip min 1 (etl.py 96–99)</a:t>
             </a:r>
           </a:p>
           <a:p>
@@ -6395,22 +6852,22 @@
               </a:lnSpc>
             </a:pPr>
             <a:r>
-              <a:rPr sz="1300" b="1">
+              <a:rPr sz="1500" b="1">
                 <a:solidFill>
                   <a:srgbClr val="1F3A5F"/>
                 </a:solidFill>
                 <a:latin typeface="Calibri"/>
               </a:rPr>
-              <a:t>•  Non-integer passenger count</a:t>
-            </a:r>
-            <a:r>
-              <a:rPr sz="1300" b="0">
+              <a:t>•  Non-integer passenger</a:t>
+            </a:r>
+            <a:r>
+              <a:rPr sz="1500" b="0">
                 <a:solidFill>
                   <a:srgbClr val="222A35"/>
                 </a:solidFill>
                 <a:latin typeface="Calibri"/>
               </a:rPr>
-              <a:t> — round to nearest integer</a:t>
+              <a:t> — round to integer (etl.py 96–99)</a:t>
             </a:r>
           </a:p>
           <a:p>
@@ -6420,22 +6877,22 @@
               </a:lnSpc>
             </a:pPr>
             <a:r>
-              <a:rPr sz="1300" b="1">
+              <a:rPr sz="1500" b="1">
                 <a:solidFill>
                   <a:srgbClr val="1F3A5F"/>
                 </a:solidFill>
                 <a:latin typeface="Calibri"/>
               </a:rPr>
-              <a:t>•  Duplicate trip rows</a:t>
-            </a:r>
-            <a:r>
-              <a:rPr sz="1300" b="0">
+              <a:t>•  Duplicate rows</a:t>
+            </a:r>
+            <a:r>
+              <a:rPr sz="1500" b="0">
                 <a:solidFill>
                   <a:srgbClr val="222A35"/>
                 </a:solidFill>
                 <a:latin typeface="Calibri"/>
               </a:rPr>
-              <a:t> — dropDuplicates (keep first)</a:t>
+              <a:t> — dropDuplicates (etl.py 71)</a:t>
             </a:r>
           </a:p>
           <a:p>
@@ -6445,35 +6902,35 @@
               </a:lnSpc>
             </a:pPr>
             <a:r>
-              <a:rPr sz="1300" b="1">
+              <a:rPr sz="1500" b="1">
                 <a:solidFill>
                   <a:srgbClr val="1F3A5F"/>
                 </a:solidFill>
                 <a:latin typeface="Calibri"/>
               </a:rPr>
-              <a:t>•  Trip distance outliers</a:t>
-            </a:r>
-            <a:r>
-              <a:rPr sz="1300" b="0">
+              <a:t>•  Distance outliers</a:t>
+            </a:r>
+            <a:r>
+              <a:rPr sz="1500" b="0">
                 <a:solidFill>
                   <a:srgbClr val="222A35"/>
                 </a:solidFill>
                 <a:latin typeface="Calibri"/>
               </a:rPr>
-              <a:t> — cap at 99th percentile</a:t>
-            </a:r>
-          </a:p>
-        </p:txBody>
-      </p:sp>
-      <p:sp>
-        <p:nvSpPr>
-          <p:cNvPr id="15" name="Rectangle 14"/>
+              <a:t> — cap at 99th percentile (etl.py 110–114)</a:t>
+            </a:r>
+          </a:p>
+        </p:txBody>
+      </p:sp>
+      <p:sp>
+        <p:nvSpPr>
+          <p:cNvPr id="16" name="Rectangle 15"/>
           <p:cNvSpPr/>
           <p:nvPr/>
         </p:nvSpPr>
         <p:spPr>
           <a:xfrm>
-            <a:off x="6172200" y="2194560"/>
+            <a:off x="6172200" y="2240280"/>
             <a:ext cx="5532120" cy="4023360"/>
           </a:xfrm>
           <a:prstGeom prst="rect">
@@ -6510,13 +6967,13 @@
       </p:sp>
       <p:sp>
         <p:nvSpPr>
-          <p:cNvPr id="16" name="TextBox 15"/>
-          <p:cNvSpPr txBox="1"/>
-          <p:nvPr/>
-        </p:nvSpPr>
-        <p:spPr>
-          <a:xfrm>
-            <a:off x="6400800" y="2286000"/>
+          <p:cNvPr id="17" name="TextBox 16"/>
+          <p:cNvSpPr txBox="1"/>
+          <p:nvPr/>
+        </p:nvSpPr>
+        <p:spPr>
+          <a:xfrm>
+            <a:off x="6400800" y="2331720"/>
             <a:ext cx="5120640" cy="365760"/>
           </a:xfrm>
           <a:prstGeom prst="rect">
@@ -6532,7 +6989,7 @@
           <a:p>
             <a:pPr algn="l"/>
             <a:r>
-              <a:rPr sz="1100" b="1">
+              <a:rPr sz="1200" b="1">
                 <a:solidFill>
                   <a:srgbClr val="C9A227"/>
                 </a:solidFill>
@@ -6545,13 +7002,13 @@
       </p:sp>
       <p:sp>
         <p:nvSpPr>
-          <p:cNvPr id="17" name="TextBox 16"/>
-          <p:cNvSpPr txBox="1"/>
-          <p:nvPr/>
-        </p:nvSpPr>
-        <p:spPr>
-          <a:xfrm>
-            <a:off x="6400800" y="2651760"/>
+          <p:cNvPr id="18" name="TextBox 17"/>
+          <p:cNvSpPr txBox="1"/>
+          <p:nvPr/>
+        </p:nvSpPr>
+        <p:spPr>
+          <a:xfrm>
+            <a:off x="6400800" y="2697480"/>
             <a:ext cx="5120640" cy="3474720"/>
           </a:xfrm>
           <a:prstGeom prst="rect">
@@ -6571,22 +7028,22 @@
               </a:lnSpc>
             </a:pPr>
             <a:r>
-              <a:rPr sz="1300" b="1">
+              <a:rPr sz="1500" b="1">
                 <a:solidFill>
                   <a:srgbClr val="1F3A5F"/>
                 </a:solidFill>
                 <a:latin typeface="Calibri"/>
               </a:rPr>
-              <a:t>•  Tip greater than fare</a:t>
-            </a:r>
-            <a:r>
-              <a:rPr sz="1300" b="0">
+              <a:t>•  Tip &gt; fare</a:t>
+            </a:r>
+            <a:r>
+              <a:rPr sz="1500" b="0">
                 <a:solidFill>
                   <a:srgbClr val="222A35"/>
                 </a:solidFill>
                 <a:latin typeface="Calibri"/>
               </a:rPr>
-              <a:t> — cap tip at cleaned fare amount</a:t>
+              <a:t> — cap tip at fare (etl.py 102–107)</a:t>
             </a:r>
           </a:p>
           <a:p>
@@ -6596,22 +7053,22 @@
               </a:lnSpc>
             </a:pPr>
             <a:r>
-              <a:rPr sz="1300" b="1">
+              <a:rPr sz="1500" b="1">
                 <a:solidFill>
                   <a:srgbClr val="1F3A5F"/>
                 </a:solidFill>
                 <a:latin typeface="Calibri"/>
               </a:rPr>
-              <a:t>•  Missing numeric values</a:t>
-            </a:r>
-            <a:r>
-              <a:rPr sz="1300" b="0">
+              <a:t>•  Missing numerics</a:t>
+            </a:r>
+            <a:r>
+              <a:rPr sz="1500" b="0">
                 <a:solidFill>
                   <a:srgbClr val="222A35"/>
                 </a:solidFill>
                 <a:latin typeface="Calibri"/>
               </a:rPr>
-              <a:t> — median imputation per column</a:t>
+              <a:t> — median imputation (etl.py 117–125)</a:t>
             </a:r>
           </a:p>
           <a:p>
@@ -6621,22 +7078,22 @@
               </a:lnSpc>
             </a:pPr>
             <a:r>
-              <a:rPr sz="1300" b="1">
+              <a:rPr sz="1500" b="1">
                 <a:solidFill>
                   <a:srgbClr val="1F3A5F"/>
                 </a:solidFill>
                 <a:latin typeface="Calibri"/>
               </a:rPr>
-              <a:t>•  Missing categorical codes</a:t>
-            </a:r>
-            <a:r>
-              <a:rPr sz="1300" b="0">
+              <a:t>•  Missing categorical</a:t>
+            </a:r>
+            <a:r>
+              <a:rPr sz="1500" b="0">
                 <a:solidFill>
                   <a:srgbClr val="222A35"/>
                 </a:solidFill>
                 <a:latin typeface="Calibri"/>
               </a:rPr>
-              <a:t> — fallback to 0 / mode</a:t>
+              <a:t> — fallback to 0 / mode (etl.py 128–131)</a:t>
             </a:r>
           </a:p>
           <a:p>
@@ -6646,7 +7103,7 @@
               </a:lnSpc>
             </a:pPr>
             <a:r>
-              <a:rPr sz="1300" b="1">
+              <a:rPr sz="1500" b="1">
                 <a:solidFill>
                   <a:srgbClr val="1F3A5F"/>
                 </a:solidFill>
@@ -6655,13 +7112,13 @@
               <a:t>•  Datetime inconsistencies</a:t>
             </a:r>
             <a:r>
-              <a:rPr sz="1300" b="0">
+              <a:rPr sz="1500" b="0">
                 <a:solidFill>
                   <a:srgbClr val="222A35"/>
                 </a:solidFill>
                 <a:latin typeface="Calibri"/>
               </a:rPr>
-              <a:t> — standardize to timestamp; derive duration</a:t>
+              <a:t> — to_timestamp + duration (etl.py 74–81)</a:t>
             </a:r>
           </a:p>
           <a:p>
@@ -6671,22 +7128,22 @@
               </a:lnSpc>
             </a:pPr>
             <a:r>
-              <a:rPr sz="1300" b="1">
+              <a:rPr sz="1500" b="1">
                 <a:solidFill>
                   <a:srgbClr val="1F3A5F"/>
                 </a:solidFill>
                 <a:latin typeface="Calibri"/>
               </a:rPr>
-              <a:t>•  Future pickup timestamps</a:t>
-            </a:r>
-            <a:r>
-              <a:rPr sz="1300" b="0">
+              <a:t>•  Future timestamps</a:t>
+            </a:r>
+            <a:r>
+              <a:rPr sz="1500" b="0">
                 <a:solidFill>
                   <a:srgbClr val="222A35"/>
                 </a:solidFill>
                 <a:latin typeface="Calibri"/>
               </a:rPr>
-              <a:t> — replace with hour/weekday median</a:t>
+              <a:t> — median by hour/weekday (profile 86–88)</a:t>
             </a:r>
           </a:p>
         </p:txBody>
@@ -6863,20 +7320,55 @@
           <a:p>
             <a:pPr algn="l"/>
             <a:r>
+              <a:rPr sz="1100" b="0">
+                <a:solidFill>
+                  <a:srgbClr val="57606E"/>
+                </a:solidFill>
+                <a:latin typeface="Calibri"/>
+              </a:rPr>
+              <a:t>Architecture</a:t>
+            </a:r>
+          </a:p>
+        </p:txBody>
+      </p:sp>
+      <p:sp>
+        <p:nvSpPr>
+          <p:cNvPr id="6" name="TextBox 5"/>
+          <p:cNvSpPr txBox="1"/>
+          <p:nvPr/>
+        </p:nvSpPr>
+        <p:spPr>
+          <a:xfrm>
+            <a:off x="457200" y="6693408"/>
+            <a:ext cx="7315200" cy="228600"/>
+          </a:xfrm>
+          <a:prstGeom prst="rect">
+            <a:avLst/>
+          </a:prstGeom>
+          <a:noFill/>
+        </p:spPr>
+        <p:txBody>
+          <a:bodyPr wrap="square" lIns="0" rIns="0" tIns="0" bIns="0">
+            <a:spAutoFit/>
+          </a:bodyPr>
+          <a:lstStyle/>
+          <a:p>
+            <a:pPr algn="l"/>
+            <a:r>
               <a:rPr sz="1000" b="0">
                 <a:solidFill>
-                  <a:srgbClr val="6B7380"/>
-                </a:solidFill>
-                <a:latin typeface="Calibri"/>
-              </a:rPr>
-              <a:t>Pipeline</a:t>
-            </a:r>
-          </a:p>
-        </p:txBody>
-      </p:sp>
-      <p:sp>
-        <p:nvSpPr>
-          <p:cNvPr id="6" name="TextBox 5"/>
+                  <a:srgbClr val="57606E"/>
+                </a:solidFill>
+                <a:latin typeface="Calibri"/>
+              </a:rPr>
+              <a:t>Presenter: Hassaan</a:t>
+            </a:r>
+          </a:p>
+        </p:txBody>
+      </p:sp>
+      <p:sp>
+        <p:nvSpPr>
+          <p:cNvPr id="7" name="TextBox 6"/>
           <p:cNvSpPr txBox="1"/>
           <p:nvPr/>
         </p:nvSpPr>
@@ -6898,27 +7390,62 @@
           <a:p>
             <a:pPr algn="r"/>
             <a:r>
+              <a:rPr sz="1100" b="0">
+                <a:solidFill>
+                  <a:srgbClr val="57606E"/>
+                </a:solidFill>
+                <a:latin typeface="Calibri"/>
+              </a:rPr>
+              <a:t>4 / 11</a:t>
+            </a:r>
+          </a:p>
+        </p:txBody>
+      </p:sp>
+      <p:sp>
+        <p:nvSpPr>
+          <p:cNvPr id="8" name="TextBox 7"/>
+          <p:cNvSpPr txBox="1"/>
+          <p:nvPr/>
+        </p:nvSpPr>
+        <p:spPr>
+          <a:xfrm>
+            <a:off x="7315200" y="6693408"/>
+            <a:ext cx="4572000" cy="228600"/>
+          </a:xfrm>
+          <a:prstGeom prst="rect">
+            <a:avLst/>
+          </a:prstGeom>
+          <a:noFill/>
+        </p:spPr>
+        <p:txBody>
+          <a:bodyPr wrap="square" lIns="0" rIns="0" tIns="0" bIns="0">
+            <a:spAutoFit/>
+          </a:bodyPr>
+          <a:lstStyle/>
+          <a:p>
+            <a:pPr algn="r"/>
+            <a:r>
               <a:rPr sz="1000" b="0">
                 <a:solidFill>
-                  <a:srgbClr val="6B7380"/>
-                </a:solidFill>
-                <a:latin typeface="Calibri"/>
-              </a:rPr>
-              <a:t>4 / 11</a:t>
-            </a:r>
-          </a:p>
-        </p:txBody>
-      </p:sp>
-      <p:sp>
-        <p:nvSpPr>
-          <p:cNvPr id="7" name="TextBox 6"/>
-          <p:cNvSpPr txBox="1"/>
-          <p:nvPr/>
-        </p:nvSpPr>
-        <p:spPr>
-          <a:xfrm>
-            <a:off x="457200" y="6693408"/>
-            <a:ext cx="7315200" cy="228600"/>
+                  <a:srgbClr val="57606E"/>
+                </a:solidFill>
+                <a:latin typeface="Calibri"/>
+              </a:rPr>
+              <a:t>Group 17  ·  BSCS-13A  ·  BDA</a:t>
+            </a:r>
+          </a:p>
+        </p:txBody>
+      </p:sp>
+      <p:sp>
+        <p:nvSpPr>
+          <p:cNvPr id="9" name="TextBox 8"/>
+          <p:cNvSpPr txBox="1"/>
+          <p:nvPr/>
+        </p:nvSpPr>
+        <p:spPr>
+          <a:xfrm>
+            <a:off x="502920" y="411480"/>
+            <a:ext cx="10058400" cy="365760"/>
           </a:xfrm>
           <a:prstGeom prst="rect">
             <a:avLst/>
@@ -6933,27 +7460,27 @@
           <a:p>
             <a:pPr algn="l"/>
             <a:r>
-              <a:rPr sz="900" b="0">
-                <a:solidFill>
-                  <a:srgbClr val="6B7380"/>
-                </a:solidFill>
-                <a:latin typeface="Calibri"/>
-              </a:rPr>
-              <a:t>NYC Yellow Taxi Pipeline · Group 17 · BSCS-13A</a:t>
-            </a:r>
-          </a:p>
-        </p:txBody>
-      </p:sp>
-      <p:sp>
-        <p:nvSpPr>
-          <p:cNvPr id="8" name="TextBox 7"/>
-          <p:cNvSpPr txBox="1"/>
-          <p:nvPr/>
-        </p:nvSpPr>
-        <p:spPr>
-          <a:xfrm>
-            <a:off x="502920" y="411480"/>
-            <a:ext cx="10058400" cy="320040"/>
+              <a:rPr sz="1300" b="1">
+                <a:solidFill>
+                  <a:srgbClr val="C9A227"/>
+                </a:solidFill>
+                <a:latin typeface="Calibri"/>
+              </a:rPr>
+              <a:t>SLIDE 4</a:t>
+            </a:r>
+          </a:p>
+        </p:txBody>
+      </p:sp>
+      <p:sp>
+        <p:nvSpPr>
+          <p:cNvPr id="10" name="TextBox 9"/>
+          <p:cNvSpPr txBox="1"/>
+          <p:nvPr/>
+        </p:nvSpPr>
+        <p:spPr>
+          <a:xfrm>
+            <a:off x="502920" y="777240"/>
+            <a:ext cx="10972800" cy="868680"/>
           </a:xfrm>
           <a:prstGeom prst="rect">
             <a:avLst/>
@@ -6968,62 +7495,27 @@
           <a:p>
             <a:pPr algn="l"/>
             <a:r>
-              <a:rPr sz="1100" b="1">
-                <a:solidFill>
-                  <a:srgbClr val="C9A227"/>
-                </a:solidFill>
-                <a:latin typeface="Calibri"/>
-              </a:rPr>
-              <a:t>BONUS</a:t>
-            </a:r>
-          </a:p>
-        </p:txBody>
-      </p:sp>
-      <p:sp>
-        <p:nvSpPr>
-          <p:cNvPr id="9" name="TextBox 8"/>
-          <p:cNvSpPr txBox="1"/>
-          <p:nvPr/>
-        </p:nvSpPr>
-        <p:spPr>
-          <a:xfrm>
-            <a:off x="502920" y="713232"/>
-            <a:ext cx="10972800" cy="777240"/>
-          </a:xfrm>
-          <a:prstGeom prst="rect">
-            <a:avLst/>
-          </a:prstGeom>
-          <a:noFill/>
-        </p:spPr>
-        <p:txBody>
-          <a:bodyPr wrap="square" lIns="0" rIns="0" tIns="0" bIns="0">
-            <a:spAutoFit/>
-          </a:bodyPr>
-          <a:lstStyle/>
-          <a:p>
-            <a:pPr algn="l"/>
-            <a:r>
-              <a:rPr sz="3200" b="1">
+              <a:rPr sz="3600" b="1">
                 <a:solidFill>
                   <a:srgbClr val="1F3A5F"/>
                 </a:solidFill>
                 <a:latin typeface="Calibri"/>
               </a:rPr>
-              <a:t>Pipeline Architecture</a:t>
-            </a:r>
-          </a:p>
-        </p:txBody>
-      </p:sp>
-      <p:sp>
-        <p:nvSpPr>
-          <p:cNvPr id="10" name="Rectangle 9"/>
+              <a:t>End-to-End Pipeline Architecture</a:t>
+            </a:r>
+          </a:p>
+        </p:txBody>
+      </p:sp>
+      <p:sp>
+        <p:nvSpPr>
+          <p:cNvPr id="11" name="Rectangle 10"/>
           <p:cNvSpPr/>
           <p:nvPr/>
         </p:nvSpPr>
         <p:spPr>
           <a:xfrm>
-            <a:off x="502920" y="1417320"/>
-            <a:ext cx="548640" cy="28575"/>
+            <a:off x="502920" y="1554480"/>
+            <a:ext cx="640080" cy="31750"/>
           </a:xfrm>
           <a:prstGeom prst="rect">
             <a:avLst/>
@@ -7059,14 +7551,14 @@
       </p:sp>
       <p:sp>
         <p:nvSpPr>
-          <p:cNvPr id="11" name="Rectangle 10"/>
+          <p:cNvPr id="12" name="Rectangle 11"/>
           <p:cNvSpPr/>
           <p:nvPr/>
         </p:nvSpPr>
         <p:spPr>
           <a:xfrm>
-            <a:off x="502920" y="1920240"/>
-            <a:ext cx="2157984" cy="2926080"/>
+            <a:off x="502920" y="1828800"/>
+            <a:ext cx="2157984" cy="2834640"/>
           </a:xfrm>
           <a:prstGeom prst="rect">
             <a:avLst/>
@@ -7102,14 +7594,14 @@
       </p:sp>
       <p:sp>
         <p:nvSpPr>
-          <p:cNvPr id="12" name="Rectangle 11"/>
+          <p:cNvPr id="13" name="Rectangle 12"/>
           <p:cNvSpPr/>
           <p:nvPr/>
         </p:nvSpPr>
         <p:spPr>
           <a:xfrm>
-            <a:off x="502920" y="1920240"/>
-            <a:ext cx="2157984" cy="54864"/>
+            <a:off x="502920" y="1828800"/>
+            <a:ext cx="2157984" cy="64008"/>
           </a:xfrm>
           <a:prstGeom prst="rect">
             <a:avLst/>
@@ -7145,13 +7637,13 @@
       </p:sp>
       <p:sp>
         <p:nvSpPr>
-          <p:cNvPr id="13" name="TextBox 12"/>
-          <p:cNvSpPr txBox="1"/>
-          <p:nvPr/>
-        </p:nvSpPr>
-        <p:spPr>
-          <a:xfrm>
-            <a:off x="685800" y="2148840"/>
+          <p:cNvPr id="14" name="TextBox 13"/>
+          <p:cNvSpPr txBox="1"/>
+          <p:nvPr/>
+        </p:nvSpPr>
+        <p:spPr>
+          <a:xfrm>
+            <a:off x="685800" y="2057400"/>
             <a:ext cx="1828800" cy="457200"/>
           </a:xfrm>
           <a:prstGeom prst="rect">
@@ -7167,7 +7659,7 @@
           <a:p>
             <a:pPr algn="l"/>
             <a:r>
-              <a:rPr sz="2000" b="1">
+              <a:rPr sz="2200" b="1">
                 <a:solidFill>
                   <a:srgbClr val="1F3A5F"/>
                 </a:solidFill>
@@ -7180,13 +7672,13 @@
       </p:sp>
       <p:sp>
         <p:nvSpPr>
-          <p:cNvPr id="14" name="TextBox 13"/>
-          <p:cNvSpPr txBox="1"/>
-          <p:nvPr/>
-        </p:nvSpPr>
-        <p:spPr>
-          <a:xfrm>
-            <a:off x="685800" y="2697480"/>
+          <p:cNvPr id="15" name="TextBox 14"/>
+          <p:cNvSpPr txBox="1"/>
+          <p:nvPr/>
+        </p:nvSpPr>
+        <p:spPr>
+          <a:xfrm>
+            <a:off x="685800" y="2651760"/>
             <a:ext cx="1828800" cy="365760"/>
           </a:xfrm>
           <a:prstGeom prst="rect">
@@ -7202,7 +7694,7 @@
           <a:p>
             <a:pPr algn="l"/>
             <a:r>
-              <a:rPr sz="1100" b="1">
+              <a:rPr sz="1200" b="1">
                 <a:solidFill>
                   <a:srgbClr val="C9A227"/>
                 </a:solidFill>
@@ -7215,14 +7707,14 @@
       </p:sp>
       <p:sp>
         <p:nvSpPr>
-          <p:cNvPr id="15" name="TextBox 14"/>
-          <p:cNvSpPr txBox="1"/>
-          <p:nvPr/>
-        </p:nvSpPr>
-        <p:spPr>
-          <a:xfrm>
-            <a:off x="685800" y="3063240"/>
-            <a:ext cx="1828800" cy="1645920"/>
+          <p:cNvPr id="16" name="TextBox 15"/>
+          <p:cNvSpPr txBox="1"/>
+          <p:nvPr/>
+        </p:nvSpPr>
+        <p:spPr>
+          <a:xfrm>
+            <a:off x="685800" y="3017520"/>
+            <a:ext cx="1828800" cy="1463040"/>
           </a:xfrm>
           <a:prstGeom prst="rect">
             <a:avLst/>
@@ -7237,27 +7729,27 @@
           <a:p>
             <a:pPr algn="l"/>
             <a:r>
-              <a:rPr sz="1200" b="0">
+              <a:rPr sz="1400" b="0">
                 <a:solidFill>
                   <a:srgbClr val="222A35"/>
                 </a:solidFill>
                 <a:latin typeface="Calibri"/>
               </a:rPr>
-              <a:t>Download · validate · upload to HDFS</a:t>
-            </a:r>
-          </a:p>
-        </p:txBody>
-      </p:sp>
-      <p:sp>
-        <p:nvSpPr>
-          <p:cNvPr id="16" name="Rectangle 15"/>
+              <a:t>Download · validate ≥ 500K rows · upload to HDFS</a:t>
+            </a:r>
+          </a:p>
+        </p:txBody>
+      </p:sp>
+      <p:sp>
+        <p:nvSpPr>
+          <p:cNvPr id="17" name="Rectangle 16"/>
           <p:cNvSpPr/>
           <p:nvPr/>
         </p:nvSpPr>
         <p:spPr>
           <a:xfrm>
-            <a:off x="2825496" y="1920240"/>
-            <a:ext cx="2157984" cy="2926080"/>
+            <a:off x="2825496" y="1828800"/>
+            <a:ext cx="2157984" cy="2834640"/>
           </a:xfrm>
           <a:prstGeom prst="rect">
             <a:avLst/>
@@ -7293,14 +7785,14 @@
       </p:sp>
       <p:sp>
         <p:nvSpPr>
-          <p:cNvPr id="17" name="Rectangle 16"/>
+          <p:cNvPr id="18" name="Rectangle 17"/>
           <p:cNvSpPr/>
           <p:nvPr/>
         </p:nvSpPr>
         <p:spPr>
           <a:xfrm>
-            <a:off x="2825496" y="1920240"/>
-            <a:ext cx="2157984" cy="54864"/>
+            <a:off x="2825496" y="1828800"/>
+            <a:ext cx="2157984" cy="64008"/>
           </a:xfrm>
           <a:prstGeom prst="rect">
             <a:avLst/>
@@ -7336,13 +7828,13 @@
       </p:sp>
       <p:sp>
         <p:nvSpPr>
-          <p:cNvPr id="18" name="TextBox 17"/>
-          <p:cNvSpPr txBox="1"/>
-          <p:nvPr/>
-        </p:nvSpPr>
-        <p:spPr>
-          <a:xfrm>
-            <a:off x="3008376" y="2148840"/>
+          <p:cNvPr id="19" name="TextBox 18"/>
+          <p:cNvSpPr txBox="1"/>
+          <p:nvPr/>
+        </p:nvSpPr>
+        <p:spPr>
+          <a:xfrm>
+            <a:off x="3008376" y="2057400"/>
             <a:ext cx="1828800" cy="457200"/>
           </a:xfrm>
           <a:prstGeom prst="rect">
@@ -7358,7 +7850,7 @@
           <a:p>
             <a:pPr algn="l"/>
             <a:r>
-              <a:rPr sz="2000" b="1">
+              <a:rPr sz="2200" b="1">
                 <a:solidFill>
                   <a:srgbClr val="1F3A5F"/>
                 </a:solidFill>
@@ -7371,13 +7863,13 @@
       </p:sp>
       <p:sp>
         <p:nvSpPr>
-          <p:cNvPr id="19" name="TextBox 18"/>
-          <p:cNvSpPr txBox="1"/>
-          <p:nvPr/>
-        </p:nvSpPr>
-        <p:spPr>
-          <a:xfrm>
-            <a:off x="3008376" y="2697480"/>
+          <p:cNvPr id="20" name="TextBox 19"/>
+          <p:cNvSpPr txBox="1"/>
+          <p:nvPr/>
+        </p:nvSpPr>
+        <p:spPr>
+          <a:xfrm>
+            <a:off x="3008376" y="2651760"/>
             <a:ext cx="1828800" cy="365760"/>
           </a:xfrm>
           <a:prstGeom prst="rect">
@@ -7393,7 +7885,7 @@
           <a:p>
             <a:pPr algn="l"/>
             <a:r>
-              <a:rPr sz="1100" b="1">
+              <a:rPr sz="1200" b="1">
                 <a:solidFill>
                   <a:srgbClr val="C9A227"/>
                 </a:solidFill>
@@ -7406,14 +7898,14 @@
       </p:sp>
       <p:sp>
         <p:nvSpPr>
-          <p:cNvPr id="20" name="TextBox 19"/>
-          <p:cNvSpPr txBox="1"/>
-          <p:nvPr/>
-        </p:nvSpPr>
-        <p:spPr>
-          <a:xfrm>
-            <a:off x="3008376" y="3063240"/>
-            <a:ext cx="1828800" cy="1645920"/>
+          <p:cNvPr id="21" name="TextBox 20"/>
+          <p:cNvSpPr txBox="1"/>
+          <p:nvPr/>
+        </p:nvSpPr>
+        <p:spPr>
+          <a:xfrm>
+            <a:off x="3008376" y="3017520"/>
+            <a:ext cx="1828800" cy="1463040"/>
           </a:xfrm>
           <a:prstGeom prst="rect">
             <a:avLst/>
@@ -7428,27 +7920,27 @@
           <a:p>
             <a:pPr algn="l"/>
             <a:r>
-              <a:rPr sz="1200" b="0">
+              <a:rPr sz="1400" b="0">
                 <a:solidFill>
                   <a:srgbClr val="222A35"/>
                 </a:solidFill>
                 <a:latin typeface="Calibri"/>
               </a:rPr>
-              <a:t>Schema · missing · stats · QA</a:t>
-            </a:r>
-          </a:p>
-        </p:txBody>
-      </p:sp>
-      <p:sp>
-        <p:nvSpPr>
-          <p:cNvPr id="21" name="Rectangle 20"/>
+              <a:t>Schema · missing · stats · DQ issues</a:t>
+            </a:r>
+          </a:p>
+        </p:txBody>
+      </p:sp>
+      <p:sp>
+        <p:nvSpPr>
+          <p:cNvPr id="22" name="Rectangle 21"/>
           <p:cNvSpPr/>
           <p:nvPr/>
         </p:nvSpPr>
         <p:spPr>
           <a:xfrm>
-            <a:off x="5148072" y="1920240"/>
-            <a:ext cx="2157984" cy="2926080"/>
+            <a:off x="5148072" y="1828800"/>
+            <a:ext cx="2157984" cy="2834640"/>
           </a:xfrm>
           <a:prstGeom prst="rect">
             <a:avLst/>
@@ -7484,14 +7976,14 @@
       </p:sp>
       <p:sp>
         <p:nvSpPr>
-          <p:cNvPr id="22" name="Rectangle 21"/>
+          <p:cNvPr id="23" name="Rectangle 22"/>
           <p:cNvSpPr/>
           <p:nvPr/>
         </p:nvSpPr>
         <p:spPr>
           <a:xfrm>
-            <a:off x="5148072" y="1920240"/>
-            <a:ext cx="2157984" cy="54864"/>
+            <a:off x="5148072" y="1828800"/>
+            <a:ext cx="2157984" cy="64008"/>
           </a:xfrm>
           <a:prstGeom prst="rect">
             <a:avLst/>
@@ -7527,13 +8019,13 @@
       </p:sp>
       <p:sp>
         <p:nvSpPr>
-          <p:cNvPr id="23" name="TextBox 22"/>
-          <p:cNvSpPr txBox="1"/>
-          <p:nvPr/>
-        </p:nvSpPr>
-        <p:spPr>
-          <a:xfrm>
-            <a:off x="5330952" y="2148840"/>
+          <p:cNvPr id="24" name="TextBox 23"/>
+          <p:cNvSpPr txBox="1"/>
+          <p:nvPr/>
+        </p:nvSpPr>
+        <p:spPr>
+          <a:xfrm>
+            <a:off x="5330952" y="2057400"/>
             <a:ext cx="1828800" cy="457200"/>
           </a:xfrm>
           <a:prstGeom prst="rect">
@@ -7549,7 +8041,7 @@
           <a:p>
             <a:pPr algn="l"/>
             <a:r>
-              <a:rPr sz="2000" b="1">
+              <a:rPr sz="2200" b="1">
                 <a:solidFill>
                   <a:srgbClr val="1F3A5F"/>
                 </a:solidFill>
@@ -7562,13 +8054,13 @@
       </p:sp>
       <p:sp>
         <p:nvSpPr>
-          <p:cNvPr id="24" name="TextBox 23"/>
-          <p:cNvSpPr txBox="1"/>
-          <p:nvPr/>
-        </p:nvSpPr>
-        <p:spPr>
-          <a:xfrm>
-            <a:off x="5330952" y="2697480"/>
+          <p:cNvPr id="25" name="TextBox 24"/>
+          <p:cNvSpPr txBox="1"/>
+          <p:nvPr/>
+        </p:nvSpPr>
+        <p:spPr>
+          <a:xfrm>
+            <a:off x="5330952" y="2651760"/>
             <a:ext cx="1828800" cy="365760"/>
           </a:xfrm>
           <a:prstGeom prst="rect">
@@ -7584,7 +8076,7 @@
           <a:p>
             <a:pPr algn="l"/>
             <a:r>
-              <a:rPr sz="1100" b="1">
+              <a:rPr sz="1200" b="1">
                 <a:solidFill>
                   <a:srgbClr val="C9A227"/>
                 </a:solidFill>
@@ -7597,14 +8089,14 @@
       </p:sp>
       <p:sp>
         <p:nvSpPr>
-          <p:cNvPr id="25" name="TextBox 24"/>
-          <p:cNvSpPr txBox="1"/>
-          <p:nvPr/>
-        </p:nvSpPr>
-        <p:spPr>
-          <a:xfrm>
-            <a:off x="5330952" y="3063240"/>
-            <a:ext cx="1828800" cy="1645920"/>
+          <p:cNvPr id="26" name="TextBox 25"/>
+          <p:cNvSpPr txBox="1"/>
+          <p:nvPr/>
+        </p:nvSpPr>
+        <p:spPr>
+          <a:xfrm>
+            <a:off x="5330952" y="3017520"/>
+            <a:ext cx="1828800" cy="1463040"/>
           </a:xfrm>
           <a:prstGeom prst="rect">
             <a:avLst/>
@@ -7619,27 +8111,27 @@
           <a:p>
             <a:pPr algn="l"/>
             <a:r>
-              <a:rPr sz="1200" b="0">
+              <a:rPr sz="1400" b="0">
                 <a:solidFill>
                   <a:srgbClr val="222A35"/>
                 </a:solidFill>
                 <a:latin typeface="Calibri"/>
               </a:rPr>
-              <a:t>Clean · transform · model · partition</a:t>
-            </a:r>
-          </a:p>
-        </p:txBody>
-      </p:sp>
-      <p:sp>
-        <p:nvSpPr>
-          <p:cNvPr id="26" name="Rectangle 25"/>
+              <a:t>Clean · derive · star schema · partition</a:t>
+            </a:r>
+          </a:p>
+        </p:txBody>
+      </p:sp>
+      <p:sp>
+        <p:nvSpPr>
+          <p:cNvPr id="27" name="Rectangle 26"/>
           <p:cNvSpPr/>
           <p:nvPr/>
         </p:nvSpPr>
         <p:spPr>
           <a:xfrm>
-            <a:off x="7470648" y="1920240"/>
-            <a:ext cx="2157984" cy="2926080"/>
+            <a:off x="7470648" y="1828800"/>
+            <a:ext cx="2157984" cy="2834640"/>
           </a:xfrm>
           <a:prstGeom prst="rect">
             <a:avLst/>
@@ -7675,14 +8167,14 @@
       </p:sp>
       <p:sp>
         <p:nvSpPr>
-          <p:cNvPr id="27" name="Rectangle 26"/>
+          <p:cNvPr id="28" name="Rectangle 27"/>
           <p:cNvSpPr/>
           <p:nvPr/>
         </p:nvSpPr>
         <p:spPr>
           <a:xfrm>
-            <a:off x="7470648" y="1920240"/>
-            <a:ext cx="2157984" cy="54864"/>
+            <a:off x="7470648" y="1828800"/>
+            <a:ext cx="2157984" cy="64008"/>
           </a:xfrm>
           <a:prstGeom prst="rect">
             <a:avLst/>
@@ -7718,13 +8210,13 @@
       </p:sp>
       <p:sp>
         <p:nvSpPr>
-          <p:cNvPr id="28" name="TextBox 27"/>
-          <p:cNvSpPr txBox="1"/>
-          <p:nvPr/>
-        </p:nvSpPr>
-        <p:spPr>
-          <a:xfrm>
-            <a:off x="7653528" y="2148840"/>
+          <p:cNvPr id="29" name="TextBox 28"/>
+          <p:cNvSpPr txBox="1"/>
+          <p:nvPr/>
+        </p:nvSpPr>
+        <p:spPr>
+          <a:xfrm>
+            <a:off x="7653528" y="2057400"/>
             <a:ext cx="1828800" cy="457200"/>
           </a:xfrm>
           <a:prstGeom prst="rect">
@@ -7740,7 +8232,7 @@
           <a:p>
             <a:pPr algn="l"/>
             <a:r>
-              <a:rPr sz="2000" b="1">
+              <a:rPr sz="2200" b="1">
                 <a:solidFill>
                   <a:srgbClr val="1F3A5F"/>
                 </a:solidFill>
@@ -7753,13 +8245,13 @@
       </p:sp>
       <p:sp>
         <p:nvSpPr>
-          <p:cNvPr id="29" name="TextBox 28"/>
-          <p:cNvSpPr txBox="1"/>
-          <p:nvPr/>
-        </p:nvSpPr>
-        <p:spPr>
-          <a:xfrm>
-            <a:off x="7653528" y="2697480"/>
+          <p:cNvPr id="30" name="TextBox 29"/>
+          <p:cNvSpPr txBox="1"/>
+          <p:nvPr/>
+        </p:nvSpPr>
+        <p:spPr>
+          <a:xfrm>
+            <a:off x="7653528" y="2651760"/>
             <a:ext cx="1828800" cy="365760"/>
           </a:xfrm>
           <a:prstGeom prst="rect">
@@ -7775,27 +8267,27 @@
           <a:p>
             <a:pPr algn="l"/>
             <a:r>
-              <a:rPr sz="1100" b="1">
+              <a:rPr sz="1200" b="1">
                 <a:solidFill>
                   <a:srgbClr val="C9A227"/>
                 </a:solidFill>
                 <a:latin typeface="Calibri"/>
               </a:rPr>
-              <a:t>analytics.py (Spark SQL)</a:t>
-            </a:r>
-          </a:p>
-        </p:txBody>
-      </p:sp>
-      <p:sp>
-        <p:nvSpPr>
-          <p:cNvPr id="30" name="TextBox 29"/>
-          <p:cNvSpPr txBox="1"/>
-          <p:nvPr/>
-        </p:nvSpPr>
-        <p:spPr>
-          <a:xfrm>
-            <a:off x="7653528" y="3063240"/>
-            <a:ext cx="1828800" cy="1645920"/>
+              <a:t>analytics.py</a:t>
+            </a:r>
+          </a:p>
+        </p:txBody>
+      </p:sp>
+      <p:sp>
+        <p:nvSpPr>
+          <p:cNvPr id="31" name="TextBox 30"/>
+          <p:cNvSpPr txBox="1"/>
+          <p:nvPr/>
+        </p:nvSpPr>
+        <p:spPr>
+          <a:xfrm>
+            <a:off x="7653528" y="3017520"/>
+            <a:ext cx="1828800" cy="1463040"/>
           </a:xfrm>
           <a:prstGeom prst="rect">
             <a:avLst/>
@@ -7810,27 +8302,27 @@
           <a:p>
             <a:pPr algn="l"/>
             <a:r>
-              <a:rPr sz="1200" b="0">
+              <a:rPr sz="1400" b="0">
                 <a:solidFill>
                   <a:srgbClr val="222A35"/>
                 </a:solidFill>
                 <a:latin typeface="Calibri"/>
               </a:rPr>
-              <a:t>5 business questions · charts</a:t>
-            </a:r>
-          </a:p>
-        </p:txBody>
-      </p:sp>
-      <p:sp>
-        <p:nvSpPr>
-          <p:cNvPr id="31" name="Rectangle 30"/>
+              <a:t>5 Spark SQL queries · 4 charts</a:t>
+            </a:r>
+          </a:p>
+        </p:txBody>
+      </p:sp>
+      <p:sp>
+        <p:nvSpPr>
+          <p:cNvPr id="32" name="Rectangle 31"/>
           <p:cNvSpPr/>
           <p:nvPr/>
         </p:nvSpPr>
         <p:spPr>
           <a:xfrm>
-            <a:off x="9793224" y="1920240"/>
-            <a:ext cx="2157984" cy="2926080"/>
+            <a:off x="9793224" y="1828800"/>
+            <a:ext cx="2157984" cy="2834640"/>
           </a:xfrm>
           <a:prstGeom prst="rect">
             <a:avLst/>
@@ -7866,14 +8358,14 @@
       </p:sp>
       <p:sp>
         <p:nvSpPr>
-          <p:cNvPr id="32" name="Rectangle 31"/>
+          <p:cNvPr id="33" name="Rectangle 32"/>
           <p:cNvSpPr/>
           <p:nvPr/>
         </p:nvSpPr>
         <p:spPr>
           <a:xfrm>
-            <a:off x="9793224" y="1920240"/>
-            <a:ext cx="2157984" cy="54864"/>
+            <a:off x="9793224" y="1828800"/>
+            <a:ext cx="2157984" cy="64008"/>
           </a:xfrm>
           <a:prstGeom prst="rect">
             <a:avLst/>
@@ -7909,13 +8401,13 @@
       </p:sp>
       <p:sp>
         <p:nvSpPr>
-          <p:cNvPr id="33" name="TextBox 32"/>
-          <p:cNvSpPr txBox="1"/>
-          <p:nvPr/>
-        </p:nvSpPr>
-        <p:spPr>
-          <a:xfrm>
-            <a:off x="9976104" y="2148840"/>
+          <p:cNvPr id="34" name="TextBox 33"/>
+          <p:cNvSpPr txBox="1"/>
+          <p:nvPr/>
+        </p:nvSpPr>
+        <p:spPr>
+          <a:xfrm>
+            <a:off x="9976104" y="2057400"/>
             <a:ext cx="1828800" cy="457200"/>
           </a:xfrm>
           <a:prstGeom prst="rect">
@@ -7931,7 +8423,7 @@
           <a:p>
             <a:pPr algn="l"/>
             <a:r>
-              <a:rPr sz="2000" b="1">
+              <a:rPr sz="2200" b="1">
                 <a:solidFill>
                   <a:srgbClr val="1F3A5F"/>
                 </a:solidFill>
@@ -7944,13 +8436,13 @@
       </p:sp>
       <p:sp>
         <p:nvSpPr>
-          <p:cNvPr id="34" name="TextBox 33"/>
-          <p:cNvSpPr txBox="1"/>
-          <p:nvPr/>
-        </p:nvSpPr>
-        <p:spPr>
-          <a:xfrm>
-            <a:off x="9976104" y="2697480"/>
+          <p:cNvPr id="35" name="TextBox 34"/>
+          <p:cNvSpPr txBox="1"/>
+          <p:nvPr/>
+        </p:nvSpPr>
+        <p:spPr>
+          <a:xfrm>
+            <a:off x="9976104" y="2651760"/>
             <a:ext cx="1828800" cy="365760"/>
           </a:xfrm>
           <a:prstGeom prst="rect">
@@ -7966,27 +8458,27 @@
           <a:p>
             <a:pPr algn="l"/>
             <a:r>
-              <a:rPr sz="1100" b="1">
+              <a:rPr sz="1200" b="1">
                 <a:solidFill>
                   <a:srgbClr val="C9A227"/>
                 </a:solidFill>
                 <a:latin typeface="Calibri"/>
               </a:rPr>
-              <a:t>build_final_report.py</a:t>
-            </a:r>
-          </a:p>
-        </p:txBody>
-      </p:sp>
-      <p:sp>
-        <p:nvSpPr>
-          <p:cNvPr id="35" name="TextBox 34"/>
-          <p:cNvSpPr txBox="1"/>
-          <p:nvPr/>
-        </p:nvSpPr>
-        <p:spPr>
-          <a:xfrm>
-            <a:off x="9976104" y="3063240"/>
-            <a:ext cx="1828800" cy="1645920"/>
+              <a:t>build_final_report</a:t>
+            </a:r>
+          </a:p>
+        </p:txBody>
+      </p:sp>
+      <p:sp>
+        <p:nvSpPr>
+          <p:cNvPr id="36" name="TextBox 35"/>
+          <p:cNvSpPr txBox="1"/>
+          <p:nvPr/>
+        </p:nvSpPr>
+        <p:spPr>
+          <a:xfrm>
+            <a:off x="9976104" y="3017520"/>
+            <a:ext cx="1828800" cy="1463040"/>
           </a:xfrm>
           <a:prstGeom prst="rect">
             <a:avLst/>
@@ -8001,7 +8493,7 @@
           <a:p>
             <a:pPr algn="l"/>
             <a:r>
-              <a:rPr sz="1200" b="0">
+              <a:rPr sz="1400" b="0">
                 <a:solidFill>
                   <a:srgbClr val="222A35"/>
                 </a:solidFill>
@@ -8014,14 +8506,14 @@
       </p:sp>
       <p:sp>
         <p:nvSpPr>
-          <p:cNvPr id="36" name="TextBox 35"/>
-          <p:cNvSpPr txBox="1"/>
-          <p:nvPr/>
-        </p:nvSpPr>
-        <p:spPr>
-          <a:xfrm>
-            <a:off x="502920" y="5120640"/>
-            <a:ext cx="10972800" cy="365760"/>
+          <p:cNvPr id="37" name="TextBox 36"/>
+          <p:cNvSpPr txBox="1"/>
+          <p:nvPr/>
+        </p:nvSpPr>
+        <p:spPr>
+          <a:xfrm>
+            <a:off x="502920" y="4937760"/>
+            <a:ext cx="11155680" cy="365760"/>
           </a:xfrm>
           <a:prstGeom prst="rect">
             <a:avLst/>
@@ -8036,27 +8528,27 @@
           <a:p>
             <a:pPr algn="l"/>
             <a:r>
-              <a:rPr sz="1400" b="0">
-                <a:solidFill>
-                  <a:srgbClr val="6B7380"/>
-                </a:solidFill>
-                <a:latin typeface="Calibri"/>
-              </a:rPr>
-              <a:t>Storage layer: HDFS  /warehouse/raw/...  →  /warehouse/processed/...</a:t>
-            </a:r>
-          </a:p>
-        </p:txBody>
-      </p:sp>
-      <p:sp>
-        <p:nvSpPr>
-          <p:cNvPr id="37" name="TextBox 36"/>
-          <p:cNvSpPr txBox="1"/>
-          <p:nvPr/>
-        </p:nvSpPr>
-        <p:spPr>
-          <a:xfrm>
-            <a:off x="502920" y="5486400"/>
-            <a:ext cx="10972800" cy="365760"/>
+              <a:rPr sz="1500" b="0">
+                <a:solidFill>
+                  <a:srgbClr val="57606E"/>
+                </a:solidFill>
+                <a:latin typeface="Calibri"/>
+              </a:rPr>
+              <a:t>Storage:  HDFS  /warehouse/raw/...  →  /warehouse/processed/...</a:t>
+            </a:r>
+          </a:p>
+        </p:txBody>
+      </p:sp>
+      <p:sp>
+        <p:nvSpPr>
+          <p:cNvPr id="38" name="TextBox 37"/>
+          <p:cNvSpPr txBox="1"/>
+          <p:nvPr/>
+        </p:nvSpPr>
+        <p:spPr>
+          <a:xfrm>
+            <a:off x="502920" y="5349240"/>
+            <a:ext cx="11155680" cy="365760"/>
           </a:xfrm>
           <a:prstGeom prst="rect">
             <a:avLst/>
@@ -8071,13 +8563,48 @@
           <a:p>
             <a:pPr algn="l"/>
             <a:r>
-              <a:rPr sz="1400" b="0">
-                <a:solidFill>
-                  <a:srgbClr val="6B7380"/>
-                </a:solidFill>
-                <a:latin typeface="Calibri"/>
-              </a:rPr>
-              <a:t>Compute layer: Apache Spark 3.5.8 (PySpark, Spark SQL, broadcast joins, partitioning, caching)</a:t>
+              <a:rPr sz="1500" b="0">
+                <a:solidFill>
+                  <a:srgbClr val="57606E"/>
+                </a:solidFill>
+                <a:latin typeface="Calibri"/>
+              </a:rPr>
+              <a:t>Compute:  Apache Spark 3.5.8  ·  PySpark  ·  Spark SQL  ·  HDFS NameNode + DataNode local cluster</a:t>
+            </a:r>
+          </a:p>
+        </p:txBody>
+      </p:sp>
+      <p:sp>
+        <p:nvSpPr>
+          <p:cNvPr id="39" name="TextBox 38"/>
+          <p:cNvSpPr txBox="1"/>
+          <p:nvPr/>
+        </p:nvSpPr>
+        <p:spPr>
+          <a:xfrm>
+            <a:off x="502920" y="5760720"/>
+            <a:ext cx="11155680" cy="365760"/>
+          </a:xfrm>
+          <a:prstGeom prst="rect">
+            <a:avLst/>
+          </a:prstGeom>
+          <a:noFill/>
+        </p:spPr>
+        <p:txBody>
+          <a:bodyPr wrap="square" lIns="0" rIns="0" tIns="0" bIns="0">
+            <a:spAutoFit/>
+          </a:bodyPr>
+          <a:lstStyle/>
+          <a:p>
+            <a:pPr algn="l"/>
+            <a:r>
+              <a:rPr sz="1500" b="0">
+                <a:solidFill>
+                  <a:srgbClr val="57606E"/>
+                </a:solidFill>
+                <a:latin typeface="Calibri"/>
+              </a:rPr>
+              <a:t>Validation:  etl_summary.json  ·  raw row count = fact_trips row count = 2,964,624  ·  zero nulls in keys</a:t>
             </a:r>
           </a:p>
         </p:txBody>
@@ -8254,20 +8781,55 @@
           <a:p>
             <a:pPr algn="l"/>
             <a:r>
+              <a:rPr sz="1100" b="0">
+                <a:solidFill>
+                  <a:srgbClr val="57606E"/>
+                </a:solidFill>
+                <a:latin typeface="Calibri"/>
+              </a:rPr>
+              <a:t>Warehouse Model</a:t>
+            </a:r>
+          </a:p>
+        </p:txBody>
+      </p:sp>
+      <p:sp>
+        <p:nvSpPr>
+          <p:cNvPr id="6" name="TextBox 5"/>
+          <p:cNvSpPr txBox="1"/>
+          <p:nvPr/>
+        </p:nvSpPr>
+        <p:spPr>
+          <a:xfrm>
+            <a:off x="457200" y="6693408"/>
+            <a:ext cx="7315200" cy="228600"/>
+          </a:xfrm>
+          <a:prstGeom prst="rect">
+            <a:avLst/>
+          </a:prstGeom>
+          <a:noFill/>
+        </p:spPr>
+        <p:txBody>
+          <a:bodyPr wrap="square" lIns="0" rIns="0" tIns="0" bIns="0">
+            <a:spAutoFit/>
+          </a:bodyPr>
+          <a:lstStyle/>
+          <a:p>
+            <a:pPr algn="l"/>
+            <a:r>
               <a:rPr sz="1000" b="0">
                 <a:solidFill>
-                  <a:srgbClr val="6B7380"/>
-                </a:solidFill>
-                <a:latin typeface="Calibri"/>
-              </a:rPr>
-              <a:t>Warehouse Model</a:t>
-            </a:r>
-          </a:p>
-        </p:txBody>
-      </p:sp>
-      <p:sp>
-        <p:nvSpPr>
-          <p:cNvPr id="6" name="TextBox 5"/>
+                  <a:srgbClr val="57606E"/>
+                </a:solidFill>
+                <a:latin typeface="Calibri"/>
+              </a:rPr>
+              <a:t>Presenter: Ahmed</a:t>
+            </a:r>
+          </a:p>
+        </p:txBody>
+      </p:sp>
+      <p:sp>
+        <p:nvSpPr>
+          <p:cNvPr id="7" name="TextBox 6"/>
           <p:cNvSpPr txBox="1"/>
           <p:nvPr/>
         </p:nvSpPr>
@@ -8289,27 +8851,62 @@
           <a:p>
             <a:pPr algn="r"/>
             <a:r>
+              <a:rPr sz="1100" b="0">
+                <a:solidFill>
+                  <a:srgbClr val="57606E"/>
+                </a:solidFill>
+                <a:latin typeface="Calibri"/>
+              </a:rPr>
+              <a:t>5 / 11</a:t>
+            </a:r>
+          </a:p>
+        </p:txBody>
+      </p:sp>
+      <p:sp>
+        <p:nvSpPr>
+          <p:cNvPr id="8" name="TextBox 7"/>
+          <p:cNvSpPr txBox="1"/>
+          <p:nvPr/>
+        </p:nvSpPr>
+        <p:spPr>
+          <a:xfrm>
+            <a:off x="7315200" y="6693408"/>
+            <a:ext cx="4572000" cy="228600"/>
+          </a:xfrm>
+          <a:prstGeom prst="rect">
+            <a:avLst/>
+          </a:prstGeom>
+          <a:noFill/>
+        </p:spPr>
+        <p:txBody>
+          <a:bodyPr wrap="square" lIns="0" rIns="0" tIns="0" bIns="0">
+            <a:spAutoFit/>
+          </a:bodyPr>
+          <a:lstStyle/>
+          <a:p>
+            <a:pPr algn="r"/>
+            <a:r>
               <a:rPr sz="1000" b="0">
                 <a:solidFill>
-                  <a:srgbClr val="6B7380"/>
-                </a:solidFill>
-                <a:latin typeface="Calibri"/>
-              </a:rPr>
-              <a:t>5 / 11</a:t>
-            </a:r>
-          </a:p>
-        </p:txBody>
-      </p:sp>
-      <p:sp>
-        <p:nvSpPr>
-          <p:cNvPr id="7" name="TextBox 6"/>
-          <p:cNvSpPr txBox="1"/>
-          <p:nvPr/>
-        </p:nvSpPr>
-        <p:spPr>
-          <a:xfrm>
-            <a:off x="457200" y="6693408"/>
-            <a:ext cx="7315200" cy="228600"/>
+                  <a:srgbClr val="57606E"/>
+                </a:solidFill>
+                <a:latin typeface="Calibri"/>
+              </a:rPr>
+              <a:t>Group 17  ·  BSCS-13A  ·  BDA</a:t>
+            </a:r>
+          </a:p>
+        </p:txBody>
+      </p:sp>
+      <p:sp>
+        <p:nvSpPr>
+          <p:cNvPr id="9" name="TextBox 8"/>
+          <p:cNvSpPr txBox="1"/>
+          <p:nvPr/>
+        </p:nvSpPr>
+        <p:spPr>
+          <a:xfrm>
+            <a:off x="502920" y="411480"/>
+            <a:ext cx="10058400" cy="365760"/>
           </a:xfrm>
           <a:prstGeom prst="rect">
             <a:avLst/>
@@ -8324,27 +8921,27 @@
           <a:p>
             <a:pPr algn="l"/>
             <a:r>
-              <a:rPr sz="900" b="0">
-                <a:solidFill>
-                  <a:srgbClr val="6B7380"/>
-                </a:solidFill>
-                <a:latin typeface="Calibri"/>
-              </a:rPr>
-              <a:t>NYC Yellow Taxi Pipeline · Group 17 · BSCS-13A</a:t>
-            </a:r>
-          </a:p>
-        </p:txBody>
-      </p:sp>
-      <p:sp>
-        <p:nvSpPr>
-          <p:cNvPr id="8" name="TextBox 7"/>
-          <p:cNvSpPr txBox="1"/>
-          <p:nvPr/>
-        </p:nvSpPr>
-        <p:spPr>
-          <a:xfrm>
-            <a:off x="502920" y="411480"/>
-            <a:ext cx="10058400" cy="320040"/>
+              <a:rPr sz="1300" b="1">
+                <a:solidFill>
+                  <a:srgbClr val="C9A227"/>
+                </a:solidFill>
+                <a:latin typeface="Calibri"/>
+              </a:rPr>
+              <a:t>SLIDE 5</a:t>
+            </a:r>
+          </a:p>
+        </p:txBody>
+      </p:sp>
+      <p:sp>
+        <p:nvSpPr>
+          <p:cNvPr id="10" name="TextBox 9"/>
+          <p:cNvSpPr txBox="1"/>
+          <p:nvPr/>
+        </p:nvSpPr>
+        <p:spPr>
+          <a:xfrm>
+            <a:off x="502920" y="777240"/>
+            <a:ext cx="10972800" cy="868680"/>
           </a:xfrm>
           <a:prstGeom prst="rect">
             <a:avLst/>
@@ -8359,62 +8956,27 @@
           <a:p>
             <a:pPr algn="l"/>
             <a:r>
-              <a:rPr sz="1100" b="1">
-                <a:solidFill>
-                  <a:srgbClr val="C9A227"/>
-                </a:solidFill>
-                <a:latin typeface="Calibri"/>
-              </a:rPr>
-              <a:t>BONUS</a:t>
-            </a:r>
-          </a:p>
-        </p:txBody>
-      </p:sp>
-      <p:sp>
-        <p:nvSpPr>
-          <p:cNvPr id="9" name="TextBox 8"/>
-          <p:cNvSpPr txBox="1"/>
-          <p:nvPr/>
-        </p:nvSpPr>
-        <p:spPr>
-          <a:xfrm>
-            <a:off x="502920" y="713232"/>
-            <a:ext cx="10972800" cy="777240"/>
-          </a:xfrm>
-          <a:prstGeom prst="rect">
-            <a:avLst/>
-          </a:prstGeom>
-          <a:noFill/>
-        </p:spPr>
-        <p:txBody>
-          <a:bodyPr wrap="square" lIns="0" rIns="0" tIns="0" bIns="0">
-            <a:spAutoFit/>
-          </a:bodyPr>
-          <a:lstStyle/>
-          <a:p>
-            <a:pPr algn="l"/>
-            <a:r>
-              <a:rPr sz="3200" b="1">
+              <a:rPr sz="3600" b="1">
                 <a:solidFill>
                   <a:srgbClr val="1F3A5F"/>
                 </a:solidFill>
                 <a:latin typeface="Calibri"/>
               </a:rPr>
-              <a:t>Dimensional Model (Star Schema)</a:t>
-            </a:r>
-          </a:p>
-        </p:txBody>
-      </p:sp>
-      <p:sp>
-        <p:nvSpPr>
-          <p:cNvPr id="10" name="Rectangle 9"/>
+              <a:t>Dimensional Model — Star Schema</a:t>
+            </a:r>
+          </a:p>
+        </p:txBody>
+      </p:sp>
+      <p:sp>
+        <p:nvSpPr>
+          <p:cNvPr id="11" name="Rectangle 10"/>
           <p:cNvSpPr/>
           <p:nvPr/>
         </p:nvSpPr>
         <p:spPr>
           <a:xfrm>
-            <a:off x="502920" y="1417320"/>
-            <a:ext cx="548640" cy="28575"/>
+            <a:off x="502920" y="1554480"/>
+            <a:ext cx="640080" cy="31750"/>
           </a:xfrm>
           <a:prstGeom prst="rect">
             <a:avLst/>
@@ -8450,14 +9012,14 @@
       </p:sp>
       <p:sp>
         <p:nvSpPr>
-          <p:cNvPr id="11" name="Rectangle 10"/>
+          <p:cNvPr id="12" name="Rectangle 11"/>
           <p:cNvSpPr/>
           <p:nvPr/>
         </p:nvSpPr>
         <p:spPr>
           <a:xfrm>
-            <a:off x="4572000" y="2743200"/>
-            <a:ext cx="3108960" cy="1645920"/>
+            <a:off x="4572000" y="2788920"/>
+            <a:ext cx="3108960" cy="1691640"/>
           </a:xfrm>
           <a:prstGeom prst="rect">
             <a:avLst/>
@@ -8493,13 +9055,13 @@
       </p:sp>
       <p:sp>
         <p:nvSpPr>
-          <p:cNvPr id="12" name="TextBox 11"/>
-          <p:cNvSpPr txBox="1"/>
-          <p:nvPr/>
-        </p:nvSpPr>
-        <p:spPr>
-          <a:xfrm>
-            <a:off x="4572000" y="2907792"/>
+          <p:cNvPr id="13" name="TextBox 12"/>
+          <p:cNvSpPr txBox="1"/>
+          <p:nvPr/>
+        </p:nvSpPr>
+        <p:spPr>
+          <a:xfrm>
+            <a:off x="4572000" y="2953512"/>
             <a:ext cx="3108960" cy="457200"/>
           </a:xfrm>
           <a:prstGeom prst="rect">
@@ -8515,7 +9077,7 @@
           <a:p>
             <a:pPr algn="ctr"/>
             <a:r>
-              <a:rPr sz="2000" b="1">
+              <a:rPr sz="2200" b="1">
                 <a:solidFill>
                   <a:srgbClr val="FFFFFF"/>
                 </a:solidFill>
@@ -8528,13 +9090,13 @@
       </p:sp>
       <p:sp>
         <p:nvSpPr>
-          <p:cNvPr id="13" name="TextBox 12"/>
-          <p:cNvSpPr txBox="1"/>
-          <p:nvPr/>
-        </p:nvSpPr>
-        <p:spPr>
-          <a:xfrm>
-            <a:off x="4572000" y="3383280"/>
+          <p:cNvPr id="14" name="TextBox 13"/>
+          <p:cNvSpPr txBox="1"/>
+          <p:nvPr/>
+        </p:nvSpPr>
+        <p:spPr>
+          <a:xfrm>
+            <a:off x="4572000" y="3474720"/>
             <a:ext cx="3108960" cy="457200"/>
           </a:xfrm>
           <a:prstGeom prst="rect">
@@ -8550,7 +9112,7 @@
           <a:p>
             <a:pPr algn="ctr"/>
             <a:r>
-              <a:rPr sz="1400" b="0">
+              <a:rPr sz="1600" b="0">
                 <a:solidFill>
                   <a:srgbClr val="FFFFFF"/>
                 </a:solidFill>
@@ -8563,13 +9125,13 @@
       </p:sp>
       <p:sp>
         <p:nvSpPr>
-          <p:cNvPr id="14" name="TextBox 13"/>
-          <p:cNvSpPr txBox="1"/>
-          <p:nvPr/>
-        </p:nvSpPr>
-        <p:spPr>
-          <a:xfrm>
-            <a:off x="4572000" y="3749040"/>
+          <p:cNvPr id="15" name="TextBox 14"/>
+          <p:cNvSpPr txBox="1"/>
+          <p:nvPr/>
+        </p:nvSpPr>
+        <p:spPr>
+          <a:xfrm>
+            <a:off x="4572000" y="3886200"/>
             <a:ext cx="3108960" cy="457200"/>
           </a:xfrm>
           <a:prstGeom prst="rect">
@@ -8585,27 +9147,27 @@
           <a:p>
             <a:pPr algn="ctr"/>
             <a:r>
-              <a:rPr sz="1100" b="0">
+              <a:rPr sz="1300" b="0">
                 <a:solidFill>
                   <a:srgbClr val="F5F6F8"/>
                 </a:solidFill>
                 <a:latin typeface="Calibri"/>
               </a:rPr>
-              <a:t>trip distance · fare · tip · revenue · IDs</a:t>
-            </a:r>
-          </a:p>
-        </p:txBody>
-      </p:sp>
-      <p:sp>
-        <p:nvSpPr>
-          <p:cNvPr id="15" name="Rectangle 14"/>
+              <a:t>distance · fare · tip · revenue · IDs</a:t>
+            </a:r>
+          </a:p>
+        </p:txBody>
+      </p:sp>
+      <p:sp>
+        <p:nvSpPr>
+          <p:cNvPr id="16" name="Rectangle 15"/>
           <p:cNvSpPr/>
           <p:nvPr/>
         </p:nvSpPr>
         <p:spPr>
           <a:xfrm>
-            <a:off x="548640" y="1783080"/>
-            <a:ext cx="2743200" cy="1188720"/>
+            <a:off x="548640" y="1828800"/>
+            <a:ext cx="2743200" cy="1234440"/>
           </a:xfrm>
           <a:prstGeom prst="rect">
             <a:avLst/>
@@ -8641,14 +9203,14 @@
       </p:sp>
       <p:sp>
         <p:nvSpPr>
-          <p:cNvPr id="16" name="Rectangle 15"/>
+          <p:cNvPr id="17" name="Rectangle 16"/>
           <p:cNvSpPr/>
           <p:nvPr/>
         </p:nvSpPr>
         <p:spPr>
           <a:xfrm>
-            <a:off x="548640" y="1783080"/>
-            <a:ext cx="2743200" cy="54864"/>
+            <a:off x="548640" y="1828800"/>
+            <a:ext cx="2743200" cy="64008"/>
           </a:xfrm>
           <a:prstGeom prst="rect">
             <a:avLst/>
@@ -8684,13 +9246,13 @@
       </p:sp>
       <p:sp>
         <p:nvSpPr>
-          <p:cNvPr id="17" name="TextBox 16"/>
-          <p:cNvSpPr txBox="1"/>
-          <p:nvPr/>
-        </p:nvSpPr>
-        <p:spPr>
-          <a:xfrm>
-            <a:off x="548640" y="1965960"/>
+          <p:cNvPr id="18" name="TextBox 17"/>
+          <p:cNvSpPr txBox="1"/>
+          <p:nvPr/>
+        </p:nvSpPr>
+        <p:spPr>
+          <a:xfrm>
+            <a:off x="548640" y="2029968"/>
             <a:ext cx="2743200" cy="457200"/>
           </a:xfrm>
           <a:prstGeom prst="rect">
@@ -8706,7 +9268,7 @@
           <a:p>
             <a:pPr algn="ctr"/>
             <a:r>
-              <a:rPr sz="1800" b="1">
+              <a:rPr sz="2000" b="1">
                 <a:solidFill>
                   <a:srgbClr val="1F3A5F"/>
                 </a:solidFill>
@@ -8719,13 +9281,13 @@
       </p:sp>
       <p:sp>
         <p:nvSpPr>
-          <p:cNvPr id="18" name="TextBox 17"/>
-          <p:cNvSpPr txBox="1"/>
-          <p:nvPr/>
-        </p:nvSpPr>
-        <p:spPr>
-          <a:xfrm>
-            <a:off x="548640" y="2468880"/>
+          <p:cNvPr id="19" name="TextBox 18"/>
+          <p:cNvSpPr txBox="1"/>
+          <p:nvPr/>
+        </p:nvSpPr>
+        <p:spPr>
+          <a:xfrm>
+            <a:off x="548640" y="2542032"/>
             <a:ext cx="2743200" cy="457200"/>
           </a:xfrm>
           <a:prstGeom prst="rect">
@@ -8741,27 +9303,27 @@
           <a:p>
             <a:pPr algn="ctr"/>
             <a:r>
-              <a:rPr sz="1200" b="0">
-                <a:solidFill>
-                  <a:srgbClr val="6B7380"/>
-                </a:solidFill>
-                <a:latin typeface="Calibri"/>
-              </a:rPr>
-              <a:t>749 rows</a:t>
-            </a:r>
-          </a:p>
-        </p:txBody>
-      </p:sp>
-      <p:sp>
-        <p:nvSpPr>
-          <p:cNvPr id="19" name="Rectangle 18"/>
+              <a:rPr sz="1300" b="0">
+                <a:solidFill>
+                  <a:srgbClr val="57606E"/>
+                </a:solidFill>
+                <a:latin typeface="Calibri"/>
+              </a:rPr>
+              <a:t>749 rows · etl.py 164–169</a:t>
+            </a:r>
+          </a:p>
+        </p:txBody>
+      </p:sp>
+      <p:sp>
+        <p:nvSpPr>
+          <p:cNvPr id="20" name="Rectangle 19"/>
           <p:cNvSpPr/>
           <p:nvPr/>
         </p:nvSpPr>
         <p:spPr>
           <a:xfrm>
-            <a:off x="8778240" y="1783080"/>
-            <a:ext cx="2743200" cy="1188720"/>
+            <a:off x="8778240" y="1828800"/>
+            <a:ext cx="2743200" cy="1234440"/>
           </a:xfrm>
           <a:prstGeom prst="rect">
             <a:avLst/>
@@ -8797,14 +9359,14 @@
       </p:sp>
       <p:sp>
         <p:nvSpPr>
-          <p:cNvPr id="20" name="Rectangle 19"/>
+          <p:cNvPr id="21" name="Rectangle 20"/>
           <p:cNvSpPr/>
           <p:nvPr/>
         </p:nvSpPr>
         <p:spPr>
           <a:xfrm>
-            <a:off x="8778240" y="1783080"/>
-            <a:ext cx="2743200" cy="54864"/>
+            <a:off x="8778240" y="1828800"/>
+            <a:ext cx="2743200" cy="64008"/>
           </a:xfrm>
           <a:prstGeom prst="rect">
             <a:avLst/>
@@ -8840,13 +9402,13 @@
       </p:sp>
       <p:sp>
         <p:nvSpPr>
-          <p:cNvPr id="21" name="TextBox 20"/>
-          <p:cNvSpPr txBox="1"/>
-          <p:nvPr/>
-        </p:nvSpPr>
-        <p:spPr>
-          <a:xfrm>
-            <a:off x="8778240" y="1965960"/>
+          <p:cNvPr id="22" name="TextBox 21"/>
+          <p:cNvSpPr txBox="1"/>
+          <p:nvPr/>
+        </p:nvSpPr>
+        <p:spPr>
+          <a:xfrm>
+            <a:off x="8778240" y="2029968"/>
             <a:ext cx="2743200" cy="457200"/>
           </a:xfrm>
           <a:prstGeom prst="rect">
@@ -8862,7 +9424,7 @@
           <a:p>
             <a:pPr algn="ctr"/>
             <a:r>
-              <a:rPr sz="1800" b="1">
+              <a:rPr sz="2000" b="1">
                 <a:solidFill>
                   <a:srgbClr val="1F3A5F"/>
                 </a:solidFill>
@@ -8875,13 +9437,13 @@
       </p:sp>
       <p:sp>
         <p:nvSpPr>
-          <p:cNvPr id="22" name="TextBox 21"/>
-          <p:cNvSpPr txBox="1"/>
-          <p:nvPr/>
-        </p:nvSpPr>
-        <p:spPr>
-          <a:xfrm>
-            <a:off x="8778240" y="2468880"/>
+          <p:cNvPr id="23" name="TextBox 22"/>
+          <p:cNvSpPr txBox="1"/>
+          <p:nvPr/>
+        </p:nvSpPr>
+        <p:spPr>
+          <a:xfrm>
+            <a:off x="8778240" y="2542032"/>
             <a:ext cx="2743200" cy="457200"/>
           </a:xfrm>
           <a:prstGeom prst="rect">
@@ -8897,27 +9459,27 @@
           <a:p>
             <a:pPr algn="ctr"/>
             <a:r>
-              <a:rPr sz="1200" b="0">
-                <a:solidFill>
-                  <a:srgbClr val="6B7380"/>
-                </a:solidFill>
-                <a:latin typeface="Calibri"/>
-              </a:rPr>
-              <a:t>5 rows</a:t>
-            </a:r>
-          </a:p>
-        </p:txBody>
-      </p:sp>
-      <p:sp>
-        <p:nvSpPr>
-          <p:cNvPr id="23" name="Rectangle 22"/>
+              <a:rPr sz="1300" b="0">
+                <a:solidFill>
+                  <a:srgbClr val="57606E"/>
+                </a:solidFill>
+                <a:latin typeface="Calibri"/>
+              </a:rPr>
+              <a:t>5 rows · etl.py 171–184</a:t>
+            </a:r>
+          </a:p>
+        </p:txBody>
+      </p:sp>
+      <p:sp>
+        <p:nvSpPr>
+          <p:cNvPr id="24" name="Rectangle 23"/>
           <p:cNvSpPr/>
           <p:nvPr/>
         </p:nvSpPr>
         <p:spPr>
           <a:xfrm>
-            <a:off x="4572000" y="5120640"/>
-            <a:ext cx="2743200" cy="1188720"/>
+            <a:off x="4572000" y="5074920"/>
+            <a:ext cx="2743200" cy="1234440"/>
           </a:xfrm>
           <a:prstGeom prst="rect">
             <a:avLst/>
@@ -8953,14 +9515,14 @@
       </p:sp>
       <p:sp>
         <p:nvSpPr>
-          <p:cNvPr id="24" name="Rectangle 23"/>
+          <p:cNvPr id="25" name="Rectangle 24"/>
           <p:cNvSpPr/>
           <p:nvPr/>
         </p:nvSpPr>
         <p:spPr>
           <a:xfrm>
-            <a:off x="4572000" y="5120640"/>
-            <a:ext cx="2743200" cy="54864"/>
+            <a:off x="4572000" y="5074920"/>
+            <a:ext cx="2743200" cy="64008"/>
           </a:xfrm>
           <a:prstGeom prst="rect">
             <a:avLst/>
@@ -8996,13 +9558,13 @@
       </p:sp>
       <p:sp>
         <p:nvSpPr>
-          <p:cNvPr id="25" name="TextBox 24"/>
-          <p:cNvSpPr txBox="1"/>
-          <p:nvPr/>
-        </p:nvSpPr>
-        <p:spPr>
-          <a:xfrm>
-            <a:off x="4572000" y="5303520"/>
+          <p:cNvPr id="26" name="TextBox 25"/>
+          <p:cNvSpPr txBox="1"/>
+          <p:nvPr/>
+        </p:nvSpPr>
+        <p:spPr>
+          <a:xfrm>
+            <a:off x="4572000" y="5276088"/>
             <a:ext cx="2743200" cy="457200"/>
           </a:xfrm>
           <a:prstGeom prst="rect">
@@ -9018,7 +9580,7 @@
           <a:p>
             <a:pPr algn="ctr"/>
             <a:r>
-              <a:rPr sz="1800" b="1">
+              <a:rPr sz="2000" b="1">
                 <a:solidFill>
                   <a:srgbClr val="1F3A5F"/>
                 </a:solidFill>
@@ -9031,13 +9593,13 @@
       </p:sp>
       <p:sp>
         <p:nvSpPr>
-          <p:cNvPr id="26" name="TextBox 25"/>
-          <p:cNvSpPr txBox="1"/>
-          <p:nvPr/>
-        </p:nvSpPr>
-        <p:spPr>
-          <a:xfrm>
-            <a:off x="4572000" y="5806440"/>
+          <p:cNvPr id="27" name="TextBox 26"/>
+          <p:cNvSpPr txBox="1"/>
+          <p:nvPr/>
+        </p:nvSpPr>
+        <p:spPr>
+          <a:xfrm>
+            <a:off x="4572000" y="5788152"/>
             <a:ext cx="2743200" cy="457200"/>
           </a:xfrm>
           <a:prstGeom prst="rect">
@@ -9053,27 +9615,27 @@
           <a:p>
             <a:pPr algn="ctr"/>
             <a:r>
-              <a:rPr sz="1200" b="0">
-                <a:solidFill>
-                  <a:srgbClr val="6B7380"/>
-                </a:solidFill>
-                <a:latin typeface="Calibri"/>
-              </a:rPr>
-              <a:t>3 rows</a:t>
-            </a:r>
-          </a:p>
-        </p:txBody>
-      </p:sp>
-      <p:sp>
-        <p:nvSpPr>
-          <p:cNvPr id="27" name="TextBox 26"/>
-          <p:cNvSpPr txBox="1"/>
-          <p:nvPr/>
-        </p:nvSpPr>
-        <p:spPr>
-          <a:xfrm>
-            <a:off x="502920" y="5989320"/>
-            <a:ext cx="10972800" cy="320040"/>
+              <a:rPr sz="1300" b="0">
+                <a:solidFill>
+                  <a:srgbClr val="57606E"/>
+                </a:solidFill>
+                <a:latin typeface="Calibri"/>
+              </a:rPr>
+              <a:t>3 rows · etl.py 186–195</a:t>
+            </a:r>
+          </a:p>
+        </p:txBody>
+      </p:sp>
+      <p:sp>
+        <p:nvSpPr>
+          <p:cNvPr id="28" name="TextBox 27"/>
+          <p:cNvSpPr txBox="1"/>
+          <p:nvPr/>
+        </p:nvSpPr>
+        <p:spPr>
+          <a:xfrm>
+            <a:off x="502920" y="6035040"/>
+            <a:ext cx="10972800" cy="365760"/>
           </a:xfrm>
           <a:prstGeom prst="rect">
             <a:avLst/>
@@ -9088,13 +9650,13 @@
           <a:p>
             <a:pPr algn="l"/>
             <a:r>
-              <a:rPr sz="1200" b="0">
-                <a:solidFill>
-                  <a:srgbClr val="6B7380"/>
-                </a:solidFill>
-                <a:latin typeface="Calibri"/>
-              </a:rPr>
-              <a:t>fact_trips joins to each dimension via natural keys (datetime_key, payment_type, distance_bucket).</a:t>
+              <a:rPr sz="1400" b="0">
+                <a:solidFill>
+                  <a:srgbClr val="57606E"/>
+                </a:solidFill>
+                <a:latin typeface="Calibri"/>
+              </a:rPr>
+              <a:t>Joined on natural keys: datetime_key · payment_type · distance_bucket  ·  small dims → broadcast joins.</a:t>
             </a:r>
           </a:p>
         </p:txBody>
@@ -9271,20 +9833,55 @@
           <a:p>
             <a:pPr algn="l"/>
             <a:r>
+              <a:rPr sz="1100" b="0">
+                <a:solidFill>
+                  <a:srgbClr val="57606E"/>
+                </a:solidFill>
+                <a:latin typeface="Calibri"/>
+              </a:rPr>
+              <a:t>Analytics</a:t>
+            </a:r>
+          </a:p>
+        </p:txBody>
+      </p:sp>
+      <p:sp>
+        <p:nvSpPr>
+          <p:cNvPr id="6" name="TextBox 5"/>
+          <p:cNvSpPr txBox="1"/>
+          <p:nvPr/>
+        </p:nvSpPr>
+        <p:spPr>
+          <a:xfrm>
+            <a:off x="457200" y="6693408"/>
+            <a:ext cx="7315200" cy="228600"/>
+          </a:xfrm>
+          <a:prstGeom prst="rect">
+            <a:avLst/>
+          </a:prstGeom>
+          <a:noFill/>
+        </p:spPr>
+        <p:txBody>
+          <a:bodyPr wrap="square" lIns="0" rIns="0" tIns="0" bIns="0">
+            <a:spAutoFit/>
+          </a:bodyPr>
+          <a:lstStyle/>
+          <a:p>
+            <a:pPr algn="l"/>
+            <a:r>
               <a:rPr sz="1000" b="0">
                 <a:solidFill>
-                  <a:srgbClr val="6B7380"/>
-                </a:solidFill>
-                <a:latin typeface="Calibri"/>
-              </a:rPr>
-              <a:t>Analytics</a:t>
-            </a:r>
-          </a:p>
-        </p:txBody>
-      </p:sp>
-      <p:sp>
-        <p:nvSpPr>
-          <p:cNvPr id="6" name="TextBox 5"/>
+                  <a:srgbClr val="57606E"/>
+                </a:solidFill>
+                <a:latin typeface="Calibri"/>
+              </a:rPr>
+              <a:t>Presenter: Ahmed</a:t>
+            </a:r>
+          </a:p>
+        </p:txBody>
+      </p:sp>
+      <p:sp>
+        <p:nvSpPr>
+          <p:cNvPr id="7" name="TextBox 6"/>
           <p:cNvSpPr txBox="1"/>
           <p:nvPr/>
         </p:nvSpPr>
@@ -9306,27 +9903,62 @@
           <a:p>
             <a:pPr algn="r"/>
             <a:r>
+              <a:rPr sz="1100" b="0">
+                <a:solidFill>
+                  <a:srgbClr val="57606E"/>
+                </a:solidFill>
+                <a:latin typeface="Calibri"/>
+              </a:rPr>
+              <a:t>6 / 11</a:t>
+            </a:r>
+          </a:p>
+        </p:txBody>
+      </p:sp>
+      <p:sp>
+        <p:nvSpPr>
+          <p:cNvPr id="8" name="TextBox 7"/>
+          <p:cNvSpPr txBox="1"/>
+          <p:nvPr/>
+        </p:nvSpPr>
+        <p:spPr>
+          <a:xfrm>
+            <a:off x="7315200" y="6693408"/>
+            <a:ext cx="4572000" cy="228600"/>
+          </a:xfrm>
+          <a:prstGeom prst="rect">
+            <a:avLst/>
+          </a:prstGeom>
+          <a:noFill/>
+        </p:spPr>
+        <p:txBody>
+          <a:bodyPr wrap="square" lIns="0" rIns="0" tIns="0" bIns="0">
+            <a:spAutoFit/>
+          </a:bodyPr>
+          <a:lstStyle/>
+          <a:p>
+            <a:pPr algn="r"/>
+            <a:r>
               <a:rPr sz="1000" b="0">
                 <a:solidFill>
-                  <a:srgbClr val="6B7380"/>
-                </a:solidFill>
-                <a:latin typeface="Calibri"/>
-              </a:rPr>
-              <a:t>6 / 11</a:t>
-            </a:r>
-          </a:p>
-        </p:txBody>
-      </p:sp>
-      <p:sp>
-        <p:nvSpPr>
-          <p:cNvPr id="7" name="TextBox 6"/>
-          <p:cNvSpPr txBox="1"/>
-          <p:nvPr/>
-        </p:nvSpPr>
-        <p:spPr>
-          <a:xfrm>
-            <a:off x="457200" y="6693408"/>
-            <a:ext cx="7315200" cy="228600"/>
+                  <a:srgbClr val="57606E"/>
+                </a:solidFill>
+                <a:latin typeface="Calibri"/>
+              </a:rPr>
+              <a:t>Group 17  ·  BSCS-13A  ·  BDA</a:t>
+            </a:r>
+          </a:p>
+        </p:txBody>
+      </p:sp>
+      <p:sp>
+        <p:nvSpPr>
+          <p:cNvPr id="9" name="TextBox 8"/>
+          <p:cNvSpPr txBox="1"/>
+          <p:nvPr/>
+        </p:nvSpPr>
+        <p:spPr>
+          <a:xfrm>
+            <a:off x="502920" y="411480"/>
+            <a:ext cx="10058400" cy="365760"/>
           </a:xfrm>
           <a:prstGeom prst="rect">
             <a:avLst/>
@@ -9341,27 +9973,27 @@
           <a:p>
             <a:pPr algn="l"/>
             <a:r>
-              <a:rPr sz="900" b="0">
-                <a:solidFill>
-                  <a:srgbClr val="6B7380"/>
-                </a:solidFill>
-                <a:latin typeface="Calibri"/>
-              </a:rPr>
-              <a:t>NYC Yellow Taxi Pipeline · Group 17 · BSCS-13A</a:t>
-            </a:r>
-          </a:p>
-        </p:txBody>
-      </p:sp>
-      <p:sp>
-        <p:nvSpPr>
-          <p:cNvPr id="8" name="TextBox 7"/>
-          <p:cNvSpPr txBox="1"/>
-          <p:nvPr/>
-        </p:nvSpPr>
-        <p:spPr>
-          <a:xfrm>
-            <a:off x="502920" y="411480"/>
-            <a:ext cx="10058400" cy="320040"/>
+              <a:rPr sz="1300" b="1">
+                <a:solidFill>
+                  <a:srgbClr val="C9A227"/>
+                </a:solidFill>
+                <a:latin typeface="Calibri"/>
+              </a:rPr>
+              <a:t>SLIDE 6</a:t>
+            </a:r>
+          </a:p>
+        </p:txBody>
+      </p:sp>
+      <p:sp>
+        <p:nvSpPr>
+          <p:cNvPr id="10" name="TextBox 9"/>
+          <p:cNvSpPr txBox="1"/>
+          <p:nvPr/>
+        </p:nvSpPr>
+        <p:spPr>
+          <a:xfrm>
+            <a:off x="502920" y="777240"/>
+            <a:ext cx="10972800" cy="868680"/>
           </a:xfrm>
           <a:prstGeom prst="rect">
             <a:avLst/>
@@ -9376,62 +10008,27 @@
           <a:p>
             <a:pPr algn="l"/>
             <a:r>
-              <a:rPr sz="1100" b="1">
-                <a:solidFill>
-                  <a:srgbClr val="C9A227"/>
-                </a:solidFill>
-                <a:latin typeface="Calibri"/>
-              </a:rPr>
-              <a:t>SLIDE 4</a:t>
-            </a:r>
-          </a:p>
-        </p:txBody>
-      </p:sp>
-      <p:sp>
-        <p:nvSpPr>
-          <p:cNvPr id="9" name="TextBox 8"/>
-          <p:cNvSpPr txBox="1"/>
-          <p:nvPr/>
-        </p:nvSpPr>
-        <p:spPr>
-          <a:xfrm>
-            <a:off x="502920" y="713232"/>
-            <a:ext cx="10972800" cy="777240"/>
-          </a:xfrm>
-          <a:prstGeom prst="rect">
-            <a:avLst/>
-          </a:prstGeom>
-          <a:noFill/>
-        </p:spPr>
-        <p:txBody>
-          <a:bodyPr wrap="square" lIns="0" rIns="0" tIns="0" bIns="0">
-            <a:spAutoFit/>
-          </a:bodyPr>
-          <a:lstStyle/>
-          <a:p>
-            <a:pPr algn="l"/>
-            <a:r>
-              <a:rPr sz="3200" b="1">
+              <a:rPr sz="3600" b="1">
                 <a:solidFill>
                   <a:srgbClr val="1F3A5F"/>
                 </a:solidFill>
                 <a:latin typeface="Calibri"/>
               </a:rPr>
-              <a:t>Data Analytics &amp; Visualization — 5 Business Questions</a:t>
-            </a:r>
-          </a:p>
-        </p:txBody>
-      </p:sp>
-      <p:sp>
-        <p:nvSpPr>
-          <p:cNvPr id="10" name="Rectangle 9"/>
+              <a:t>Five Business Questions  (analytics.py)</a:t>
+            </a:r>
+          </a:p>
+        </p:txBody>
+      </p:sp>
+      <p:sp>
+        <p:nvSpPr>
+          <p:cNvPr id="11" name="Rectangle 10"/>
           <p:cNvSpPr/>
           <p:nvPr/>
         </p:nvSpPr>
         <p:spPr>
           <a:xfrm>
-            <a:off x="502920" y="1417320"/>
-            <a:ext cx="548640" cy="28575"/>
+            <a:off x="502920" y="1554480"/>
+            <a:ext cx="640080" cy="31750"/>
           </a:xfrm>
           <a:prstGeom prst="rect">
             <a:avLst/>
@@ -9467,7 +10064,7 @@
       </p:sp>
       <p:sp>
         <p:nvSpPr>
-          <p:cNvPr id="11" name="TextBox 10"/>
+          <p:cNvPr id="12" name="TextBox 11"/>
           <p:cNvSpPr txBox="1"/>
           <p:nvPr/>
         </p:nvSpPr>
@@ -9489,95 +10086,140 @@
           <a:p>
             <a:pPr algn="l">
               <a:lnSpc>
-                <a:spcPct val="150000"/>
+                <a:spcPct val="155000"/>
               </a:lnSpc>
             </a:pPr>
             <a:r>
-              <a:rPr sz="1800">
+              <a:rPr sz="2000" b="1">
+                <a:solidFill>
+                  <a:srgbClr val="1F3A5F"/>
+                </a:solidFill>
+                <a:latin typeface="Calibri"/>
+              </a:rPr>
+              <a:t>Q1</a:t>
+            </a:r>
+            <a:r>
+              <a:rPr sz="2000" b="0">
                 <a:solidFill>
                   <a:srgbClr val="222A35"/>
                 </a:solidFill>
                 <a:latin typeface="Calibri"/>
               </a:rPr>
-              <a:t>Q1.  How do trip volume and average fare vary by hour and day of week?</a:t>
+              <a:t> — Trip volume &amp; average fare by hour and day of week  (lines 43–65)</a:t>
             </a:r>
           </a:p>
           <a:p>
             <a:pPr algn="l">
               <a:lnSpc>
-                <a:spcPct val="150000"/>
+                <a:spcPct val="155000"/>
               </a:lnSpc>
             </a:pPr>
             <a:r>
-              <a:rPr sz="1800">
+              <a:rPr sz="2000" b="1">
+                <a:solidFill>
+                  <a:srgbClr val="1F3A5F"/>
+                </a:solidFill>
+                <a:latin typeface="Calibri"/>
+              </a:rPr>
+              <a:t>Q2</a:t>
+            </a:r>
+            <a:r>
+              <a:rPr sz="2000" b="0">
                 <a:solidFill>
                   <a:srgbClr val="222A35"/>
                 </a:solidFill>
                 <a:latin typeface="Calibri"/>
               </a:rPr>
-              <a:t>Q2.  What is the correlation between trip distance and fare amount?</a:t>
+              <a:t> — Correlation between trip distance and fare amount  (lines 66–77)</a:t>
             </a:r>
           </a:p>
           <a:p>
             <a:pPr algn="l">
               <a:lnSpc>
-                <a:spcPct val="150000"/>
+                <a:spcPct val="155000"/>
               </a:lnSpc>
             </a:pPr>
             <a:r>
-              <a:rPr sz="1800">
+              <a:rPr sz="2000" b="1">
+                <a:solidFill>
+                  <a:srgbClr val="1F3A5F"/>
+                </a:solidFill>
+                <a:latin typeface="Calibri"/>
+              </a:rPr>
+              <a:t>Q3</a:t>
+            </a:r>
+            <a:r>
+              <a:rPr sz="2000" b="0">
                 <a:solidFill>
                   <a:srgbClr val="222A35"/>
                 </a:solidFill>
                 <a:latin typeface="Calibri"/>
               </a:rPr>
-              <a:t>Q3.  How does payment type preference change by time and location?</a:t>
+              <a:t> — Payment-type preference by time and pickup location  (lines 78–96)</a:t>
             </a:r>
           </a:p>
           <a:p>
             <a:pPr algn="l">
               <a:lnSpc>
-                <a:spcPct val="150000"/>
+                <a:spcPct val="155000"/>
               </a:lnSpc>
             </a:pPr>
             <a:r>
-              <a:rPr sz="1800">
+              <a:rPr sz="2000" b="1">
+                <a:solidFill>
+                  <a:srgbClr val="1F3A5F"/>
+                </a:solidFill>
+                <a:latin typeface="Calibri"/>
+              </a:rPr>
+              <a:t>Q4</a:t>
+            </a:r>
+            <a:r>
+              <a:rPr sz="2000" b="0">
                 <a:solidFill>
                   <a:srgbClr val="222A35"/>
                 </a:solidFill>
                 <a:latin typeface="Calibri"/>
               </a:rPr>
-              <a:t>Q4.  How does average tip differ by payment type, distance, or vendor?</a:t>
+              <a:t> — Average tip by payment type, distance, and vendor  (lines 97–111)</a:t>
             </a:r>
           </a:p>
           <a:p>
             <a:pPr algn="l">
               <a:lnSpc>
-                <a:spcPct val="150000"/>
+                <a:spcPct val="155000"/>
               </a:lnSpc>
             </a:pPr>
             <a:r>
-              <a:rPr sz="1800">
+              <a:rPr sz="2000" b="1">
+                <a:solidFill>
+                  <a:srgbClr val="1F3A5F"/>
+                </a:solidFill>
+                <a:latin typeface="Calibri"/>
+              </a:rPr>
+              <a:t>Q5</a:t>
+            </a:r>
+            <a:r>
+              <a:rPr sz="2000" b="0">
                 <a:solidFill>
                   <a:srgbClr val="222A35"/>
                 </a:solidFill>
                 <a:latin typeface="Calibri"/>
               </a:rPr>
-              <a:t>Q5.  Which pickup/dropoff location pairs have highest volume and fare?</a:t>
-            </a:r>
-          </a:p>
-        </p:txBody>
-      </p:sp>
-      <p:sp>
-        <p:nvSpPr>
-          <p:cNvPr id="12" name="TextBox 11"/>
+              <a:t> — Top pickup → dropoff pairs by volume and revenue  (lines 112–126)</a:t>
+            </a:r>
+          </a:p>
+        </p:txBody>
+      </p:sp>
+      <p:sp>
+        <p:nvSpPr>
+          <p:cNvPr id="13" name="TextBox 12"/>
           <p:cNvSpPr txBox="1"/>
           <p:nvPr/>
         </p:nvSpPr>
         <p:spPr>
           <a:xfrm>
             <a:off x="502920" y="5943600"/>
-            <a:ext cx="10972800" cy="365760"/>
+            <a:ext cx="11155680" cy="365760"/>
           </a:xfrm>
           <a:prstGeom prst="rect">
             <a:avLst/>
@@ -9592,13 +10234,13 @@
           <a:p>
             <a:pPr algn="l"/>
             <a:r>
-              <a:rPr sz="1200" b="0">
-                <a:solidFill>
-                  <a:srgbClr val="6B7380"/>
-                </a:solidFill>
-                <a:latin typeface="Calibri"/>
-              </a:rPr>
-              <a:t>Source: Dataset_Justification.pdf  ·  Implemented as Spark SQL queries in analytics.py.</a:t>
+              <a:rPr sz="1300" b="0">
+                <a:solidFill>
+                  <a:srgbClr val="57606E"/>
+                </a:solidFill>
+                <a:latin typeface="Calibri"/>
+              </a:rPr>
+              <a:t>Source of questions: Dataset_Justification.pdf  ·  Implemented as Spark SQL views over fact_trips and dims.</a:t>
             </a:r>
           </a:p>
         </p:txBody>
@@ -9775,20 +10417,55 @@
           <a:p>
             <a:pPr algn="l"/>
             <a:r>
+              <a:rPr sz="1100" b="0">
+                <a:solidFill>
+                  <a:srgbClr val="57606E"/>
+                </a:solidFill>
+                <a:latin typeface="Calibri"/>
+              </a:rPr>
+              <a:t>Findings — Q1 &amp; Q2</a:t>
+            </a:r>
+          </a:p>
+        </p:txBody>
+      </p:sp>
+      <p:sp>
+        <p:nvSpPr>
+          <p:cNvPr id="6" name="TextBox 5"/>
+          <p:cNvSpPr txBox="1"/>
+          <p:nvPr/>
+        </p:nvSpPr>
+        <p:spPr>
+          <a:xfrm>
+            <a:off x="457200" y="6693408"/>
+            <a:ext cx="7315200" cy="228600"/>
+          </a:xfrm>
+          <a:prstGeom prst="rect">
+            <a:avLst/>
+          </a:prstGeom>
+          <a:noFill/>
+        </p:spPr>
+        <p:txBody>
+          <a:bodyPr wrap="square" lIns="0" rIns="0" tIns="0" bIns="0">
+            <a:spAutoFit/>
+          </a:bodyPr>
+          <a:lstStyle/>
+          <a:p>
+            <a:pPr algn="l"/>
+            <a:r>
               <a:rPr sz="1000" b="0">
                 <a:solidFill>
-                  <a:srgbClr val="6B7380"/>
-                </a:solidFill>
-                <a:latin typeface="Calibri"/>
-              </a:rPr>
-              <a:t>Analytics</a:t>
-            </a:r>
-          </a:p>
-        </p:txBody>
-      </p:sp>
-      <p:sp>
-        <p:nvSpPr>
-          <p:cNvPr id="6" name="TextBox 5"/>
+                  <a:srgbClr val="57606E"/>
+                </a:solidFill>
+                <a:latin typeface="Calibri"/>
+              </a:rPr>
+              <a:t>Presenter: Ahmed</a:t>
+            </a:r>
+          </a:p>
+        </p:txBody>
+      </p:sp>
+      <p:sp>
+        <p:nvSpPr>
+          <p:cNvPr id="7" name="TextBox 6"/>
           <p:cNvSpPr txBox="1"/>
           <p:nvPr/>
         </p:nvSpPr>
@@ -9810,27 +10487,62 @@
           <a:p>
             <a:pPr algn="r"/>
             <a:r>
+              <a:rPr sz="1100" b="0">
+                <a:solidFill>
+                  <a:srgbClr val="57606E"/>
+                </a:solidFill>
+                <a:latin typeface="Calibri"/>
+              </a:rPr>
+              <a:t>7 / 11</a:t>
+            </a:r>
+          </a:p>
+        </p:txBody>
+      </p:sp>
+      <p:sp>
+        <p:nvSpPr>
+          <p:cNvPr id="8" name="TextBox 7"/>
+          <p:cNvSpPr txBox="1"/>
+          <p:nvPr/>
+        </p:nvSpPr>
+        <p:spPr>
+          <a:xfrm>
+            <a:off x="7315200" y="6693408"/>
+            <a:ext cx="4572000" cy="228600"/>
+          </a:xfrm>
+          <a:prstGeom prst="rect">
+            <a:avLst/>
+          </a:prstGeom>
+          <a:noFill/>
+        </p:spPr>
+        <p:txBody>
+          <a:bodyPr wrap="square" lIns="0" rIns="0" tIns="0" bIns="0">
+            <a:spAutoFit/>
+          </a:bodyPr>
+          <a:lstStyle/>
+          <a:p>
+            <a:pPr algn="r"/>
+            <a:r>
               <a:rPr sz="1000" b="0">
                 <a:solidFill>
-                  <a:srgbClr val="6B7380"/>
-                </a:solidFill>
-                <a:latin typeface="Calibri"/>
-              </a:rPr>
-              <a:t>7 / 11</a:t>
-            </a:r>
-          </a:p>
-        </p:txBody>
-      </p:sp>
-      <p:sp>
-        <p:nvSpPr>
-          <p:cNvPr id="7" name="TextBox 6"/>
-          <p:cNvSpPr txBox="1"/>
-          <p:nvPr/>
-        </p:nvSpPr>
-        <p:spPr>
-          <a:xfrm>
-            <a:off x="457200" y="6693408"/>
-            <a:ext cx="7315200" cy="228600"/>
+                  <a:srgbClr val="57606E"/>
+                </a:solidFill>
+                <a:latin typeface="Calibri"/>
+              </a:rPr>
+              <a:t>Group 17  ·  BSCS-13A  ·  BDA</a:t>
+            </a:r>
+          </a:p>
+        </p:txBody>
+      </p:sp>
+      <p:sp>
+        <p:nvSpPr>
+          <p:cNvPr id="9" name="TextBox 8"/>
+          <p:cNvSpPr txBox="1"/>
+          <p:nvPr/>
+        </p:nvSpPr>
+        <p:spPr>
+          <a:xfrm>
+            <a:off x="502920" y="411480"/>
+            <a:ext cx="10058400" cy="365760"/>
           </a:xfrm>
           <a:prstGeom prst="rect">
             <a:avLst/>
@@ -9845,27 +10557,27 @@
           <a:p>
             <a:pPr algn="l"/>
             <a:r>
-              <a:rPr sz="900" b="0">
-                <a:solidFill>
-                  <a:srgbClr val="6B7380"/>
-                </a:solidFill>
-                <a:latin typeface="Calibri"/>
-              </a:rPr>
-              <a:t>NYC Yellow Taxi Pipeline · Group 17 · BSCS-13A</a:t>
-            </a:r>
-          </a:p>
-        </p:txBody>
-      </p:sp>
-      <p:sp>
-        <p:nvSpPr>
-          <p:cNvPr id="8" name="TextBox 7"/>
-          <p:cNvSpPr txBox="1"/>
-          <p:nvPr/>
-        </p:nvSpPr>
-        <p:spPr>
-          <a:xfrm>
-            <a:off x="502920" y="411480"/>
-            <a:ext cx="10058400" cy="320040"/>
+              <a:rPr sz="1300" b="1">
+                <a:solidFill>
+                  <a:srgbClr val="C9A227"/>
+                </a:solidFill>
+                <a:latin typeface="Calibri"/>
+              </a:rPr>
+              <a:t>FINDINGS</a:t>
+            </a:r>
+          </a:p>
+        </p:txBody>
+      </p:sp>
+      <p:sp>
+        <p:nvSpPr>
+          <p:cNvPr id="10" name="TextBox 9"/>
+          <p:cNvSpPr txBox="1"/>
+          <p:nvPr/>
+        </p:nvSpPr>
+        <p:spPr>
+          <a:xfrm>
+            <a:off x="502920" y="777240"/>
+            <a:ext cx="10972800" cy="868680"/>
           </a:xfrm>
           <a:prstGeom prst="rect">
             <a:avLst/>
@@ -9880,42 +10592,7 @@
           <a:p>
             <a:pPr algn="l"/>
             <a:r>
-              <a:rPr sz="1100" b="1">
-                <a:solidFill>
-                  <a:srgbClr val="C9A227"/>
-                </a:solidFill>
-                <a:latin typeface="Calibri"/>
-              </a:rPr>
-              <a:t>FINDINGS</a:t>
-            </a:r>
-          </a:p>
-        </p:txBody>
-      </p:sp>
-      <p:sp>
-        <p:nvSpPr>
-          <p:cNvPr id="9" name="TextBox 8"/>
-          <p:cNvSpPr txBox="1"/>
-          <p:nvPr/>
-        </p:nvSpPr>
-        <p:spPr>
-          <a:xfrm>
-            <a:off x="502920" y="713232"/>
-            <a:ext cx="10972800" cy="777240"/>
-          </a:xfrm>
-          <a:prstGeom prst="rect">
-            <a:avLst/>
-          </a:prstGeom>
-          <a:noFill/>
-        </p:spPr>
-        <p:txBody>
-          <a:bodyPr wrap="square" lIns="0" rIns="0" tIns="0" bIns="0">
-            <a:spAutoFit/>
-          </a:bodyPr>
-          <a:lstStyle/>
-          <a:p>
-            <a:pPr algn="l"/>
-            <a:r>
-              <a:rPr sz="3200" b="1">
+              <a:rPr sz="3600" b="1">
                 <a:solidFill>
                   <a:srgbClr val="1F3A5F"/>
                 </a:solidFill>
@@ -9928,14 +10605,14 @@
       </p:sp>
       <p:sp>
         <p:nvSpPr>
-          <p:cNvPr id="10" name="Rectangle 9"/>
+          <p:cNvPr id="11" name="Rectangle 10"/>
           <p:cNvSpPr/>
           <p:nvPr/>
         </p:nvSpPr>
         <p:spPr>
           <a:xfrm>
-            <a:off x="502920" y="1417320"/>
-            <a:ext cx="548640" cy="28575"/>
+            <a:off x="502920" y="1554480"/>
+            <a:ext cx="640080" cy="31750"/>
           </a:xfrm>
           <a:prstGeom prst="rect">
             <a:avLst/>
@@ -9971,7 +10648,7 @@
       </p:sp>
       <p:pic>
         <p:nvPicPr>
-          <p:cNvPr id="11" name="Picture 10" descr="chart_line_trend.png"/>
+          <p:cNvPr id="12" name="Picture 11" descr="chart_line_trend.png"/>
           <p:cNvPicPr>
             <a:picLocks noChangeAspect="1"/>
           </p:cNvPicPr>
@@ -9985,8 +10662,8 @@
         </p:blipFill>
         <p:spPr>
           <a:xfrm>
-            <a:off x="502920" y="1828800"/>
-            <a:ext cx="5669280" cy="3383280"/>
+            <a:off x="502920" y="1783080"/>
+            <a:ext cx="5669280" cy="3200400"/>
           </a:xfrm>
           <a:prstGeom prst="rect">
             <a:avLst/>
@@ -9995,7 +10672,7 @@
       </p:pic>
       <p:pic>
         <p:nvPicPr>
-          <p:cNvPr id="12" name="Picture 11" descr="chart_scatter_revenue_duration.png"/>
+          <p:cNvPr id="13" name="Picture 12" descr="chart_scatter_revenue_duration.png"/>
           <p:cNvPicPr>
             <a:picLocks noChangeAspect="1"/>
           </p:cNvPicPr>
@@ -10009,8 +10686,8 @@
         </p:blipFill>
         <p:spPr>
           <a:xfrm>
-            <a:off x="6446520" y="1828800"/>
-            <a:ext cx="5303520" cy="3383280"/>
+            <a:off x="6446520" y="1783080"/>
+            <a:ext cx="5303520" cy="3200400"/>
           </a:xfrm>
           <a:prstGeom prst="rect">
             <a:avLst/>
@@ -10019,14 +10696,14 @@
       </p:pic>
       <p:sp>
         <p:nvSpPr>
-          <p:cNvPr id="13" name="TextBox 12"/>
-          <p:cNvSpPr txBox="1"/>
-          <p:nvPr/>
-        </p:nvSpPr>
-        <p:spPr>
-          <a:xfrm>
-            <a:off x="502920" y="5349240"/>
-            <a:ext cx="5486400" cy="1188720"/>
+          <p:cNvPr id="14" name="TextBox 13"/>
+          <p:cNvSpPr txBox="1"/>
+          <p:nvPr/>
+        </p:nvSpPr>
+        <p:spPr>
+          <a:xfrm>
+            <a:off x="502920" y="5120640"/>
+            <a:ext cx="5669280" cy="1280160"/>
           </a:xfrm>
           <a:prstGeom prst="rect">
             <a:avLst/>
@@ -10041,11 +10718,11 @@
           <a:p>
             <a:pPr algn="l">
               <a:lnSpc>
-                <a:spcPct val="125000"/>
+                <a:spcPct val="130000"/>
               </a:lnSpc>
             </a:pPr>
             <a:r>
-              <a:rPr sz="1200">
+              <a:rPr sz="1500">
                 <a:solidFill>
                   <a:srgbClr val="222A35"/>
                 </a:solidFill>
@@ -10057,11 +10734,11 @@
           <a:p>
             <a:pPr algn="l">
               <a:lnSpc>
-                <a:spcPct val="125000"/>
+                <a:spcPct val="130000"/>
               </a:lnSpc>
             </a:pPr>
             <a:r>
-              <a:rPr sz="1200">
+              <a:rPr sz="1500">
                 <a:solidFill>
                   <a:srgbClr val="222A35"/>
                 </a:solidFill>
@@ -10073,11 +10750,11 @@
           <a:p>
             <a:pPr algn="l">
               <a:lnSpc>
-                <a:spcPct val="125000"/>
+                <a:spcPct val="130000"/>
               </a:lnSpc>
             </a:pPr>
             <a:r>
-              <a:rPr sz="1200">
+              <a:rPr sz="1500">
                 <a:solidFill>
                   <a:srgbClr val="222A35"/>
                 </a:solidFill>
@@ -10090,14 +10767,14 @@
       </p:sp>
       <p:sp>
         <p:nvSpPr>
-          <p:cNvPr id="14" name="TextBox 13"/>
-          <p:cNvSpPr txBox="1"/>
-          <p:nvPr/>
-        </p:nvSpPr>
-        <p:spPr>
-          <a:xfrm>
-            <a:off x="6446520" y="5349240"/>
-            <a:ext cx="5486400" cy="1188720"/>
+          <p:cNvPr id="15" name="TextBox 14"/>
+          <p:cNvSpPr txBox="1"/>
+          <p:nvPr/>
+        </p:nvSpPr>
+        <p:spPr>
+          <a:xfrm>
+            <a:off x="6446520" y="5120640"/>
+            <a:ext cx="5486400" cy="1280160"/>
           </a:xfrm>
           <a:prstGeom prst="rect">
             <a:avLst/>
@@ -10112,49 +10789,49 @@
           <a:p>
             <a:pPr algn="l">
               <a:lnSpc>
-                <a:spcPct val="125000"/>
+                <a:spcPct val="130000"/>
               </a:lnSpc>
             </a:pPr>
             <a:r>
-              <a:rPr sz="1200">
+              <a:rPr sz="1500">
                 <a:solidFill>
                   <a:srgbClr val="222A35"/>
                 </a:solidFill>
                 <a:latin typeface="Calibri"/>
               </a:rPr>
-              <a:t>•  Strong positive distance-vs-fare relationship.</a:t>
+              <a:t>•  Strong positive distance ↔ fare relationship.</a:t>
             </a:r>
           </a:p>
           <a:p>
             <a:pPr algn="l">
               <a:lnSpc>
-                <a:spcPct val="125000"/>
+                <a:spcPct val="130000"/>
               </a:lnSpc>
             </a:pPr>
             <a:r>
-              <a:rPr sz="1200">
+              <a:rPr sz="1500">
                 <a:solidFill>
                   <a:srgbClr val="222A35"/>
                 </a:solidFill>
                 <a:latin typeface="Calibri"/>
               </a:rPr>
-              <a:t>•  Within-bin correlation low (per-bin variance).</a:t>
+              <a:t>•  Within-bin correlation low → time/traffic noise.</a:t>
             </a:r>
           </a:p>
           <a:p>
             <a:pPr algn="l">
               <a:lnSpc>
-                <a:spcPct val="125000"/>
+                <a:spcPct val="130000"/>
               </a:lnSpc>
             </a:pPr>
             <a:r>
-              <a:rPr sz="1200">
+              <a:rPr sz="1500">
                 <a:solidFill>
                   <a:srgbClr val="222A35"/>
                 </a:solidFill>
                 <a:latin typeface="Calibri"/>
               </a:rPr>
-              <a:t>•  Confirms distance as primary fare driver.</a:t>
+              <a:t>•  Distance is the dominant fare driver.</a:t>
             </a:r>
           </a:p>
         </p:txBody>
@@ -10331,20 +11008,55 @@
           <a:p>
             <a:pPr algn="l"/>
             <a:r>
+              <a:rPr sz="1100" b="0">
+                <a:solidFill>
+                  <a:srgbClr val="57606E"/>
+                </a:solidFill>
+                <a:latin typeface="Calibri"/>
+              </a:rPr>
+              <a:t>Findings — Q3, Q4, Q5</a:t>
+            </a:r>
+          </a:p>
+        </p:txBody>
+      </p:sp>
+      <p:sp>
+        <p:nvSpPr>
+          <p:cNvPr id="6" name="TextBox 5"/>
+          <p:cNvSpPr txBox="1"/>
+          <p:nvPr/>
+        </p:nvSpPr>
+        <p:spPr>
+          <a:xfrm>
+            <a:off x="457200" y="6693408"/>
+            <a:ext cx="7315200" cy="228600"/>
+          </a:xfrm>
+          <a:prstGeom prst="rect">
+            <a:avLst/>
+          </a:prstGeom>
+          <a:noFill/>
+        </p:spPr>
+        <p:txBody>
+          <a:bodyPr wrap="square" lIns="0" rIns="0" tIns="0" bIns="0">
+            <a:spAutoFit/>
+          </a:bodyPr>
+          <a:lstStyle/>
+          <a:p>
+            <a:pPr algn="l"/>
+            <a:r>
               <a:rPr sz="1000" b="0">
                 <a:solidFill>
-                  <a:srgbClr val="6B7380"/>
-                </a:solidFill>
-                <a:latin typeface="Calibri"/>
-              </a:rPr>
-              <a:t>Analytics</a:t>
-            </a:r>
-          </a:p>
-        </p:txBody>
-      </p:sp>
-      <p:sp>
-        <p:nvSpPr>
-          <p:cNvPr id="6" name="TextBox 5"/>
+                  <a:srgbClr val="57606E"/>
+                </a:solidFill>
+                <a:latin typeface="Calibri"/>
+              </a:rPr>
+              <a:t>Presenter: Ahmed</a:t>
+            </a:r>
+          </a:p>
+        </p:txBody>
+      </p:sp>
+      <p:sp>
+        <p:nvSpPr>
+          <p:cNvPr id="7" name="TextBox 6"/>
           <p:cNvSpPr txBox="1"/>
           <p:nvPr/>
         </p:nvSpPr>
@@ -10366,27 +11078,62 @@
           <a:p>
             <a:pPr algn="r"/>
             <a:r>
+              <a:rPr sz="1100" b="0">
+                <a:solidFill>
+                  <a:srgbClr val="57606E"/>
+                </a:solidFill>
+                <a:latin typeface="Calibri"/>
+              </a:rPr>
+              <a:t>8 / 11</a:t>
+            </a:r>
+          </a:p>
+        </p:txBody>
+      </p:sp>
+      <p:sp>
+        <p:nvSpPr>
+          <p:cNvPr id="8" name="TextBox 7"/>
+          <p:cNvSpPr txBox="1"/>
+          <p:nvPr/>
+        </p:nvSpPr>
+        <p:spPr>
+          <a:xfrm>
+            <a:off x="7315200" y="6693408"/>
+            <a:ext cx="4572000" cy="228600"/>
+          </a:xfrm>
+          <a:prstGeom prst="rect">
+            <a:avLst/>
+          </a:prstGeom>
+          <a:noFill/>
+        </p:spPr>
+        <p:txBody>
+          <a:bodyPr wrap="square" lIns="0" rIns="0" tIns="0" bIns="0">
+            <a:spAutoFit/>
+          </a:bodyPr>
+          <a:lstStyle/>
+          <a:p>
+            <a:pPr algn="r"/>
+            <a:r>
               <a:rPr sz="1000" b="0">
                 <a:solidFill>
-                  <a:srgbClr val="6B7380"/>
-                </a:solidFill>
-                <a:latin typeface="Calibri"/>
-              </a:rPr>
-              <a:t>8 / 11</a:t>
-            </a:r>
-          </a:p>
-        </p:txBody>
-      </p:sp>
-      <p:sp>
-        <p:nvSpPr>
-          <p:cNvPr id="7" name="TextBox 6"/>
-          <p:cNvSpPr txBox="1"/>
-          <p:nvPr/>
-        </p:nvSpPr>
-        <p:spPr>
-          <a:xfrm>
-            <a:off x="457200" y="6693408"/>
-            <a:ext cx="7315200" cy="228600"/>
+                  <a:srgbClr val="57606E"/>
+                </a:solidFill>
+                <a:latin typeface="Calibri"/>
+              </a:rPr>
+              <a:t>Group 17  ·  BSCS-13A  ·  BDA</a:t>
+            </a:r>
+          </a:p>
+        </p:txBody>
+      </p:sp>
+      <p:sp>
+        <p:nvSpPr>
+          <p:cNvPr id="9" name="TextBox 8"/>
+          <p:cNvSpPr txBox="1"/>
+          <p:nvPr/>
+        </p:nvSpPr>
+        <p:spPr>
+          <a:xfrm>
+            <a:off x="502920" y="411480"/>
+            <a:ext cx="10058400" cy="365760"/>
           </a:xfrm>
           <a:prstGeom prst="rect">
             <a:avLst/>
@@ -10401,27 +11148,27 @@
           <a:p>
             <a:pPr algn="l"/>
             <a:r>
-              <a:rPr sz="900" b="0">
-                <a:solidFill>
-                  <a:srgbClr val="6B7380"/>
-                </a:solidFill>
-                <a:latin typeface="Calibri"/>
-              </a:rPr>
-              <a:t>NYC Yellow Taxi Pipeline · Group 17 · BSCS-13A</a:t>
-            </a:r>
-          </a:p>
-        </p:txBody>
-      </p:sp>
-      <p:sp>
-        <p:nvSpPr>
-          <p:cNvPr id="8" name="TextBox 7"/>
-          <p:cNvSpPr txBox="1"/>
-          <p:nvPr/>
-        </p:nvSpPr>
-        <p:spPr>
-          <a:xfrm>
-            <a:off x="502920" y="411480"/>
-            <a:ext cx="10058400" cy="320040"/>
+              <a:rPr sz="1300" b="1">
+                <a:solidFill>
+                  <a:srgbClr val="C9A227"/>
+                </a:solidFill>
+                <a:latin typeface="Calibri"/>
+              </a:rPr>
+              <a:t>FINDINGS</a:t>
+            </a:r>
+          </a:p>
+        </p:txBody>
+      </p:sp>
+      <p:sp>
+        <p:nvSpPr>
+          <p:cNvPr id="10" name="TextBox 9"/>
+          <p:cNvSpPr txBox="1"/>
+          <p:nvPr/>
+        </p:nvSpPr>
+        <p:spPr>
+          <a:xfrm>
+            <a:off x="502920" y="777240"/>
+            <a:ext cx="10972800" cy="868680"/>
           </a:xfrm>
           <a:prstGeom prst="rect">
             <a:avLst/>
@@ -10436,62 +11183,27 @@
           <a:p>
             <a:pPr algn="l"/>
             <a:r>
-              <a:rPr sz="1100" b="1">
-                <a:solidFill>
-                  <a:srgbClr val="C9A227"/>
-                </a:solidFill>
-                <a:latin typeface="Calibri"/>
-              </a:rPr>
-              <a:t>FINDINGS</a:t>
-            </a:r>
-          </a:p>
-        </p:txBody>
-      </p:sp>
-      <p:sp>
-        <p:nvSpPr>
-          <p:cNvPr id="9" name="TextBox 8"/>
-          <p:cNvSpPr txBox="1"/>
-          <p:nvPr/>
-        </p:nvSpPr>
-        <p:spPr>
-          <a:xfrm>
-            <a:off x="502920" y="713232"/>
-            <a:ext cx="10972800" cy="777240"/>
-          </a:xfrm>
-          <a:prstGeom prst="rect">
-            <a:avLst/>
-          </a:prstGeom>
-          <a:noFill/>
-        </p:spPr>
-        <p:txBody>
-          <a:bodyPr wrap="square" lIns="0" rIns="0" tIns="0" bIns="0">
-            <a:spAutoFit/>
-          </a:bodyPr>
-          <a:lstStyle/>
-          <a:p>
-            <a:pPr algn="l"/>
-            <a:r>
-              <a:rPr sz="3200" b="1">
+              <a:rPr sz="3600" b="1">
                 <a:solidFill>
                   <a:srgbClr val="1F3A5F"/>
                 </a:solidFill>
                 <a:latin typeface="Calibri"/>
               </a:rPr>
-              <a:t>Q3 — Payment   ·   Q4 — Tipping   ·   Q5 — Top Pairs</a:t>
-            </a:r>
-          </a:p>
-        </p:txBody>
-      </p:sp>
-      <p:sp>
-        <p:nvSpPr>
-          <p:cNvPr id="10" name="Rectangle 9"/>
+              <a:t>Q3 Payment   ·   Q4 Tipping   ·   Q5 Top OD Pairs</a:t>
+            </a:r>
+          </a:p>
+        </p:txBody>
+      </p:sp>
+      <p:sp>
+        <p:nvSpPr>
+          <p:cNvPr id="11" name="Rectangle 10"/>
           <p:cNvSpPr/>
           <p:nvPr/>
         </p:nvSpPr>
         <p:spPr>
           <a:xfrm>
-            <a:off x="502920" y="1417320"/>
-            <a:ext cx="548640" cy="28575"/>
+            <a:off x="502920" y="1554480"/>
+            <a:ext cx="640080" cy="31750"/>
           </a:xfrm>
           <a:prstGeom prst="rect">
             <a:avLst/>
@@ -10527,7 +11239,7 @@
       </p:sp>
       <p:pic>
         <p:nvPicPr>
-          <p:cNvPr id="11" name="Picture 10" descr="chart_bar_hour_revenue.png"/>
+          <p:cNvPr id="12" name="Picture 11" descr="chart_bar_hour_revenue.png"/>
           <p:cNvPicPr>
             <a:picLocks noChangeAspect="1"/>
           </p:cNvPicPr>
@@ -10541,8 +11253,8 @@
         </p:blipFill>
         <p:spPr>
           <a:xfrm>
-            <a:off x="502920" y="1828800"/>
-            <a:ext cx="5669280" cy="3291840"/>
+            <a:off x="502920" y="1783080"/>
+            <a:ext cx="5669280" cy="3200400"/>
           </a:xfrm>
           <a:prstGeom prst="rect">
             <a:avLst/>
@@ -10551,14 +11263,14 @@
       </p:pic>
       <p:sp>
         <p:nvSpPr>
-          <p:cNvPr id="12" name="Rectangle 11"/>
+          <p:cNvPr id="13" name="Rectangle 12"/>
           <p:cNvSpPr/>
           <p:nvPr/>
         </p:nvSpPr>
         <p:spPr>
           <a:xfrm>
-            <a:off x="6446520" y="1828800"/>
-            <a:ext cx="5303520" cy="3291840"/>
+            <a:off x="6446520" y="1783080"/>
+            <a:ext cx="5303520" cy="3200400"/>
           </a:xfrm>
           <a:prstGeom prst="rect">
             <a:avLst/>
@@ -10594,13 +11306,13 @@
       </p:sp>
       <p:sp>
         <p:nvSpPr>
-          <p:cNvPr id="13" name="TextBox 12"/>
-          <p:cNvSpPr txBox="1"/>
-          <p:nvPr/>
-        </p:nvSpPr>
-        <p:spPr>
-          <a:xfrm>
-            <a:off x="6629400" y="1920240"/>
+          <p:cNvPr id="14" name="TextBox 13"/>
+          <p:cNvSpPr txBox="1"/>
+          <p:nvPr/>
+        </p:nvSpPr>
+        <p:spPr>
+          <a:xfrm>
+            <a:off x="6629400" y="1874519"/>
             <a:ext cx="4937760" cy="365760"/>
           </a:xfrm>
           <a:prstGeom prst="rect">
@@ -10616,20 +11328,20 @@
           <a:p>
             <a:pPr algn="l"/>
             <a:r>
-              <a:rPr sz="1100" b="1">
+              <a:rPr sz="1200" b="1">
                 <a:solidFill>
                   <a:srgbClr val="C9A227"/>
                 </a:solidFill>
                 <a:latin typeface="Calibri"/>
               </a:rPr>
-              <a:t>KEY NUMBERS</a:t>
-            </a:r>
-          </a:p>
-        </p:txBody>
-      </p:sp>
-      <p:sp>
-        <p:nvSpPr>
-          <p:cNvPr id="14" name="TextBox 13"/>
+              <a:t>KEY NUMBERS FROM CSVs</a:t>
+            </a:r>
+          </a:p>
+        </p:txBody>
+      </p:sp>
+      <p:sp>
+        <p:nvSpPr>
+          <p:cNvPr id="15" name="TextBox 14"/>
           <p:cNvSpPr txBox="1"/>
           <p:nvPr/>
         </p:nvSpPr>
@@ -10655,7 +11367,7 @@
               </a:lnSpc>
             </a:pPr>
             <a:r>
-              <a:rPr sz="1300" b="1">
+              <a:rPr sz="1400" b="1">
                 <a:solidFill>
                   <a:srgbClr val="1F3A5F"/>
                 </a:solidFill>
@@ -10664,13 +11376,13 @@
               <a:t>•  Q3 Payment</a:t>
             </a:r>
             <a:r>
-              <a:rPr sz="1300" b="0">
+              <a:rPr sz="1400" b="0">
                 <a:solidFill>
                   <a:srgbClr val="222A35"/>
                 </a:solidFill>
                 <a:latin typeface="Calibri"/>
               </a:rPr>
-              <a:t> — Credit card ≈ 80–84% in core Manhattan zones</a:t>
+              <a:t> — Credit card 80–84% in zones 161/236/237</a:t>
             </a:r>
           </a:p>
           <a:p>
@@ -10680,22 +11392,22 @@
               </a:lnSpc>
             </a:pPr>
             <a:r>
-              <a:rPr sz="1300" b="1">
+              <a:rPr sz="1400" b="1">
                 <a:solidFill>
                   <a:srgbClr val="1F3A5F"/>
                 </a:solidFill>
                 <a:latin typeface="Calibri"/>
               </a:rPr>
-              <a:t>•  Q4 Tip (CC long)</a:t>
-            </a:r>
-            <a:r>
-              <a:rPr sz="1300" b="0">
+              <a:t>•  Q4 Tip CC long</a:t>
+            </a:r>
+            <a:r>
+              <a:rPr sz="1400" b="0">
                 <a:solidFill>
                   <a:srgbClr val="222A35"/>
                 </a:solidFill>
                 <a:latin typeface="Calibri"/>
               </a:rPr>
-              <a:t> — $11.58 avg · 21.2% of fare</a:t>
+              <a:t> — $11.58  ·  21.2% of fare</a:t>
             </a:r>
           </a:p>
           <a:p>
@@ -10705,22 +11417,22 @@
               </a:lnSpc>
             </a:pPr>
             <a:r>
-              <a:rPr sz="1300" b="1">
+              <a:rPr sz="1400" b="1">
                 <a:solidFill>
                   <a:srgbClr val="1F3A5F"/>
                 </a:solidFill>
                 <a:latin typeface="Calibri"/>
               </a:rPr>
-              <a:t>•  Q4 Tip (CC short)</a:t>
-            </a:r>
-            <a:r>
-              <a:rPr sz="1300" b="0">
+              <a:t>•  Q4 Tip CC short</a:t>
+            </a:r>
+            <a:r>
+              <a:rPr sz="1400" b="0">
                 <a:solidFill>
                   <a:srgbClr val="222A35"/>
                 </a:solidFill>
                 <a:latin typeface="Calibri"/>
               </a:rPr>
-              <a:t> — $2.71 avg · 27.9% of fare</a:t>
+              <a:t> — $2.71  ·  27.9% of fare</a:t>
             </a:r>
           </a:p>
           <a:p>
@@ -10730,22 +11442,22 @@
               </a:lnSpc>
             </a:pPr>
             <a:r>
-              <a:rPr sz="1300" b="1">
+              <a:rPr sz="1400" b="1">
                 <a:solidFill>
                   <a:srgbClr val="1F3A5F"/>
                 </a:solidFill>
                 <a:latin typeface="Calibri"/>
               </a:rPr>
-              <a:t>•  Q4 Tip (Cash)</a:t>
-            </a:r>
-            <a:r>
-              <a:rPr sz="1300" b="0">
+              <a:t>•  Q4 Cash / dispute</a:t>
+            </a:r>
+            <a:r>
+              <a:rPr sz="1400" b="0">
                 <a:solidFill>
                   <a:srgbClr val="222A35"/>
                 </a:solidFill>
                 <a:latin typeface="Calibri"/>
               </a:rPr>
-              <a:t> — ≈ 0 (No-charge / Dispute → ~$0.05)</a:t>
+              <a:t> — ≈ $0  (no-charge $0.11)</a:t>
             </a:r>
           </a:p>
           <a:p>
@@ -10755,16 +11467,16 @@
               </a:lnSpc>
             </a:pPr>
             <a:r>
-              <a:rPr sz="1300" b="1">
+              <a:rPr sz="1400" b="1">
                 <a:solidFill>
                   <a:srgbClr val="1F3A5F"/>
                 </a:solidFill>
                 <a:latin typeface="Calibri"/>
               </a:rPr>
-              <a:t>•  Q5 Top pair</a:t>
-            </a:r>
-            <a:r>
-              <a:rPr sz="1300" b="0">
+              <a:t>•  Q5 Top volume</a:t>
+            </a:r>
+            <a:r>
+              <a:rPr sz="1400" b="0">
                 <a:solidFill>
                   <a:srgbClr val="222A35"/>
                 </a:solidFill>
@@ -10780,16 +11492,16 @@
               </a:lnSpc>
             </a:pPr>
             <a:r>
-              <a:rPr sz="1300" b="1">
+              <a:rPr sz="1400" b="1">
                 <a:solidFill>
                   <a:srgbClr val="1F3A5F"/>
                 </a:solidFill>
                 <a:latin typeface="Calibri"/>
               </a:rPr>
-              <a:t>•  Q5 Top revenue pair</a:t>
-            </a:r>
-            <a:r>
-              <a:rPr sz="1300" b="0">
+              <a:t>•  Q5 Top revenue</a:t>
+            </a:r>
+            <a:r>
+              <a:rPr sz="1400" b="0">
                 <a:solidFill>
                   <a:srgbClr val="222A35"/>
                 </a:solidFill>
@@ -10802,14 +11514,14 @@
       </p:sp>
       <p:sp>
         <p:nvSpPr>
-          <p:cNvPr id="15" name="TextBox 14"/>
-          <p:cNvSpPr txBox="1"/>
-          <p:nvPr/>
-        </p:nvSpPr>
-        <p:spPr>
-          <a:xfrm>
-            <a:off x="502920" y="5212080"/>
-            <a:ext cx="11155680" cy="1188720"/>
+          <p:cNvPr id="16" name="TextBox 15"/>
+          <p:cNvSpPr txBox="1"/>
+          <p:nvPr/>
+        </p:nvSpPr>
+        <p:spPr>
+          <a:xfrm>
+            <a:off x="502920" y="5120640"/>
+            <a:ext cx="11155680" cy="1280160"/>
           </a:xfrm>
           <a:prstGeom prst="rect">
             <a:avLst/>
@@ -10824,49 +11536,49 @@
           <a:p>
             <a:pPr algn="l">
               <a:lnSpc>
-                <a:spcPct val="125000"/>
+                <a:spcPct val="130000"/>
               </a:lnSpc>
             </a:pPr>
             <a:r>
-              <a:rPr sz="1200">
+              <a:rPr sz="1500">
                 <a:solidFill>
                   <a:srgbClr val="222A35"/>
                 </a:solidFill>
                 <a:latin typeface="Calibri"/>
               </a:rPr>
-              <a:t>•  Credit card dominates payment mix at high-volume zones during peak hours.</a:t>
+              <a:t>•  Credit card dominates payment in core Manhattan during peak hours.</a:t>
             </a:r>
           </a:p>
           <a:p>
             <a:pPr algn="l">
               <a:lnSpc>
-                <a:spcPct val="125000"/>
+                <a:spcPct val="130000"/>
               </a:lnSpc>
             </a:pPr>
             <a:r>
-              <a:rPr sz="1200">
+              <a:rPr sz="1500">
                 <a:solidFill>
                   <a:srgbClr val="222A35"/>
                 </a:solidFill>
                 <a:latin typeface="Calibri"/>
               </a:rPr>
-              <a:t>•  Tipping rate (% of fare) is highest on short trips; tip dollar amount highest on long trips.</a:t>
+              <a:t>•  Tip $ highest on long trips; tip % highest on short trips.</a:t>
             </a:r>
           </a:p>
           <a:p>
             <a:pPr algn="l">
               <a:lnSpc>
-                <a:spcPct val="125000"/>
+                <a:spcPct val="130000"/>
               </a:lnSpc>
             </a:pPr>
             <a:r>
-              <a:rPr sz="1200">
+              <a:rPr sz="1500">
                 <a:solidFill>
                   <a:srgbClr val="222A35"/>
                 </a:solidFill>
                 <a:latin typeface="Calibri"/>
               </a:rPr>
-              <a:t>•  A handful of pickup/dropoff pairs (Manhattan core + JFK) concentrate disproportionate revenue.</a:t>
+              <a:t>•  A handful of OD pairs (Manhattan core + JFK) drive most revenue.</a:t>
             </a:r>
           </a:p>
         </p:txBody>
@@ -11043,20 +11755,55 @@
           <a:p>
             <a:pPr algn="l"/>
             <a:r>
+              <a:rPr sz="1100" b="0">
+                <a:solidFill>
+                  <a:srgbClr val="57606E"/>
+                </a:solidFill>
+                <a:latin typeface="Calibri"/>
+              </a:rPr>
+              <a:t>Engineering</a:t>
+            </a:r>
+          </a:p>
+        </p:txBody>
+      </p:sp>
+      <p:sp>
+        <p:nvSpPr>
+          <p:cNvPr id="6" name="TextBox 5"/>
+          <p:cNvSpPr txBox="1"/>
+          <p:nvPr/>
+        </p:nvSpPr>
+        <p:spPr>
+          <a:xfrm>
+            <a:off x="457200" y="6693408"/>
+            <a:ext cx="7315200" cy="228600"/>
+          </a:xfrm>
+          <a:prstGeom prst="rect">
+            <a:avLst/>
+          </a:prstGeom>
+          <a:noFill/>
+        </p:spPr>
+        <p:txBody>
+          <a:bodyPr wrap="square" lIns="0" rIns="0" tIns="0" bIns="0">
+            <a:spAutoFit/>
+          </a:bodyPr>
+          <a:lstStyle/>
+          <a:p>
+            <a:pPr algn="l"/>
+            <a:r>
               <a:rPr sz="1000" b="0">
                 <a:solidFill>
-                  <a:srgbClr val="6B7380"/>
-                </a:solidFill>
-                <a:latin typeface="Calibri"/>
-              </a:rPr>
-              <a:t>Engineering</a:t>
-            </a:r>
-          </a:p>
-        </p:txBody>
-      </p:sp>
-      <p:sp>
-        <p:nvSpPr>
-          <p:cNvPr id="6" name="TextBox 5"/>
+                  <a:srgbClr val="57606E"/>
+                </a:solidFill>
+                <a:latin typeface="Calibri"/>
+              </a:rPr>
+              <a:t>Presenter: Ahmed</a:t>
+            </a:r>
+          </a:p>
+        </p:txBody>
+      </p:sp>
+      <p:sp>
+        <p:nvSpPr>
+          <p:cNvPr id="7" name="TextBox 6"/>
           <p:cNvSpPr txBox="1"/>
           <p:nvPr/>
         </p:nvSpPr>
@@ -11078,27 +11825,62 @@
           <a:p>
             <a:pPr algn="r"/>
             <a:r>
+              <a:rPr sz="1100" b="0">
+                <a:solidFill>
+                  <a:srgbClr val="57606E"/>
+                </a:solidFill>
+                <a:latin typeface="Calibri"/>
+              </a:rPr>
+              <a:t>9 / 11</a:t>
+            </a:r>
+          </a:p>
+        </p:txBody>
+      </p:sp>
+      <p:sp>
+        <p:nvSpPr>
+          <p:cNvPr id="8" name="TextBox 7"/>
+          <p:cNvSpPr txBox="1"/>
+          <p:nvPr/>
+        </p:nvSpPr>
+        <p:spPr>
+          <a:xfrm>
+            <a:off x="7315200" y="6693408"/>
+            <a:ext cx="4572000" cy="228600"/>
+          </a:xfrm>
+          <a:prstGeom prst="rect">
+            <a:avLst/>
+          </a:prstGeom>
+          <a:noFill/>
+        </p:spPr>
+        <p:txBody>
+          <a:bodyPr wrap="square" lIns="0" rIns="0" tIns="0" bIns="0">
+            <a:spAutoFit/>
+          </a:bodyPr>
+          <a:lstStyle/>
+          <a:p>
+            <a:pPr algn="r"/>
+            <a:r>
               <a:rPr sz="1000" b="0">
                 <a:solidFill>
-                  <a:srgbClr val="6B7380"/>
-                </a:solidFill>
-                <a:latin typeface="Calibri"/>
-              </a:rPr>
-              <a:t>9 / 11</a:t>
-            </a:r>
-          </a:p>
-        </p:txBody>
-      </p:sp>
-      <p:sp>
-        <p:nvSpPr>
-          <p:cNvPr id="7" name="TextBox 6"/>
-          <p:cNvSpPr txBox="1"/>
-          <p:nvPr/>
-        </p:nvSpPr>
-        <p:spPr>
-          <a:xfrm>
-            <a:off x="457200" y="6693408"/>
-            <a:ext cx="7315200" cy="228600"/>
+                  <a:srgbClr val="57606E"/>
+                </a:solidFill>
+                <a:latin typeface="Calibri"/>
+              </a:rPr>
+              <a:t>Group 17  ·  BSCS-13A  ·  BDA</a:t>
+            </a:r>
+          </a:p>
+        </p:txBody>
+      </p:sp>
+      <p:sp>
+        <p:nvSpPr>
+          <p:cNvPr id="9" name="TextBox 8"/>
+          <p:cNvSpPr txBox="1"/>
+          <p:nvPr/>
+        </p:nvSpPr>
+        <p:spPr>
+          <a:xfrm>
+            <a:off x="502920" y="411480"/>
+            <a:ext cx="10058400" cy="365760"/>
           </a:xfrm>
           <a:prstGeom prst="rect">
             <a:avLst/>
@@ -11113,27 +11895,27 @@
           <a:p>
             <a:pPr algn="l"/>
             <a:r>
-              <a:rPr sz="900" b="0">
-                <a:solidFill>
-                  <a:srgbClr val="6B7380"/>
-                </a:solidFill>
-                <a:latin typeface="Calibri"/>
-              </a:rPr>
-              <a:t>NYC Yellow Taxi Pipeline · Group 17 · BSCS-13A</a:t>
-            </a:r>
-          </a:p>
-        </p:txBody>
-      </p:sp>
-      <p:sp>
-        <p:nvSpPr>
-          <p:cNvPr id="8" name="TextBox 7"/>
-          <p:cNvSpPr txBox="1"/>
-          <p:nvPr/>
-        </p:nvSpPr>
-        <p:spPr>
-          <a:xfrm>
-            <a:off x="502920" y="411480"/>
-            <a:ext cx="10058400" cy="320040"/>
+              <a:rPr sz="1300" b="1">
+                <a:solidFill>
+                  <a:srgbClr val="C9A227"/>
+                </a:solidFill>
+                <a:latin typeface="Calibri"/>
+              </a:rPr>
+              <a:t>BONUS</a:t>
+            </a:r>
+          </a:p>
+        </p:txBody>
+      </p:sp>
+      <p:sp>
+        <p:nvSpPr>
+          <p:cNvPr id="10" name="TextBox 9"/>
+          <p:cNvSpPr txBox="1"/>
+          <p:nvPr/>
+        </p:nvSpPr>
+        <p:spPr>
+          <a:xfrm>
+            <a:off x="502920" y="777240"/>
+            <a:ext cx="10972800" cy="868680"/>
           </a:xfrm>
           <a:prstGeom prst="rect">
             <a:avLst/>
@@ -11148,42 +11930,7 @@
           <a:p>
             <a:pPr algn="l"/>
             <a:r>
-              <a:rPr sz="1100" b="1">
-                <a:solidFill>
-                  <a:srgbClr val="C9A227"/>
-                </a:solidFill>
-                <a:latin typeface="Calibri"/>
-              </a:rPr>
-              <a:t>BONUS</a:t>
-            </a:r>
-          </a:p>
-        </p:txBody>
-      </p:sp>
-      <p:sp>
-        <p:nvSpPr>
-          <p:cNvPr id="9" name="TextBox 8"/>
-          <p:cNvSpPr txBox="1"/>
-          <p:nvPr/>
-        </p:nvSpPr>
-        <p:spPr>
-          <a:xfrm>
-            <a:off x="502920" y="713232"/>
-            <a:ext cx="10972800" cy="777240"/>
-          </a:xfrm>
-          <a:prstGeom prst="rect">
-            <a:avLst/>
-          </a:prstGeom>
-          <a:noFill/>
-        </p:spPr>
-        <p:txBody>
-          <a:bodyPr wrap="square" lIns="0" rIns="0" tIns="0" bIns="0">
-            <a:spAutoFit/>
-          </a:bodyPr>
-          <a:lstStyle/>
-          <a:p>
-            <a:pPr algn="l"/>
-            <a:r>
-              <a:rPr sz="3200" b="1">
+              <a:rPr sz="3600" b="1">
                 <a:solidFill>
                   <a:srgbClr val="1F3A5F"/>
                 </a:solidFill>
@@ -11196,14 +11943,14 @@
       </p:sp>
       <p:sp>
         <p:nvSpPr>
-          <p:cNvPr id="10" name="Rectangle 9"/>
+          <p:cNvPr id="11" name="Rectangle 10"/>
           <p:cNvSpPr/>
           <p:nvPr/>
         </p:nvSpPr>
         <p:spPr>
           <a:xfrm>
-            <a:off x="502920" y="1417320"/>
-            <a:ext cx="548640" cy="28575"/>
+            <a:off x="502920" y="1554480"/>
+            <a:ext cx="640080" cy="31750"/>
           </a:xfrm>
           <a:prstGeom prst="rect">
             <a:avLst/>
@@ -11239,13 +11986,13 @@
       </p:sp>
       <p:sp>
         <p:nvSpPr>
-          <p:cNvPr id="11" name="TextBox 10"/>
-          <p:cNvSpPr txBox="1"/>
-          <p:nvPr/>
-        </p:nvSpPr>
-        <p:spPr>
-          <a:xfrm>
-            <a:off x="502920" y="1783080"/>
+          <p:cNvPr id="12" name="TextBox 11"/>
+          <p:cNvSpPr txBox="1"/>
+          <p:nvPr/>
+        </p:nvSpPr>
+        <p:spPr>
+          <a:xfrm>
+            <a:off x="502920" y="1828800"/>
             <a:ext cx="11155680" cy="4389120"/>
           </a:xfrm>
           <a:prstGeom prst="rect">
@@ -11261,11 +12008,11 @@
           <a:p>
             <a:pPr algn="l">
               <a:lnSpc>
-                <a:spcPct val="135000"/>
+                <a:spcPct val="140000"/>
               </a:lnSpc>
             </a:pPr>
             <a:r>
-              <a:rPr sz="1500" b="1">
+              <a:rPr sz="1700" b="1">
                 <a:solidFill>
                   <a:srgbClr val="1F3A5F"/>
                 </a:solidFill>
@@ -11274,98 +12021,98 @@
               <a:t>•  Broadcast joins</a:t>
             </a:r>
             <a:r>
-              <a:rPr sz="1500" b="0">
+              <a:rPr sz="1700" b="0">
                 <a:solidFill>
                   <a:srgbClr val="222A35"/>
                 </a:solidFill>
                 <a:latin typeface="Calibri"/>
               </a:rPr>
-              <a:t> — Small dim tables broadcast to executors → eliminates shuffle on fact↔dim joins.</a:t>
+              <a:t> — small dims wrapped in F.broadcast(...)  (etl.py 198–200)</a:t>
             </a:r>
           </a:p>
           <a:p>
             <a:pPr algn="l">
               <a:lnSpc>
-                <a:spcPct val="135000"/>
+                <a:spcPct val="140000"/>
               </a:lnSpc>
             </a:pPr>
             <a:r>
-              <a:rPr sz="1500" b="1">
+              <a:rPr sz="1700" b="1">
                 <a:solidFill>
                   <a:srgbClr val="1F3A5F"/>
                 </a:solidFill>
                 <a:latin typeface="Calibri"/>
               </a:rPr>
-              <a:t>•  Caching reused DataFrame</a:t>
-            </a:r>
-            <a:r>
-              <a:rPr sz="1500" b="0">
+              <a:t>•  Cache reused DF</a:t>
+            </a:r>
+            <a:r>
+              <a:rPr sz="1700" b="0">
                 <a:solidFill>
                   <a:srgbClr val="222A35"/>
                 </a:solidFill>
                 <a:latin typeface="Calibri"/>
               </a:rPr>
-              <a:t> — Cleaned DF cached before deriving fact + dimensions to avoid recomputation.</a:t>
+              <a:t> — transformed.cache() before deriving fact + dims  (etl.py 161)</a:t>
             </a:r>
           </a:p>
           <a:p>
             <a:pPr algn="l">
               <a:lnSpc>
-                <a:spcPct val="135000"/>
+                <a:spcPct val="140000"/>
               </a:lnSpc>
             </a:pPr>
             <a:r>
-              <a:rPr sz="1500" b="1">
+              <a:rPr sz="1700" b="1">
                 <a:solidFill>
                   <a:srgbClr val="1F3A5F"/>
                 </a:solidFill>
                 <a:latin typeface="Calibri"/>
               </a:rPr>
-              <a:t>•  Partitioned Parquet writes</a:t>
-            </a:r>
-            <a:r>
-              <a:rPr sz="1500" b="0">
+              <a:t>•  Partitioned Parquet</a:t>
+            </a:r>
+            <a:r>
+              <a:rPr sz="1700" b="0">
                 <a:solidFill>
                   <a:srgbClr val="222A35"/>
                 </a:solidFill>
                 <a:latin typeface="Calibri"/>
               </a:rPr>
-              <a:t> — fact_trips &amp; dim_datetime partitioned by pickup_year, pickup_month.</a:t>
+              <a:t> — fact_trips &amp; dim_datetime partitioned by year, month  (etl.py 370, 373)</a:t>
             </a:r>
           </a:p>
           <a:p>
             <a:pPr algn="l">
               <a:lnSpc>
-                <a:spcPct val="135000"/>
+                <a:spcPct val="140000"/>
               </a:lnSpc>
             </a:pPr>
             <a:r>
-              <a:rPr sz="1500" b="1">
+              <a:rPr sz="1700" b="1">
                 <a:solidFill>
                   <a:srgbClr val="1F3A5F"/>
                 </a:solidFill>
                 <a:latin typeface="Calibri"/>
               </a:rPr>
-              <a:t>•  percentile_approx</a:t>
-            </a:r>
-            <a:r>
-              <a:rPr sz="1500" b="0">
+              <a:t>•  Approx percentile</a:t>
+            </a:r>
+            <a:r>
+              <a:rPr sz="1700" b="0">
                 <a:solidFill>
                   <a:srgbClr val="222A35"/>
                 </a:solidFill>
                 <a:latin typeface="Calibri"/>
               </a:rPr>
-              <a:t> — Fast quantile estimation for distance capping &amp; median imputation.</a:t>
+              <a:t> — percentile_approx for distance cap &amp; medians  (etl.py 110, 117–122)</a:t>
             </a:r>
           </a:p>
           <a:p>
             <a:pPr algn="l">
               <a:lnSpc>
-                <a:spcPct val="135000"/>
+                <a:spcPct val="140000"/>
               </a:lnSpc>
             </a:pPr>
             <a:r>
-              <a:rPr sz="1500" b="1">
+              <a:rPr sz="1700" b="1">
                 <a:solidFill>
                   <a:srgbClr val="1F3A5F"/>
                 </a:solidFill>
@@ -11374,23 +12121,23 @@
               <a:t>•  Dynamic partition overwrite</a:t>
             </a:r>
             <a:r>
-              <a:rPr sz="1500" b="0">
+              <a:rPr sz="1700" b="0">
                 <a:solidFill>
                   <a:srgbClr val="222A35"/>
                 </a:solidFill>
                 <a:latin typeface="Calibri"/>
               </a:rPr>
-              <a:t> — spark.sql.sources.partitionOverwriteMode=dynamic for incremental loads.</a:t>
+              <a:t> — partitionOverwriteMode=dynamic  (etl.py 60)</a:t>
             </a:r>
           </a:p>
           <a:p>
             <a:pPr algn="l">
               <a:lnSpc>
-                <a:spcPct val="135000"/>
+                <a:spcPct val="140000"/>
               </a:lnSpc>
             </a:pPr>
             <a:r>
-              <a:rPr sz="1500" b="1">
+              <a:rPr sz="1700" b="1">
                 <a:solidFill>
                   <a:srgbClr val="1F3A5F"/>
                 </a:solidFill>
@@ -11399,13 +12146,13 @@
               <a:t>•  Tuned shuffle partitions</a:t>
             </a:r>
             <a:r>
-              <a:rPr sz="1500" b="0">
+              <a:rPr sz="1700" b="0">
                 <a:solidFill>
                   <a:srgbClr val="222A35"/>
                 </a:solidFill>
                 <a:latin typeface="Calibri"/>
               </a:rPr>
-              <a:t> — spark.sql.shuffle.partitions=16 for the single-month workload.</a:t>
+              <a:t> — spark.sql.shuffle.partitions = 16  (etl.py 59)</a:t>
             </a:r>
           </a:p>
         </p:txBody>
